--- a/docs/common/marketing/presentations/DRP-resumen.pptx
+++ b/docs/common/marketing/presentations/DRP-resumen.pptx
@@ -797,7 +797,7 @@
           <a:p>
             <a:r>
               <a:rPr lang="en-US" dirty="0"/>
-              <a:t>Portada. Resumen del README.md de DRP (estado 2026-08-19): Fases 0, 1 y 2 cerradas. El core completo y los cuatro módulos de prioridad alta, activables hogar por hogar.</a:t>
+              <a:t>Portada. Resumen del README.md de DRP (estado 2026-08-20): Fases 0, 1 y 2 y el cierre de huecos cerrados. El core completo y los cuatro módulos de prioridad alta, activables hogar por hogar.</a:t>
             </a:r>
             <a:endParaRPr lang="en-US" dirty="0"/>
           </a:p>
@@ -1589,7 +1589,7 @@
           <a:p>
             <a:r>
               <a:rPr lang="en-US" dirty="0"/>
-              <a:t>README §8: roadmap y estado. Fase 0 cerrada el 2026-08-07, Fase 1 el 2026-08-17 y Fase 2 el 2026-08-19. El detalle de cada una vive en su propio roadmap, en docs/common/product/.</a:t>
+              <a:t>README §8: roadmap y estado. Fase 0 cerrada el 2026-08-07, Fase 1 el 2026-08-17, Fase 2 el 2026-08-19 y el cierre de huecos —que no es una fase y por eso no lleva tarjeta numerada— el 2026-08-20. El detalle de cada bloque vive en su propio roadmap, en docs/common/product/.</a:t>
             </a:r>
             <a:endParaRPr lang="en-US" dirty="0"/>
           </a:p>
@@ -1677,7 +1677,7 @@
           <a:p>
             <a:r>
               <a:rPr lang="en-US" dirty="0"/>
-              <a:t>README §8, §9 y §11: cierre de la Fase 2 y lo que queda para la Fase 3, que todavía no está planificada.</a:t>
+              <a:t>README §8, §9 y §11: cierre de la Fase 2 y del cierre de huecos, y lo que queda para la Fase 3, que todavía no está planificada.</a:t>
             </a:r>
             <a:endParaRPr lang="en-US" dirty="0"/>
           </a:p>
@@ -2883,7 +2883,7 @@
         <p:spPr>
           <a:xfrm>
             <a:off x="868680" y="4526280"/>
-            <a:ext cx="1993392" cy="384048"/>
+            <a:ext cx="2862072" cy="384048"/>
           </a:xfrm>
           <a:prstGeom prst="roundRect">
             <a:avLst>
@@ -2910,7 +2910,7 @@
         <p:spPr>
           <a:xfrm>
             <a:off x="868680" y="4526280"/>
-            <a:ext cx="1993392" cy="384048"/>
+            <a:ext cx="2862072" cy="384048"/>
           </a:xfrm>
           <a:prstGeom prst="rect">
             <a:avLst/>
@@ -2934,7 +2934,7 @@
                 <a:ea typeface="Calibri" pitchFamily="34" charset="-122"/>
                 <a:cs typeface="Calibri" pitchFamily="34" charset="-120"/>
               </a:rPr>
-              <a:t>Fases 1 y 2 cerradas</a:t>
+              <a:t>Fases 1 y 2 + cierre de huecos</a:t>
             </a:r>
             <a:endParaRPr lang="en-US" sz="1150" dirty="0"/>
           </a:p>
@@ -2948,7 +2948,7 @@
         </p:nvSpPr>
         <p:spPr>
           <a:xfrm>
-            <a:off x="3026664" y="4526280"/>
+            <a:off x="3895344" y="4526280"/>
             <a:ext cx="1645920" cy="384048"/>
           </a:xfrm>
           <a:prstGeom prst="roundRect">
@@ -2975,7 +2975,7 @@
         </p:nvSpPr>
         <p:spPr>
           <a:xfrm>
-            <a:off x="3026664" y="4526280"/>
+            <a:off x="3895344" y="4526280"/>
             <a:ext cx="1645920" cy="384048"/>
           </a:xfrm>
           <a:prstGeom prst="rect">
@@ -3014,7 +3014,7 @@
         </p:nvSpPr>
         <p:spPr>
           <a:xfrm>
-            <a:off x="4837176" y="4526280"/>
+            <a:off x="5705856" y="4526280"/>
             <a:ext cx="1124712" cy="384048"/>
           </a:xfrm>
           <a:prstGeom prst="roundRect">
@@ -3041,7 +3041,7 @@
         </p:nvSpPr>
         <p:spPr>
           <a:xfrm>
-            <a:off x="4837176" y="4526280"/>
+            <a:off x="5705856" y="4526280"/>
             <a:ext cx="1124712" cy="384048"/>
           </a:xfrm>
           <a:prstGeom prst="rect">
@@ -3066,7 +3066,7 @@
                 <a:ea typeface="Calibri" pitchFamily="34" charset="-122"/>
                 <a:cs typeface="Calibri" pitchFamily="34" charset="-120"/>
               </a:rPr>
-              <a:t>2026-08-19</a:t>
+              <a:t>2026-08-20</a:t>
             </a:r>
             <a:endParaRPr lang="en-US" sz="1150" dirty="0"/>
           </a:p>
@@ -12698,7 +12698,7 @@
                 <a:ea typeface="Calibri" pitchFamily="34" charset="-122"/>
                 <a:cs typeface="Calibri" pitchFamily="34" charset="-120"/>
               </a:rPr>
-              <a:t>openapi.yaml, 98 operaciones, fuente de verdad</a:t>
+              <a:t>openapi.yaml, 106 operaciones, fuente de verdad</a:t>
             </a:r>
             <a:endParaRPr lang="en-US" sz="1100" dirty="0"/>
           </a:p>
@@ -15066,8 +15066,8 @@
         </p:nvSpPr>
         <p:spPr>
           <a:xfrm>
-            <a:off x="548640" y="5166360"/>
-            <a:ext cx="11094415" cy="502920"/>
+            <a:off x="548640" y="5047488"/>
+            <a:ext cx="11094415" cy="457200"/>
           </a:xfrm>
           <a:prstGeom prst="rect">
             <a:avLst/>
@@ -15081,12 +15081,54 @@
           <a:p>
             <a:pPr indent="0" marL="0">
               <a:lnSpc>
-                <a:spcPts val="1900"/>
+                <a:spcPts val="1700"/>
               </a:lnSpc>
               <a:buNone/>
             </a:pPr>
             <a:r>
-              <a:rPr lang="en-US" sz="1300" i="1" dirty="0">
+              <a:rPr lang="en-US" sz="1200" dirty="0">
+                <a:solidFill>
+                  <a:srgbClr val="5F706E"/>
+                </a:solidFill>
+                <a:latin typeface="Calibri" pitchFamily="34" charset="0"/>
+                <a:ea typeface="Calibri" pitchFamily="34" charset="-122"/>
+                <a:cs typeface="Calibri" pitchFamily="34" charset="-120"/>
+              </a:rPr>
+              <a:t>Entre la Fase 2 y la 3, un bloque sin número completado el 2026-08-20 — el cierre de huecos: baja de hogar y de cuenta, Transactional Outbox, conversión de HEIC, los cuatro atributos propuestos y el «hoy» del hogar.</a:t>
+            </a:r>
+            <a:endParaRPr lang="en-US" sz="1200" dirty="0"/>
+          </a:p>
+        </p:txBody>
+      </p:sp>
+      <p:sp>
+        <p:nvSpPr>
+          <p:cNvPr id="37" name="Text 35"/>
+          <p:cNvSpPr/>
+          <p:nvPr/>
+        </p:nvSpPr>
+        <p:spPr>
+          <a:xfrm>
+            <a:off x="548640" y="5577840"/>
+            <a:ext cx="11094415" cy="457200"/>
+          </a:xfrm>
+          <a:prstGeom prst="rect">
+            <a:avLst/>
+          </a:prstGeom>
+          <a:noFill/>
+          <a:ln/>
+        </p:spPr>
+        <p:txBody>
+          <a:bodyPr wrap="square" lIns="0" tIns="0" rIns="0" bIns="0" rtlCol="0" anchor="t"/>
+          <a:lstStyle/>
+          <a:p>
+            <a:pPr indent="0" marL="0">
+              <a:lnSpc>
+                <a:spcPts val="1700"/>
+              </a:lnSpc>
+              <a:buNone/>
+            </a:pPr>
+            <a:r>
+              <a:rPr lang="en-US" sz="1200" i="1" dirty="0">
                 <a:solidFill>
                   <a:srgbClr val="2E7B72"/>
                 </a:solidFill>
@@ -15094,15 +15136,15 @@
                 <a:ea typeface="Calibri" pitchFamily="34" charset="-122"/>
                 <a:cs typeface="Calibri" pitchFamily="34" charset="-120"/>
               </a:rPr>
-              <a:t>Criterio de validación (ADR-001), cumplido en las dos fases entregadas: un recorrido vertical que atraviesa frontend, API autenticada, aplicación, dominio y PostgreSQL. Hoy son siete, en un navegador de verdad.</a:t>
-            </a:r>
-            <a:endParaRPr lang="en-US" sz="1300" dirty="0"/>
-          </a:p>
-        </p:txBody>
-      </p:sp>
-      <p:sp>
-        <p:nvSpPr>
-          <p:cNvPr id="37" name="Text 35"/>
+              <a:t>Criterio de validación (ADR-001), cumplido en todo lo entregado: un recorrido vertical que atraviesa frontend, API autenticada, aplicación, dominio y PostgreSQL. Hoy son diez, en un navegador de verdad.</a:t>
+            </a:r>
+            <a:endParaRPr lang="en-US" sz="1200" dirty="0"/>
+          </a:p>
+        </p:txBody>
+      </p:sp>
+      <p:sp>
+        <p:nvSpPr>
+          <p:cNvPr id="38" name="Text 36"/>
           <p:cNvSpPr/>
           <p:nvPr/>
         </p:nvSpPr>
@@ -15141,7 +15183,7 @@
       </p:sp>
       <p:sp>
         <p:nvSpPr>
-          <p:cNvPr id="38" name="Text 36"/>
+          <p:cNvPr id="39" name="Text 37"/>
           <p:cNvSpPr/>
           <p:nvPr/>
         </p:nvSpPr>
@@ -15282,7 +15324,7 @@
                 <a:ea typeface="Cambria" pitchFamily="34" charset="-122"/>
                 <a:cs typeface="Cambria" pitchFamily="34" charset="-120"/>
               </a:rPr>
-              <a:t>El core y los cuatro primeros módulos, entregados</a:t>
+              <a:t>El core, cuatro módulos y el cierre de huecos, entregados</a:t>
             </a:r>
             <a:endParaRPr lang="en-US" sz="3200" dirty="0"/>
           </a:p>
@@ -15901,7 +15943,7 @@
                 <a:ea typeface="Calibri" pitchFamily="34" charset="-122"/>
                 <a:cs typeface="Calibri" pitchFamily="34" charset="-120"/>
               </a:rPr>
-              <a:t>El core completo y cuatro módulos, sobre activación por hogar y avisos programados. 98 operaciones en el contrato, 28 tablas con Row-Level Security y siete recorridos verticales.</a:t>
+              <a:t>El core completo, cuatro módulos y el cierre de huecos, sobre activación por hogar y avisos programados. 106 operaciones en el contrato, 31 tablas con Row-Level Security y diez recorridos verticales.</a:t>
             </a:r>
             <a:endParaRPr lang="en-US" sz="1250" dirty="0"/>
           </a:p>
@@ -16048,7 +16090,7 @@
                 <a:ea typeface="Calibri" pitchFamily="34" charset="-122"/>
                 <a:cs typeface="Calibri" pitchFamily="34" charset="-120"/>
               </a:rPr>
-              <a:t>Fuente: README.md · documento vivo, última actualización 2026-08-19</a:t>
+              <a:t>Fuente: README.md · documento vivo, última actualización 2026-08-20</a:t>
             </a:r>
             <a:endParaRPr lang="en-US" sz="1100" dirty="0"/>
           </a:p>

--- a/docs/common/marketing/presentations/DRP-resumen.pptx
+++ b/docs/common/marketing/presentations/DRP-resumen.pptx
@@ -24,9 +24,10 @@
     <p:sldId id="272" r:id="rId18"/>
     <p:sldId id="273" r:id="rId19"/>
     <p:sldId id="274" r:id="rId20"/>
+    <p:sldId id="275" r:id="rId21"/>
   </p:sldIdLst>
   <p:notesMasterIdLst>
-    <p:notesMasterId r:id="rId21"/>
+    <p:notesMasterId r:id="rId22"/>
   </p:notesMasterIdLst>
   <p:sldSz cx="12192000" cy="6858000"/>
   <p:notesSz cx="6858000" cy="12192000"/>
@@ -797,7 +798,7 @@
           <a:p>
             <a:r>
               <a:rPr lang="en-US" dirty="0"/>
-              <a:t>Portada. Resumen del README.md de DRP (estado 2026-08-20): Fases 0, 1 y 2 y el cierre de huecos cerrados. El core completo y los cuatro módulos de prioridad alta, activables hogar por hogar.</a:t>
+              <a:t>Portada. Resumen del README.md de DRP (estado 2026-08-21): Fases 0, 1 y 2, el cierre de huecos y el despliegue cerrados (ADR-016). El core completo y los cuatro módulos de prioridad alta, activables hogar por hogar, en producción en un VPS.</a:t>
             </a:r>
             <a:endParaRPr lang="en-US" dirty="0"/>
           </a:p>
@@ -973,7 +974,7 @@
           <a:p>
             <a:r>
               <a:rPr lang="en-US" dirty="0"/>
-              <a:t>README §4.2: módulos activables, cada uno con estado y prioridad. Trece filas, sin fila de backlog. Los cuatro de prioridad alta se construyeron en la Fase 2 y están en desarrollo; los nueve restantes siguen por diseñar.</a:t>
+              <a:t>README §4.2: módulos activables, cada uno con estado y prioridad. Trece filas, sin fila de backlog. Los cuatro de prioridad alta se construyeron en la Fase 2 y siguen en «En desarrollo» — desde el despliegue (ADR-016) el motivo se muda: ya no es «no hay despliegue» sino «no hay ningún hogar real dentro»—; los nueve restantes siguen por diseñar.</a:t>
             </a:r>
             <a:endParaRPr lang="en-US" dirty="0"/>
           </a:p>
@@ -1325,7 +1326,7 @@
           <a:p>
             <a:r>
               <a:rPr lang="en-US" dirty="0"/>
-              <a:t>README §5.7: catálogo de comandos y queries de la capa de aplicación.</a:t>
+              <a:t>README §5.7: catálogo de comandos y queries de la capa de aplicación, a 2026-08-21 — 43 comandos, 4 de sistema y 17 queries. ReactivateUser es la incorporación más reciente (2026-08-20).</a:t>
             </a:r>
             <a:endParaRPr lang="en-US" dirty="0"/>
           </a:p>
@@ -1413,7 +1414,7 @@
           <a:p>
             <a:r>
               <a:rPr lang="en-US" dirty="0"/>
-              <a:t>README §6 y ADR-001 a ADR-011. Las dos últimas llegaron con la Fase 2: fronteras de módulo y activación por hogar, y programación de comprobaciones y entrega de avisos.</a:t>
+              <a:t>README §6 y ADR-001 a ADR-016. Las cuatro del cierre de huecos llegaron el 2026-08-20 y la ADR-016 —despliegue de producción— el 2026-08-21.</a:t>
             </a:r>
             <a:endParaRPr lang="en-US" dirty="0"/>
           </a:p>
@@ -1589,7 +1590,7 @@
           <a:p>
             <a:r>
               <a:rPr lang="en-US" dirty="0"/>
-              <a:t>README §8: roadmap y estado. Fase 0 cerrada el 2026-08-07, Fase 1 el 2026-08-17, Fase 2 el 2026-08-19 y el cierre de huecos —que no es una fase y por eso no lleva tarjeta numerada— el 2026-08-20. El detalle de cada bloque vive en su propio roadmap, en docs/common/product/.</a:t>
+              <a:t>Capturas reales de la aplicación a 2026-08-21, con el hogar de demostración de scripts/seed-demo-data.sql: «Hogar» en escritorio claro, «Inventario» en escritorio oscuro y el login en ancho de móvil. README §5.5 (responsive), ADR-006 (sistema de diseño y los dos modos) y la comprobación de contraste de la CI.</a:t>
             </a:r>
             <a:endParaRPr lang="en-US" dirty="0"/>
           </a:p>
@@ -1677,7 +1678,7 @@
           <a:p>
             <a:r>
               <a:rPr lang="en-US" dirty="0"/>
-              <a:t>README §8, §9 y §11: cierre de la Fase 2 y del cierre de huecos, y lo que queda para la Fase 3, que todavía no está planificada.</a:t>
+              <a:t>README §8: roadmap y estado. Fase 0 cerrada el 2026-08-07, Fase 1 el 2026-08-17, Fase 2 el 2026-08-19, el cierre de huecos —que no es una fase y por eso no lleva tarjeta numerada— el 2026-08-20, y el despliegue —tampoco lo es— el 2026-08-21 (§8.5 y ADR-016). El detalle de cada bloque vive en su propio roadmap, en docs/common/product/.</a:t>
             </a:r>
             <a:endParaRPr lang="en-US" dirty="0"/>
           </a:p>
@@ -1789,6 +1790,94 @@
             <a:fld id="{F7021451-1387-4CA6-816F-3879F97B5CBC}" type="slidenum">
               <a:rPr lang="en-US"/>
               <a:t>2</a:t>
+            </a:fld>
+            <a:endParaRPr lang="en-US"/>
+          </a:p>
+        </p:txBody>
+      </p:sp>
+    </p:spTree>
+    <p:extLst>
+      <p:ext uri="{BB962C8B-B14F-4D97-AF65-F5344CB8AC3E}">
+        <p14:creationId xmlns:p14="http://schemas.microsoft.com/office/powerpoint/2010/main" val="1024086991"/>
+      </p:ext>
+    </p:extLst>
+  </p:cSld>
+  <p:clrMapOvr>
+    <a:masterClrMapping/>
+  </p:clrMapOvr>
+</p:notes>
+</file>
+
+<file path=ppt/notesSlides/notesSlide20.xml><?xml version="1.0" encoding="utf-8"?>
+<p:notes xmlns:a="http://schemas.openxmlformats.org/drawingml/2006/main" xmlns:r="http://schemas.openxmlformats.org/officeDocument/2006/relationships" xmlns:p="http://schemas.openxmlformats.org/presentationml/2006/main">
+  <p:cSld>
+    <p:spTree>
+      <p:nvGrpSpPr>
+        <p:cNvPr id="1" name=""/>
+        <p:cNvGrpSpPr/>
+        <p:nvPr/>
+      </p:nvGrpSpPr>
+      <p:grpSpPr>
+        <a:xfrm>
+          <a:off x="0" y="0"/>
+          <a:ext cx="0" cy="0"/>
+          <a:chOff x="0" y="0"/>
+          <a:chExt cx="0" cy="0"/>
+        </a:xfrm>
+      </p:grpSpPr>
+      <p:sp>
+        <p:nvSpPr>
+          <p:cNvPr id="2" name="Slide Image Placeholder 1"/>
+          <p:cNvSpPr>
+            <a:spLocks noGrp="1" noRot="1" noChangeAspect="1"/>
+          </p:cNvSpPr>
+          <p:nvPr>
+            <p:ph type="sldImg"/>
+          </p:nvPr>
+        </p:nvSpPr>
+        <p:spPr/>
+      </p:sp>
+      <p:sp>
+        <p:nvSpPr>
+          <p:cNvPr id="3" name="Notes Placeholder 2"/>
+          <p:cNvSpPr>
+            <a:spLocks noGrp="1"/>
+          </p:cNvSpPr>
+          <p:nvPr>
+            <p:ph type="body" idx="1"/>
+          </p:nvPr>
+        </p:nvSpPr>
+        <p:spPr/>
+        <p:txBody>
+          <a:bodyPr/>
+          <a:lstStyle/>
+          <a:p>
+            <a:r>
+              <a:rPr lang="en-US" dirty="0"/>
+              <a:t>README §8, §8.5, §9 y §11: cierre de la Fase 2, del cierre de huecos y del despliegue (ADR-016), y lo que queda para la Fase 3, que todavía no está planificada.</a:t>
+            </a:r>
+            <a:endParaRPr lang="en-US" dirty="0"/>
+          </a:p>
+        </p:txBody>
+      </p:sp>
+      <p:sp>
+        <p:nvSpPr>
+          <p:cNvPr id="4" name="Slide Number Placeholder 3"/>
+          <p:cNvSpPr>
+            <a:spLocks noGrp="1"/>
+          </p:cNvSpPr>
+          <p:nvPr>
+            <p:ph type="sldNum" sz="quarter" idx="10"/>
+          </p:nvPr>
+        </p:nvSpPr>
+        <p:spPr/>
+        <p:txBody>
+          <a:bodyPr/>
+          <a:lstStyle/>
+          <a:p>
+            <a:fld id="{F7021451-1387-4CA6-816F-3879F97B5CBC}" type="slidenum">
+              <a:rPr lang="en-US"/>
+              <a:t>20</a:t>
             </a:fld>
             <a:endParaRPr lang="en-US"/>
           </a:p>
@@ -2883,7 +2972,7 @@
         <p:spPr>
           <a:xfrm>
             <a:off x="868680" y="4526280"/>
-            <a:ext cx="2862072" cy="384048"/>
+            <a:ext cx="1385316" cy="384048"/>
           </a:xfrm>
           <a:prstGeom prst="roundRect">
             <a:avLst>
@@ -2910,7 +2999,7 @@
         <p:spPr>
           <a:xfrm>
             <a:off x="868680" y="4526280"/>
-            <a:ext cx="2862072" cy="384048"/>
+            <a:ext cx="1385316" cy="384048"/>
           </a:xfrm>
           <a:prstGeom prst="rect">
             <a:avLst/>
@@ -2934,7 +3023,7 @@
                 <a:ea typeface="Calibri" pitchFamily="34" charset="-122"/>
                 <a:cs typeface="Calibri" pitchFamily="34" charset="-120"/>
               </a:rPr>
-              <a:t>Fases 1 y 2 + cierre de huecos</a:t>
+              <a:t>En producción</a:t>
             </a:r>
             <a:endParaRPr lang="en-US" sz="1150" dirty="0"/>
           </a:p>
@@ -2948,7 +3037,7 @@
         </p:nvSpPr>
         <p:spPr>
           <a:xfrm>
-            <a:off x="3895344" y="4526280"/>
+            <a:off x="2418588" y="4526280"/>
             <a:ext cx="1645920" cy="384048"/>
           </a:xfrm>
           <a:prstGeom prst="roundRect">
@@ -2975,7 +3064,7 @@
         </p:nvSpPr>
         <p:spPr>
           <a:xfrm>
-            <a:off x="3895344" y="4526280"/>
+            <a:off x="2418588" y="4526280"/>
             <a:ext cx="1645920" cy="384048"/>
           </a:xfrm>
           <a:prstGeom prst="rect">
@@ -3014,7 +3103,7 @@
         </p:nvSpPr>
         <p:spPr>
           <a:xfrm>
-            <a:off x="5705856" y="4526280"/>
+            <a:off x="4229100" y="4526280"/>
             <a:ext cx="1124712" cy="384048"/>
           </a:xfrm>
           <a:prstGeom prst="roundRect">
@@ -3041,7 +3130,7 @@
         </p:nvSpPr>
         <p:spPr>
           <a:xfrm>
-            <a:off x="5705856" y="4526280"/>
+            <a:off x="4229100" y="4526280"/>
             <a:ext cx="1124712" cy="384048"/>
           </a:xfrm>
           <a:prstGeom prst="rect">
@@ -3066,7 +3155,7 @@
                 <a:ea typeface="Calibri" pitchFamily="34" charset="-122"/>
                 <a:cs typeface="Calibri" pitchFamily="34" charset="-120"/>
               </a:rPr>
-              <a:t>2026-08-20</a:t>
+              <a:t>2026-08-21</a:t>
             </a:r>
             <a:endParaRPr lang="en-US" sz="1150" dirty="0"/>
           </a:p>
@@ -6105,7 +6194,7 @@
                 <a:ea typeface="Calibri" pitchFamily="34" charset="-122"/>
                 <a:cs typeface="Calibri" pitchFamily="34" charset="-120"/>
               </a:rPr>
-              <a:t>Los cuatro de prioridad alta son el alcance entero de la Fase 2 y siguen en desarrollo: el código está, el despliegue todavía no. La lista no está cerrada, pero no hay cajón de sastre.</a:t>
+              <a:t>Los cuatro de prioridad alta son el alcance entero de la Fase 2 y siguen en desarrollo: desplegados desde el 2026-08-21, lo que les falta es un hogar real dentro. La lista no está cerrada, pero no hay cajón de sastre.</a:t>
             </a:r>
             <a:endParaRPr lang="en-US" sz="1300" dirty="0"/>
           </a:p>
@@ -10287,7 +10376,7 @@
                 <a:ea typeface="Cambria" pitchFamily="34" charset="-122"/>
                 <a:cs typeface="Cambria" pitchFamily="34" charset="-120"/>
               </a:rPr>
-              <a:t>Comandos · 30</a:t>
+              <a:t>Comandos · 43</a:t>
             </a:r>
             <a:endParaRPr lang="en-US" sz="1800" dirty="0"/>
           </a:p>
@@ -10392,7 +10481,7 @@
                 <a:ea typeface="Calibri" pitchFamily="34" charset="-122"/>
                 <a:cs typeface="Calibri" pitchFamily="34" charset="-120"/>
               </a:rPr>
-              <a:t>CATÁLOGO Y ASSETS</a:t>
+              <a:t>CATÁLOGO, ASSETS Y UBICACIONES</a:t>
             </a:r>
             <a:endParaRPr lang="en-US" sz="900" dirty="0"/>
           </a:p>
@@ -10431,7 +10520,7 @@
                 <a:ea typeface="Cambria" pitchFamily="34" charset="-122"/>
                 <a:cs typeface="Cambria" pitchFamily="34" charset="-120"/>
               </a:rPr>
-              <a:t>11</a:t>
+              <a:t>19</a:t>
             </a:r>
             <a:endParaRPr lang="en-US" sz="1800" dirty="0"/>
           </a:p>
@@ -10473,7 +10562,7 @@
                 <a:ea typeface="Courier New" pitchFamily="34" charset="-122"/>
                 <a:cs typeface="Courier New" pitchFamily="34" charset="-120"/>
               </a:rPr>
-              <a:t>CreateArticle</a:t>
+              <a:t>CreateAsset</a:t>
             </a:r>
             <a:endParaRPr lang="en-US" sz="900" dirty="0"/>
           </a:p>
@@ -10618,7 +10707,7 @@
                 <a:ea typeface="Cambria" pitchFamily="34" charset="-122"/>
                 <a:cs typeface="Cambria" pitchFamily="34" charset="-120"/>
               </a:rPr>
-              <a:t>11</a:t>
+              <a:t>16</a:t>
             </a:r>
             <a:endParaRPr lang="en-US" sz="1800" dirty="0"/>
           </a:p>
@@ -10680,7 +10769,7 @@
                 <a:ea typeface="Courier New" pitchFamily="34" charset="-122"/>
                 <a:cs typeface="Courier New" pitchFamily="34" charset="-120"/>
               </a:rPr>
-              <a:t>VerifyEmail</a:t>
+              <a:t>InviteUser</a:t>
             </a:r>
             <a:endParaRPr lang="en-US" sz="900" dirty="0"/>
           </a:p>
@@ -10700,7 +10789,7 @@
                 <a:ea typeface="Courier New" pitchFamily="34" charset="-122"/>
                 <a:cs typeface="Courier New" pitchFamily="34" charset="-120"/>
               </a:rPr>
-              <a:t>InviteUser</a:t>
+              <a:t>ReactivateUser</a:t>
             </a:r>
             <a:endParaRPr lang="en-US" sz="900" dirty="0"/>
           </a:p>
@@ -11132,7 +11221,7 @@
               <a:buNone/>
             </a:pPr>
             <a:r>
-              <a:rPr lang="en-US" sz="1000" b="1" dirty="0">
+              <a:rPr lang="en-US" sz="900" b="1" dirty="0">
                 <a:solidFill>
                   <a:srgbClr val="CFE1DE"/>
                 </a:solidFill>
@@ -11140,9 +11229,9 @@
                 <a:ea typeface="Calibri" pitchFamily="34" charset="-122"/>
                 <a:cs typeface="Calibri" pitchFamily="34" charset="-120"/>
               </a:rPr>
-              <a:t>Comandos de sistema · 3 — PurgeUnverifiedHouseholds · PurgeUnusedFiles · MarkOverdueLoans</a:t>
-            </a:r>
-            <a:endParaRPr lang="en-US" sz="1000" dirty="0"/>
+              <a:t>Comandos de sistema · 4 — PurgeUnverifiedHouseholds · PurgeClosedHouseholds · PurgeUnusedFiles · MarkOverdueLoans</a:t>
+            </a:r>
+            <a:endParaRPr lang="en-US" sz="900" dirty="0"/>
           </a:p>
         </p:txBody>
       </p:sp>
@@ -11213,7 +11302,7 @@
                 <a:ea typeface="Cambria" pitchFamily="34" charset="-122"/>
                 <a:cs typeface="Cambria" pitchFamily="34" charset="-120"/>
               </a:rPr>
-              <a:t>Consultas · 12</a:t>
+              <a:t>Consultas · 17</a:t>
             </a:r>
             <a:endParaRPr lang="en-US" sz="1800" dirty="0"/>
           </a:p>
@@ -11267,7 +11356,7 @@
         <p:spPr>
           <a:xfrm>
             <a:off x="8156448" y="2377440"/>
-            <a:ext cx="3102559" cy="2377440"/>
+            <a:ext cx="1551280" cy="2377440"/>
           </a:xfrm>
           <a:prstGeom prst="rect">
             <a:avLst/>
@@ -11279,15 +11368,14 @@
           <a:bodyPr wrap="square" lIns="0" tIns="0" rIns="0" bIns="0" rtlCol="0" anchor="t"/>
           <a:lstStyle/>
           <a:p>
-            <a:pPr marL="342900" indent="-342900">
+            <a:pPr indent="0" marL="0">
               <a:lnSpc>
                 <a:spcPts val="1500"/>
               </a:lnSpc>
-              <a:buSzPct val="100000"/>
-              <a:buChar char="•"/>
-            </a:pPr>
-            <a:r>
-              <a:rPr lang="en-US" sz="1100" b="1" dirty="0">
+              <a:buNone/>
+            </a:pPr>
+            <a:r>
+              <a:rPr lang="en-US" sz="1000" b="1" dirty="0">
                 <a:solidFill>
                   <a:srgbClr val="12312F"/>
                 </a:solidFill>
@@ -11297,18 +11385,17 @@
               </a:rPr>
               <a:t>ListArticles</a:t>
             </a:r>
-            <a:endParaRPr lang="en-US" sz="1100" dirty="0"/>
-          </a:p>
-          <a:p>
-            <a:pPr marL="342900" indent="-342900">
+            <a:endParaRPr lang="en-US" sz="1000" dirty="0"/>
+          </a:p>
+          <a:p>
+            <a:pPr indent="0" marL="0">
               <a:lnSpc>
                 <a:spcPts val="1500"/>
               </a:lnSpc>
-              <a:buSzPct val="100000"/>
-              <a:buChar char="•"/>
-            </a:pPr>
-            <a:r>
-              <a:rPr lang="en-US" sz="1100" b="1" dirty="0">
+              <a:buNone/>
+            </a:pPr>
+            <a:r>
+              <a:rPr lang="en-US" sz="1000" b="1" dirty="0">
                 <a:solidFill>
                   <a:srgbClr val="12312F"/>
                 </a:solidFill>
@@ -11318,18 +11405,17 @@
               </a:rPr>
               <a:t>ListAssets</a:t>
             </a:r>
-            <a:endParaRPr lang="en-US" sz="1100" dirty="0"/>
-          </a:p>
-          <a:p>
-            <a:pPr marL="342900" indent="-342900">
+            <a:endParaRPr lang="en-US" sz="1000" dirty="0"/>
+          </a:p>
+          <a:p>
+            <a:pPr indent="0" marL="0">
               <a:lnSpc>
                 <a:spcPts val="1500"/>
               </a:lnSpc>
-              <a:buSzPct val="100000"/>
-              <a:buChar char="•"/>
-            </a:pPr>
-            <a:r>
-              <a:rPr lang="en-US" sz="1100" b="1" dirty="0">
+              <a:buNone/>
+            </a:pPr>
+            <a:r>
+              <a:rPr lang="en-US" sz="1000" b="1" dirty="0">
                 <a:solidFill>
                   <a:srgbClr val="12312F"/>
                 </a:solidFill>
@@ -11339,18 +11425,17 @@
               </a:rPr>
               <a:t>GetAsset</a:t>
             </a:r>
-            <a:endParaRPr lang="en-US" sz="1100" dirty="0"/>
-          </a:p>
-          <a:p>
-            <a:pPr marL="342900" indent="-342900">
+            <a:endParaRPr lang="en-US" sz="1000" dirty="0"/>
+          </a:p>
+          <a:p>
+            <a:pPr indent="0" marL="0">
               <a:lnSpc>
                 <a:spcPts val="1500"/>
               </a:lnSpc>
-              <a:buSzPct val="100000"/>
-              <a:buChar char="•"/>
-            </a:pPr>
-            <a:r>
-              <a:rPr lang="en-US" sz="1100" b="1" dirty="0">
+              <a:buNone/>
+            </a:pPr>
+            <a:r>
+              <a:rPr lang="en-US" sz="1000" b="1" dirty="0">
                 <a:solidFill>
                   <a:srgbClr val="12312F"/>
                 </a:solidFill>
@@ -11358,20 +11443,19 @@
                 <a:ea typeface="Courier New" pitchFamily="34" charset="-122"/>
                 <a:cs typeface="Courier New" pitchFamily="34" charset="-120"/>
               </a:rPr>
-              <a:t>ListCategories</a:t>
-            </a:r>
-            <a:endParaRPr lang="en-US" sz="1100" dirty="0"/>
-          </a:p>
-          <a:p>
-            <a:pPr marL="342900" indent="-342900">
+              <a:t>ListAssetChildren</a:t>
+            </a:r>
+            <a:endParaRPr lang="en-US" sz="1000" dirty="0"/>
+          </a:p>
+          <a:p>
+            <a:pPr indent="0" marL="0">
               <a:lnSpc>
                 <a:spcPts val="1500"/>
               </a:lnSpc>
-              <a:buSzPct val="100000"/>
-              <a:buChar char="•"/>
-            </a:pPr>
-            <a:r>
-              <a:rPr lang="en-US" sz="1100" b="1" dirty="0">
+              <a:buNone/>
+            </a:pPr>
+            <a:r>
+              <a:rPr lang="en-US" sz="1000" b="1" dirty="0">
                 <a:solidFill>
                   <a:srgbClr val="12312F"/>
                 </a:solidFill>
@@ -11379,20 +11463,19 @@
                 <a:ea typeface="Courier New" pitchFamily="34" charset="-122"/>
                 <a:cs typeface="Courier New" pitchFamily="34" charset="-120"/>
               </a:rPr>
-              <a:t>ListLocations</a:t>
-            </a:r>
-            <a:endParaRPr lang="en-US" sz="1100" dirty="0"/>
-          </a:p>
-          <a:p>
-            <a:pPr marL="342900" indent="-342900">
+              <a:t>ListCategories</a:t>
+            </a:r>
+            <a:endParaRPr lang="en-US" sz="1000" dirty="0"/>
+          </a:p>
+          <a:p>
+            <a:pPr indent="0" marL="0">
               <a:lnSpc>
                 <a:spcPts val="1500"/>
               </a:lnSpc>
-              <a:buSzPct val="100000"/>
-              <a:buChar char="•"/>
-            </a:pPr>
-            <a:r>
-              <a:rPr lang="en-US" sz="1100" b="1" dirty="0">
+              <a:buNone/>
+            </a:pPr>
+            <a:r>
+              <a:rPr lang="en-US" sz="1000" b="1" dirty="0">
                 <a:solidFill>
                   <a:srgbClr val="12312F"/>
                 </a:solidFill>
@@ -11400,20 +11483,19 @@
                 <a:ea typeface="Courier New" pitchFamily="34" charset="-122"/>
                 <a:cs typeface="Courier New" pitchFamily="34" charset="-120"/>
               </a:rPr>
-              <a:t>ListUsers</a:t>
-            </a:r>
-            <a:endParaRPr lang="en-US" sz="1100" dirty="0"/>
-          </a:p>
-          <a:p>
-            <a:pPr marL="342900" indent="-342900">
+              <a:t>ListTags</a:t>
+            </a:r>
+            <a:endParaRPr lang="en-US" sz="1000" dirty="0"/>
+          </a:p>
+          <a:p>
+            <a:pPr indent="0" marL="0">
               <a:lnSpc>
                 <a:spcPts val="1500"/>
               </a:lnSpc>
-              <a:buSzPct val="100000"/>
-              <a:buChar char="•"/>
-            </a:pPr>
-            <a:r>
-              <a:rPr lang="en-US" sz="1100" b="1" dirty="0">
+              <a:buNone/>
+            </a:pPr>
+            <a:r>
+              <a:rPr lang="en-US" sz="1000" b="1" dirty="0">
                 <a:solidFill>
                   <a:srgbClr val="12312F"/>
                 </a:solidFill>
@@ -11421,20 +11503,19 @@
                 <a:ea typeface="Courier New" pitchFamily="34" charset="-122"/>
                 <a:cs typeface="Courier New" pitchFamily="34" charset="-120"/>
               </a:rPr>
-              <a:t>ListInvitations</a:t>
-            </a:r>
-            <a:endParaRPr lang="en-US" sz="1100" dirty="0"/>
-          </a:p>
-          <a:p>
-            <a:pPr marL="342900" indent="-342900">
+              <a:t>ListLocations</a:t>
+            </a:r>
+            <a:endParaRPr lang="en-US" sz="1000" dirty="0"/>
+          </a:p>
+          <a:p>
+            <a:pPr indent="0" marL="0">
               <a:lnSpc>
                 <a:spcPts val="1500"/>
               </a:lnSpc>
-              <a:buSzPct val="100000"/>
-              <a:buChar char="•"/>
-            </a:pPr>
-            <a:r>
-              <a:rPr lang="en-US" sz="1100" b="1" dirty="0">
+              <a:buNone/>
+            </a:pPr>
+            <a:r>
+              <a:rPr lang="en-US" sz="1000" b="1" dirty="0">
                 <a:solidFill>
                   <a:srgbClr val="12312F"/>
                 </a:solidFill>
@@ -11442,20 +11523,19 @@
                 <a:ea typeface="Courier New" pitchFamily="34" charset="-122"/>
                 <a:cs typeface="Courier New" pitchFamily="34" charset="-120"/>
               </a:rPr>
-              <a:t>GetLoan</a:t>
-            </a:r>
-            <a:endParaRPr lang="en-US" sz="1100" dirty="0"/>
-          </a:p>
-          <a:p>
-            <a:pPr marL="342900" indent="-342900">
+              <a:t>GetLocation</a:t>
+            </a:r>
+            <a:endParaRPr lang="en-US" sz="1000" dirty="0"/>
+          </a:p>
+          <a:p>
+            <a:pPr indent="0" marL="0">
               <a:lnSpc>
                 <a:spcPts val="1500"/>
               </a:lnSpc>
-              <a:buSzPct val="100000"/>
-              <a:buChar char="•"/>
-            </a:pPr>
-            <a:r>
-              <a:rPr lang="en-US" sz="1100" b="1" dirty="0">
+              <a:buNone/>
+            </a:pPr>
+            <a:r>
+              <a:rPr lang="en-US" sz="1000" b="1" dirty="0">
                 <a:solidFill>
                   <a:srgbClr val="12312F"/>
                 </a:solidFill>
@@ -11465,18 +11545,39 @@
               </a:rPr>
               <a:t>ListDocuments</a:t>
             </a:r>
-            <a:endParaRPr lang="en-US" sz="1100" dirty="0"/>
-          </a:p>
-          <a:p>
-            <a:pPr marL="342900" indent="-342900">
+            <a:endParaRPr lang="en-US" sz="1000" dirty="0"/>
+          </a:p>
+        </p:txBody>
+      </p:sp>
+      <p:sp>
+        <p:nvSpPr>
+          <p:cNvPr id="29" name="Text 27"/>
+          <p:cNvSpPr/>
+          <p:nvPr/>
+        </p:nvSpPr>
+        <p:spPr>
+          <a:xfrm>
+            <a:off x="9707728" y="2377440"/>
+            <a:ext cx="1551280" cy="2377440"/>
+          </a:xfrm>
+          <a:prstGeom prst="rect">
+            <a:avLst/>
+          </a:prstGeom>
+          <a:noFill/>
+          <a:ln/>
+        </p:spPr>
+        <p:txBody>
+          <a:bodyPr wrap="square" lIns="0" tIns="0" rIns="0" bIns="0" rtlCol="0" anchor="t"/>
+          <a:lstStyle/>
+          <a:p>
+            <a:pPr indent="0" marL="0">
               <a:lnSpc>
                 <a:spcPts val="1500"/>
               </a:lnSpc>
-              <a:buSzPct val="100000"/>
-              <a:buChar char="•"/>
-            </a:pPr>
-            <a:r>
-              <a:rPr lang="en-US" sz="1100" b="1" dirty="0">
+              <a:buNone/>
+            </a:pPr>
+            <a:r>
+              <a:rPr lang="en-US" sz="1000" b="1" dirty="0">
                 <a:solidFill>
                   <a:srgbClr val="12312F"/>
                 </a:solidFill>
@@ -11486,18 +11587,17 @@
               </a:rPr>
               <a:t>ListFiles</a:t>
             </a:r>
-            <a:endParaRPr lang="en-US" sz="1100" dirty="0"/>
-          </a:p>
-          <a:p>
-            <a:pPr marL="342900" indent="-342900">
+            <a:endParaRPr lang="en-US" sz="1000" dirty="0"/>
+          </a:p>
+          <a:p>
+            <a:pPr indent="0" marL="0">
               <a:lnSpc>
                 <a:spcPts val="1500"/>
               </a:lnSpc>
-              <a:buSzPct val="100000"/>
-              <a:buChar char="•"/>
-            </a:pPr>
-            <a:r>
-              <a:rPr lang="en-US" sz="1100" b="1" dirty="0">
+              <a:buNone/>
+            </a:pPr>
+            <a:r>
+              <a:rPr lang="en-US" sz="1000" b="1" dirty="0">
                 <a:solidFill>
                   <a:srgbClr val="12312F"/>
                 </a:solidFill>
@@ -11507,18 +11607,17 @@
               </a:rPr>
               <a:t>DownloadFile</a:t>
             </a:r>
-            <a:endParaRPr lang="en-US" sz="1100" dirty="0"/>
-          </a:p>
-          <a:p>
-            <a:pPr marL="342900" indent="-342900">
+            <a:endParaRPr lang="en-US" sz="1000" dirty="0"/>
+          </a:p>
+          <a:p>
+            <a:pPr indent="0" marL="0">
               <a:lnSpc>
                 <a:spcPts val="1500"/>
               </a:lnSpc>
-              <a:buSzPct val="100000"/>
-              <a:buChar char="•"/>
-            </a:pPr>
-            <a:r>
-              <a:rPr lang="en-US" sz="1100" b="1" dirty="0">
+              <a:buNone/>
+            </a:pPr>
+            <a:r>
+              <a:rPr lang="en-US" sz="1000" b="1" dirty="0">
                 <a:solidFill>
                   <a:srgbClr val="12312F"/>
                 </a:solidFill>
@@ -11528,13 +11627,113 @@
               </a:rPr>
               <a:t>GetStorageUsage</a:t>
             </a:r>
-            <a:endParaRPr lang="en-US" sz="1100" dirty="0"/>
-          </a:p>
-        </p:txBody>
-      </p:sp>
-      <p:sp>
-        <p:nvSpPr>
-          <p:cNvPr id="29" name="Text 27"/>
+            <a:endParaRPr lang="en-US" sz="1000" dirty="0"/>
+          </a:p>
+          <a:p>
+            <a:pPr indent="0" marL="0">
+              <a:lnSpc>
+                <a:spcPts val="1500"/>
+              </a:lnSpc>
+              <a:buNone/>
+            </a:pPr>
+            <a:r>
+              <a:rPr lang="en-US" sz="1000" b="1" dirty="0">
+                <a:solidFill>
+                  <a:srgbClr val="12312F"/>
+                </a:solidFill>
+                <a:latin typeface="Courier New" pitchFamily="34" charset="0"/>
+                <a:ea typeface="Courier New" pitchFamily="34" charset="-122"/>
+                <a:cs typeface="Courier New" pitchFamily="34" charset="-120"/>
+              </a:rPr>
+              <a:t>GetCurrentHousehold</a:t>
+            </a:r>
+            <a:endParaRPr lang="en-US" sz="1000" dirty="0"/>
+          </a:p>
+          <a:p>
+            <a:pPr indent="0" marL="0">
+              <a:lnSpc>
+                <a:spcPts val="1500"/>
+              </a:lnSpc>
+              <a:buNone/>
+            </a:pPr>
+            <a:r>
+              <a:rPr lang="en-US" sz="1000" b="1" dirty="0">
+                <a:solidFill>
+                  <a:srgbClr val="12312F"/>
+                </a:solidFill>
+                <a:latin typeface="Courier New" pitchFamily="34" charset="0"/>
+                <a:ea typeface="Courier New" pitchFamily="34" charset="-122"/>
+                <a:cs typeface="Courier New" pitchFamily="34" charset="-120"/>
+              </a:rPr>
+              <a:t>ListUsers</a:t>
+            </a:r>
+            <a:endParaRPr lang="en-US" sz="1000" dirty="0"/>
+          </a:p>
+          <a:p>
+            <a:pPr indent="0" marL="0">
+              <a:lnSpc>
+                <a:spcPts val="1500"/>
+              </a:lnSpc>
+              <a:buNone/>
+            </a:pPr>
+            <a:r>
+              <a:rPr lang="en-US" sz="1000" b="1" dirty="0">
+                <a:solidFill>
+                  <a:srgbClr val="12312F"/>
+                </a:solidFill>
+                <a:latin typeface="Courier New" pitchFamily="34" charset="0"/>
+                <a:ea typeface="Courier New" pitchFamily="34" charset="-122"/>
+                <a:cs typeface="Courier New" pitchFamily="34" charset="-120"/>
+              </a:rPr>
+              <a:t>ListInvitations</a:t>
+            </a:r>
+            <a:endParaRPr lang="en-US" sz="1000" dirty="0"/>
+          </a:p>
+          <a:p>
+            <a:pPr indent="0" marL="0">
+              <a:lnSpc>
+                <a:spcPts val="1500"/>
+              </a:lnSpc>
+              <a:buNone/>
+            </a:pPr>
+            <a:r>
+              <a:rPr lang="en-US" sz="1000" b="1" dirty="0">
+                <a:solidFill>
+                  <a:srgbClr val="12312F"/>
+                </a:solidFill>
+                <a:latin typeface="Courier New" pitchFamily="34" charset="0"/>
+                <a:ea typeface="Courier New" pitchFamily="34" charset="-122"/>
+                <a:cs typeface="Courier New" pitchFamily="34" charset="-120"/>
+              </a:rPr>
+              <a:t>GetLoan</a:t>
+            </a:r>
+            <a:endParaRPr lang="en-US" sz="1000" dirty="0"/>
+          </a:p>
+          <a:p>
+            <a:pPr indent="0" marL="0">
+              <a:lnSpc>
+                <a:spcPts val="1500"/>
+              </a:lnSpc>
+              <a:buNone/>
+            </a:pPr>
+            <a:r>
+              <a:rPr lang="en-US" sz="1000" b="1" dirty="0">
+                <a:solidFill>
+                  <a:srgbClr val="12312F"/>
+                </a:solidFill>
+                <a:latin typeface="Courier New" pitchFamily="34" charset="0"/>
+                <a:ea typeface="Courier New" pitchFamily="34" charset="-122"/>
+                <a:cs typeface="Courier New" pitchFamily="34" charset="-120"/>
+              </a:rPr>
+              <a:t>ListLoans</a:t>
+            </a:r>
+            <a:endParaRPr lang="en-US" sz="1000" dirty="0"/>
+          </a:p>
+        </p:txBody>
+      </p:sp>
+      <p:sp>
+        <p:nvSpPr>
+          <p:cNvPr id="30" name="Text 28"/>
           <p:cNvSpPr/>
           <p:nvPr/>
         </p:nvSpPr>
@@ -11576,7 +11775,7 @@
       </p:sp>
       <p:sp>
         <p:nvSpPr>
-          <p:cNvPr id="30" name="Text 28"/>
+          <p:cNvPr id="31" name="Text 29"/>
           <p:cNvSpPr/>
           <p:nvPr/>
         </p:nvSpPr>
@@ -11615,7 +11814,7 @@
       </p:sp>
       <p:sp>
         <p:nvSpPr>
-          <p:cNvPr id="31" name="Text 29"/>
+          <p:cNvPr id="32" name="Text 30"/>
           <p:cNvSpPr/>
           <p:nvPr/>
         </p:nvSpPr>
@@ -12698,7 +12897,7 @@
                 <a:ea typeface="Calibri" pitchFamily="34" charset="-122"/>
                 <a:cs typeface="Calibri" pitchFamily="34" charset="-120"/>
               </a:rPr>
-              <a:t>openapi.yaml, 106 operaciones, fuente de verdad</a:t>
+              <a:t>openapi.yaml, 107 operaciones, fuente de verdad</a:t>
             </a:r>
             <a:endParaRPr lang="en-US" sz="1100" dirty="0"/>
           </a:p>
@@ -13070,7 +13269,7 @@
               <a:buNone/>
             </a:pPr>
             <a:r>
-              <a:rPr lang="en-US" sz="1100" dirty="0">
+              <a:rPr lang="en-US" sz="1000" dirty="0">
                 <a:solidFill>
                   <a:srgbClr val="CFE1DE"/>
                 </a:solidFill>
@@ -13078,9 +13277,9 @@
                 <a:ea typeface="Calibri" pitchFamily="34" charset="-122"/>
                 <a:cs typeface="Calibri" pitchFamily="34" charset="-120"/>
               </a:rPr>
-              <a:t>Once ADR recogen el porqué y lo descartado: monolito modular · Spring Boot · Row-Level Security · Flyway · ficheros en disco · React + Vite · contrato como fuente de verdad · monorepo · correo saliente · fronteras de módulo · comprobaciones periódicas y avisos</a:t>
-            </a:r>
-            <a:endParaRPr lang="en-US" sz="1100" dirty="0"/>
+              <a:t>Dieciséis ADR recogen el porqué y lo descartado: monolito modular · Spring Boot · Row-Level Security · Flyway · ficheros en disco · React + Vite · contrato como fuente de verdad · monorepo · correo saliente · fronteras de módulo · comprobaciones y avisos · supresión de datos · Transactional Outbox · conversión de HEIC · identidad de categoría · despliegue en producción</a:t>
+            </a:r>
+            <a:endParaRPr lang="en-US" sz="1000" dirty="0"/>
           </a:p>
         </p:txBody>
       </p:sp>
@@ -13872,7 +14071,7 @@
                 <a:ea typeface="Calibri" pitchFamily="34" charset="-122"/>
                 <a:cs typeface="Calibri" pitchFamily="34" charset="-120"/>
               </a:rPr>
-              <a:t>ESTADO ACTUAL</a:t>
+              <a:t>EL CLIENTE WEB</a:t>
             </a:r>
             <a:endParaRPr lang="en-US" sz="1100" dirty="0"/>
           </a:p>
@@ -13911,7 +14110,7 @@
                 <a:ea typeface="Cambria" pitchFamily="34" charset="-122"/>
                 <a:cs typeface="Cambria" pitchFamily="34" charset="-120"/>
               </a:rPr>
-              <a:t>Roadmap por fases</a:t>
+              <a:t>Así se ve, en los dos modos</a:t>
             </a:r>
             <a:endParaRPr lang="en-US" sz="3200" dirty="0"/>
           </a:p>
@@ -13925,20 +14124,20 @@
         </p:nvSpPr>
         <p:spPr>
           <a:xfrm>
-            <a:off x="548640" y="1691640"/>
-            <a:ext cx="2651760" cy="3246120"/>
+            <a:off x="548640" y="1645920"/>
+            <a:ext cx="4572000" cy="3310128"/>
           </a:xfrm>
           <a:prstGeom prst="roundRect">
             <a:avLst>
-              <a:gd name="adj" fmla="val 3103"/>
+              <a:gd name="adj" fmla="val 2210"/>
             </a:avLst>
           </a:prstGeom>
           <a:solidFill>
-            <a:srgbClr val="EFF4F2"/>
+            <a:srgbClr val="12312F"/>
           </a:solidFill>
           <a:ln w="6350">
             <a:solidFill>
-              <a:srgbClr val="EFF4F2"/>
+              <a:srgbClr val="12312F"/>
             </a:solidFill>
             <a:prstDash val="solid"/>
           </a:ln>
@@ -13951,281 +14150,94 @@
           </a:effectLst>
         </p:spPr>
       </p:sp>
-      <p:sp>
-        <p:nvSpPr>
-          <p:cNvPr id="5" name="Shape 3"/>
-          <p:cNvSpPr/>
-          <p:nvPr/>
-        </p:nvSpPr>
-        <p:spPr>
-          <a:xfrm>
-            <a:off x="804672" y="1965960"/>
-            <a:ext cx="512064" cy="512064"/>
-          </a:xfrm>
-          <a:prstGeom prst="ellipse">
-            <a:avLst/>
+      <p:pic>
+        <p:nvPicPr>
+          <p:cNvPr id="5" name="Image 0" descr="../screenshots/home-dashboard-desktop-light.png">    </p:cNvPr>
+          <p:cNvPicPr>
+            <a:picLocks noChangeAspect="1"/>
+          </p:cNvPicPr>
+          <p:nvPr/>
+        </p:nvPicPr>
+        <p:blipFill>
+          <a:blip r:embed="rId1"/>
+          <a:stretch>
+            <a:fillRect/>
+          </a:stretch>
+        </p:blipFill>
+        <p:spPr>
+          <a:xfrm>
+            <a:off x="662940" y="1773936"/>
+            <a:ext cx="4343400" cy="3054096"/>
+          </a:xfrm>
+          <a:prstGeom prst="rect">
+            <a:avLst/>
+          </a:prstGeom>
+        </p:spPr>
+      </p:pic>
+      <p:sp>
+        <p:nvSpPr>
+          <p:cNvPr id="6" name="Text 3"/>
+          <p:cNvSpPr/>
+          <p:nvPr/>
+        </p:nvSpPr>
+        <p:spPr>
+          <a:xfrm>
+            <a:off x="548640" y="5029200"/>
+            <a:ext cx="4572000" cy="548640"/>
+          </a:xfrm>
+          <a:prstGeom prst="rect">
+            <a:avLst/>
+          </a:prstGeom>
+          <a:noFill/>
+          <a:ln/>
+        </p:spPr>
+        <p:txBody>
+          <a:bodyPr wrap="square" lIns="0" tIns="0" rIns="0" bIns="0" rtlCol="0" anchor="t"/>
+          <a:lstStyle/>
+          <a:p>
+            <a:pPr algn="ctr" indent="0" marL="0">
+              <a:lnSpc>
+                <a:spcPts val="1400"/>
+              </a:lnSpc>
+              <a:buNone/>
+            </a:pPr>
+            <a:r>
+              <a:rPr lang="en-US" sz="1050" dirty="0">
+                <a:solidFill>
+                  <a:srgbClr val="5F706E"/>
+                </a:solidFill>
+                <a:latin typeface="Calibri" pitchFamily="34" charset="0"/>
+                <a:ea typeface="Calibri" pitchFamily="34" charset="-122"/>
+                <a:cs typeface="Calibri" pitchFamily="34" charset="-120"/>
+              </a:rPr>
+              <a:t>«Hogar», el panel de indicadores (modo claro)</a:t>
+            </a:r>
+            <a:endParaRPr lang="en-US" sz="1050" dirty="0"/>
+          </a:p>
+        </p:txBody>
+      </p:sp>
+      <p:sp>
+        <p:nvSpPr>
+          <p:cNvPr id="7" name="Shape 4"/>
+          <p:cNvSpPr/>
+          <p:nvPr/>
+        </p:nvSpPr>
+        <p:spPr>
+          <a:xfrm>
+            <a:off x="5303520" y="1645920"/>
+            <a:ext cx="4572000" cy="3310128"/>
+          </a:xfrm>
+          <a:prstGeom prst="roundRect">
+            <a:avLst>
+              <a:gd name="adj" fmla="val 2210"/>
+            </a:avLst>
           </a:prstGeom>
           <a:solidFill>
-            <a:srgbClr val="2E7B72"/>
+            <a:srgbClr val="12312F"/>
           </a:solidFill>
           <a:ln w="6350">
             <a:solidFill>
-              <a:srgbClr val="2E7B72"/>
-            </a:solidFill>
-            <a:prstDash val="solid"/>
-          </a:ln>
-        </p:spPr>
-      </p:sp>
-      <p:sp>
-        <p:nvSpPr>
-          <p:cNvPr id="6" name="Text 4"/>
-          <p:cNvSpPr/>
-          <p:nvPr/>
-        </p:nvSpPr>
-        <p:spPr>
-          <a:xfrm>
-            <a:off x="804672" y="1965960"/>
-            <a:ext cx="512064" cy="512064"/>
-          </a:xfrm>
-          <a:prstGeom prst="rect">
-            <a:avLst/>
-          </a:prstGeom>
-          <a:noFill/>
-          <a:ln/>
-        </p:spPr>
-        <p:txBody>
-          <a:bodyPr wrap="square" lIns="0" tIns="0" rIns="0" bIns="0" rtlCol="0" anchor="ctr"/>
-          <a:lstStyle/>
-          <a:p>
-            <a:pPr algn="ctr" indent="0" marL="0">
-              <a:buNone/>
-            </a:pPr>
-            <a:r>
-              <a:rPr lang="en-US" sz="1500" b="1" dirty="0">
-                <a:solidFill>
-                  <a:srgbClr val="FFFFFF"/>
-                </a:solidFill>
-                <a:latin typeface="Calibri" pitchFamily="34" charset="0"/>
-                <a:ea typeface="Calibri" pitchFamily="34" charset="-122"/>
-                <a:cs typeface="Calibri" pitchFamily="34" charset="-120"/>
-              </a:rPr>
-              <a:t>0</a:t>
-            </a:r>
-            <a:endParaRPr lang="en-US" sz="1500" dirty="0"/>
-          </a:p>
-        </p:txBody>
-      </p:sp>
-      <p:sp>
-        <p:nvSpPr>
-          <p:cNvPr id="7" name="Text 5"/>
-          <p:cNvSpPr/>
-          <p:nvPr/>
-        </p:nvSpPr>
-        <p:spPr>
-          <a:xfrm>
-            <a:off x="1463040" y="1984248"/>
-            <a:ext cx="1463040" cy="475488"/>
-          </a:xfrm>
-          <a:prstGeom prst="rect">
-            <a:avLst/>
-          </a:prstGeom>
-          <a:noFill/>
-          <a:ln/>
-        </p:spPr>
-        <p:txBody>
-          <a:bodyPr wrap="square" lIns="0" tIns="0" rIns="0" bIns="0" rtlCol="0" anchor="ctr"/>
-          <a:lstStyle/>
-          <a:p>
-            <a:pPr indent="0" marL="0">
-              <a:buNone/>
-            </a:pPr>
-            <a:r>
-              <a:rPr lang="en-US" sz="1200" b="1" spc="100" kern="0" dirty="0">
-                <a:solidFill>
-                  <a:srgbClr val="5F706E"/>
-                </a:solidFill>
-                <a:latin typeface="Calibri" pitchFamily="34" charset="0"/>
-                <a:ea typeface="Calibri" pitchFamily="34" charset="-122"/>
-                <a:cs typeface="Calibri" pitchFamily="34" charset="-120"/>
-              </a:rPr>
-              <a:t>Fase 0</a:t>
-            </a:r>
-            <a:endParaRPr lang="en-US" sz="1200" dirty="0"/>
-          </a:p>
-        </p:txBody>
-      </p:sp>
-      <p:sp>
-        <p:nvSpPr>
-          <p:cNvPr id="8" name="Text 6"/>
-          <p:cNvSpPr/>
-          <p:nvPr/>
-        </p:nvSpPr>
-        <p:spPr>
-          <a:xfrm>
-            <a:off x="804672" y="2606040"/>
-            <a:ext cx="2139696" cy="731520"/>
-          </a:xfrm>
-          <a:prstGeom prst="rect">
-            <a:avLst/>
-          </a:prstGeom>
-          <a:noFill/>
-          <a:ln/>
-        </p:spPr>
-        <p:txBody>
-          <a:bodyPr wrap="square" lIns="0" tIns="0" rIns="0" bIns="0" rtlCol="0" anchor="t"/>
-          <a:lstStyle/>
-          <a:p>
-            <a:pPr indent="0" marL="0">
-              <a:lnSpc>
-                <a:spcPts val="2300"/>
-              </a:lnSpc>
-              <a:buNone/>
-            </a:pPr>
-            <a:r>
-              <a:rPr lang="en-US" sz="1800" b="1" dirty="0">
-                <a:solidFill>
-                  <a:srgbClr val="12312F"/>
-                </a:solidFill>
-                <a:latin typeface="Cambria" pitchFamily="34" charset="0"/>
-                <a:ea typeface="Cambria" pitchFamily="34" charset="-122"/>
-                <a:cs typeface="Cambria" pitchFamily="34" charset="-120"/>
-              </a:rPr>
-              <a:t>Definición</a:t>
-            </a:r>
-            <a:endParaRPr lang="en-US" sz="1800" dirty="0"/>
-          </a:p>
-        </p:txBody>
-      </p:sp>
-      <p:sp>
-        <p:nvSpPr>
-          <p:cNvPr id="9" name="Text 7"/>
-          <p:cNvSpPr/>
-          <p:nvPr/>
-        </p:nvSpPr>
-        <p:spPr>
-          <a:xfrm>
-            <a:off x="804672" y="3383280"/>
-            <a:ext cx="2139696" cy="960120"/>
-          </a:xfrm>
-          <a:prstGeom prst="rect">
-            <a:avLst/>
-          </a:prstGeom>
-          <a:noFill/>
-          <a:ln/>
-        </p:spPr>
-        <p:txBody>
-          <a:bodyPr wrap="square" lIns="0" tIns="0" rIns="0" bIns="0" rtlCol="0" anchor="t"/>
-          <a:lstStyle/>
-          <a:p>
-            <a:pPr indent="0" marL="0">
-              <a:lnSpc>
-                <a:spcPts val="1700"/>
-              </a:lnSpc>
-              <a:buNone/>
-            </a:pPr>
-            <a:r>
-              <a:rPr lang="en-US" sz="1200" dirty="0">
-                <a:solidFill>
-                  <a:srgbClr val="5F706E"/>
-                </a:solidFill>
-                <a:latin typeface="Calibri" pitchFamily="34" charset="0"/>
-                <a:ea typeface="Calibri" pitchFamily="34" charset="-122"/>
-                <a:cs typeface="Calibri" pitchFamily="34" charset="-120"/>
-              </a:rPr>
-              <a:t>Arquitectura, stack, alcance del core y estrategia de testing</a:t>
-            </a:r>
-            <a:endParaRPr lang="en-US" sz="1200" dirty="0"/>
-          </a:p>
-        </p:txBody>
-      </p:sp>
-      <p:sp>
-        <p:nvSpPr>
-          <p:cNvPr id="10" name="Shape 8"/>
-          <p:cNvSpPr/>
-          <p:nvPr/>
-        </p:nvSpPr>
-        <p:spPr>
-          <a:xfrm>
-            <a:off x="804672" y="4389120"/>
-            <a:ext cx="1417320" cy="329184"/>
-          </a:xfrm>
-          <a:prstGeom prst="roundRect">
-            <a:avLst>
-              <a:gd name="adj" fmla="val 50000"/>
-            </a:avLst>
-          </a:prstGeom>
-          <a:solidFill>
-            <a:srgbClr val="2E7B72"/>
-          </a:solidFill>
-          <a:ln w="6350">
-            <a:solidFill>
-              <a:srgbClr val="2E7B72"/>
-            </a:solidFill>
-            <a:prstDash val="solid"/>
-          </a:ln>
-        </p:spPr>
-      </p:sp>
-      <p:sp>
-        <p:nvSpPr>
-          <p:cNvPr id="11" name="Text 9"/>
-          <p:cNvSpPr/>
-          <p:nvPr/>
-        </p:nvSpPr>
-        <p:spPr>
-          <a:xfrm>
-            <a:off x="804672" y="4389120"/>
-            <a:ext cx="1417320" cy="329184"/>
-          </a:xfrm>
-          <a:prstGeom prst="rect">
-            <a:avLst/>
-          </a:prstGeom>
-          <a:noFill/>
-          <a:ln/>
-        </p:spPr>
-        <p:txBody>
-          <a:bodyPr wrap="square" lIns="0" tIns="0" rIns="0" bIns="0" rtlCol="0" anchor="ctr"/>
-          <a:lstStyle/>
-          <a:p>
-            <a:pPr algn="ctr" indent="0" marL="0">
-              <a:buNone/>
-            </a:pPr>
-            <a:r>
-              <a:rPr lang="en-US" sz="1050" b="1" dirty="0">
-                <a:solidFill>
-                  <a:srgbClr val="FFFFFF"/>
-                </a:solidFill>
-                <a:latin typeface="Calibri" pitchFamily="34" charset="0"/>
-                <a:ea typeface="Calibri" pitchFamily="34" charset="-122"/>
-                <a:cs typeface="Calibri" pitchFamily="34" charset="-120"/>
-              </a:rPr>
-              <a:t>Completada</a:t>
-            </a:r>
-            <a:endParaRPr lang="en-US" sz="1050" dirty="0"/>
-          </a:p>
-        </p:txBody>
-      </p:sp>
-      <p:sp>
-        <p:nvSpPr>
-          <p:cNvPr id="12" name="Shape 10"/>
-          <p:cNvSpPr/>
-          <p:nvPr/>
-        </p:nvSpPr>
-        <p:spPr>
-          <a:xfrm>
-            <a:off x="3364992" y="1691640"/>
-            <a:ext cx="2651760" cy="3246120"/>
-          </a:xfrm>
-          <a:prstGeom prst="roundRect">
-            <a:avLst>
-              <a:gd name="adj" fmla="val 3103"/>
-            </a:avLst>
-          </a:prstGeom>
-          <a:solidFill>
-            <a:srgbClr val="EFF4F2"/>
-          </a:solidFill>
-          <a:ln w="6350">
-            <a:solidFill>
-              <a:srgbClr val="EFF4F2"/>
+              <a:srgbClr val="12312F"/>
             </a:solidFill>
             <a:prstDash val="solid"/>
           </a:ln>
@@ -14238,281 +14250,94 @@
           </a:effectLst>
         </p:spPr>
       </p:sp>
-      <p:sp>
-        <p:nvSpPr>
-          <p:cNvPr id="13" name="Shape 11"/>
-          <p:cNvSpPr/>
-          <p:nvPr/>
-        </p:nvSpPr>
-        <p:spPr>
-          <a:xfrm>
-            <a:off x="3621024" y="1965960"/>
-            <a:ext cx="512064" cy="512064"/>
-          </a:xfrm>
-          <a:prstGeom prst="ellipse">
-            <a:avLst/>
+      <p:pic>
+        <p:nvPicPr>
+          <p:cNvPr id="8" name="Image 1" descr="../screenshots/inventory-desktop-dark.png">    </p:cNvPr>
+          <p:cNvPicPr>
+            <a:picLocks noChangeAspect="1"/>
+          </p:cNvPicPr>
+          <p:nvPr/>
+        </p:nvPicPr>
+        <p:blipFill>
+          <a:blip r:embed="rId2"/>
+          <a:stretch>
+            <a:fillRect/>
+          </a:stretch>
+        </p:blipFill>
+        <p:spPr>
+          <a:xfrm>
+            <a:off x="5417820" y="1773936"/>
+            <a:ext cx="4343400" cy="3054096"/>
+          </a:xfrm>
+          <a:prstGeom prst="rect">
+            <a:avLst/>
+          </a:prstGeom>
+        </p:spPr>
+      </p:pic>
+      <p:sp>
+        <p:nvSpPr>
+          <p:cNvPr id="9" name="Text 5"/>
+          <p:cNvSpPr/>
+          <p:nvPr/>
+        </p:nvSpPr>
+        <p:spPr>
+          <a:xfrm>
+            <a:off x="5303520" y="5029200"/>
+            <a:ext cx="4572000" cy="548640"/>
+          </a:xfrm>
+          <a:prstGeom prst="rect">
+            <a:avLst/>
+          </a:prstGeom>
+          <a:noFill/>
+          <a:ln/>
+        </p:spPr>
+        <p:txBody>
+          <a:bodyPr wrap="square" lIns="0" tIns="0" rIns="0" bIns="0" rtlCol="0" anchor="t"/>
+          <a:lstStyle/>
+          <a:p>
+            <a:pPr algn="ctr" indent="0" marL="0">
+              <a:lnSpc>
+                <a:spcPts val="1400"/>
+              </a:lnSpc>
+              <a:buNone/>
+            </a:pPr>
+            <a:r>
+              <a:rPr lang="en-US" sz="1050" dirty="0">
+                <a:solidFill>
+                  <a:srgbClr val="5F706E"/>
+                </a:solidFill>
+                <a:latin typeface="Calibri" pitchFamily="34" charset="0"/>
+                <a:ea typeface="Calibri" pitchFamily="34" charset="-122"/>
+                <a:cs typeface="Calibri" pitchFamily="34" charset="-120"/>
+              </a:rPr>
+              <a:t>«Inventario», en modo oscuro</a:t>
+            </a:r>
+            <a:endParaRPr lang="en-US" sz="1050" dirty="0"/>
+          </a:p>
+        </p:txBody>
+      </p:sp>
+      <p:sp>
+        <p:nvSpPr>
+          <p:cNvPr id="10" name="Shape 6"/>
+          <p:cNvSpPr/>
+          <p:nvPr/>
+        </p:nvSpPr>
+        <p:spPr>
+          <a:xfrm>
+            <a:off x="10058400" y="1645920"/>
+            <a:ext cx="1581912" cy="3310128"/>
+          </a:xfrm>
+          <a:prstGeom prst="roundRect">
+            <a:avLst>
+              <a:gd name="adj" fmla="val 4624"/>
+            </a:avLst>
           </a:prstGeom>
           <a:solidFill>
-            <a:srgbClr val="2E7B72"/>
+            <a:srgbClr val="12312F"/>
           </a:solidFill>
           <a:ln w="6350">
             <a:solidFill>
-              <a:srgbClr val="2E7B72"/>
-            </a:solidFill>
-            <a:prstDash val="solid"/>
-          </a:ln>
-        </p:spPr>
-      </p:sp>
-      <p:sp>
-        <p:nvSpPr>
-          <p:cNvPr id="14" name="Text 12"/>
-          <p:cNvSpPr/>
-          <p:nvPr/>
-        </p:nvSpPr>
-        <p:spPr>
-          <a:xfrm>
-            <a:off x="3621024" y="1965960"/>
-            <a:ext cx="512064" cy="512064"/>
-          </a:xfrm>
-          <a:prstGeom prst="rect">
-            <a:avLst/>
-          </a:prstGeom>
-          <a:noFill/>
-          <a:ln/>
-        </p:spPr>
-        <p:txBody>
-          <a:bodyPr wrap="square" lIns="0" tIns="0" rIns="0" bIns="0" rtlCol="0" anchor="ctr"/>
-          <a:lstStyle/>
-          <a:p>
-            <a:pPr algn="ctr" indent="0" marL="0">
-              <a:buNone/>
-            </a:pPr>
-            <a:r>
-              <a:rPr lang="en-US" sz="1500" b="1" dirty="0">
-                <a:solidFill>
-                  <a:srgbClr val="FFFFFF"/>
-                </a:solidFill>
-                <a:latin typeface="Calibri" pitchFamily="34" charset="0"/>
-                <a:ea typeface="Calibri" pitchFamily="34" charset="-122"/>
-                <a:cs typeface="Calibri" pitchFamily="34" charset="-120"/>
-              </a:rPr>
-              <a:t>1</a:t>
-            </a:r>
-            <a:endParaRPr lang="en-US" sz="1500" dirty="0"/>
-          </a:p>
-        </p:txBody>
-      </p:sp>
-      <p:sp>
-        <p:nvSpPr>
-          <p:cNvPr id="15" name="Text 13"/>
-          <p:cNvSpPr/>
-          <p:nvPr/>
-        </p:nvSpPr>
-        <p:spPr>
-          <a:xfrm>
-            <a:off x="4279392" y="1984248"/>
-            <a:ext cx="1463040" cy="475488"/>
-          </a:xfrm>
-          <a:prstGeom prst="rect">
-            <a:avLst/>
-          </a:prstGeom>
-          <a:noFill/>
-          <a:ln/>
-        </p:spPr>
-        <p:txBody>
-          <a:bodyPr wrap="square" lIns="0" tIns="0" rIns="0" bIns="0" rtlCol="0" anchor="ctr"/>
-          <a:lstStyle/>
-          <a:p>
-            <a:pPr indent="0" marL="0">
-              <a:buNone/>
-            </a:pPr>
-            <a:r>
-              <a:rPr lang="en-US" sz="1200" b="1" spc="100" kern="0" dirty="0">
-                <a:solidFill>
-                  <a:srgbClr val="5F706E"/>
-                </a:solidFill>
-                <a:latin typeface="Calibri" pitchFamily="34" charset="0"/>
-                <a:ea typeface="Calibri" pitchFamily="34" charset="-122"/>
-                <a:cs typeface="Calibri" pitchFamily="34" charset="-120"/>
-              </a:rPr>
-              <a:t>Fase 1</a:t>
-            </a:r>
-            <a:endParaRPr lang="en-US" sz="1200" dirty="0"/>
-          </a:p>
-        </p:txBody>
-      </p:sp>
-      <p:sp>
-        <p:nvSpPr>
-          <p:cNvPr id="16" name="Text 14"/>
-          <p:cNvSpPr/>
-          <p:nvPr/>
-        </p:nvSpPr>
-        <p:spPr>
-          <a:xfrm>
-            <a:off x="3621024" y="2606040"/>
-            <a:ext cx="2139696" cy="731520"/>
-          </a:xfrm>
-          <a:prstGeom prst="rect">
-            <a:avLst/>
-          </a:prstGeom>
-          <a:noFill/>
-          <a:ln/>
-        </p:spPr>
-        <p:txBody>
-          <a:bodyPr wrap="square" lIns="0" tIns="0" rIns="0" bIns="0" rtlCol="0" anchor="t"/>
-          <a:lstStyle/>
-          <a:p>
-            <a:pPr indent="0" marL="0">
-              <a:lnSpc>
-                <a:spcPts val="2300"/>
-              </a:lnSpc>
-              <a:buNone/>
-            </a:pPr>
-            <a:r>
-              <a:rPr lang="en-US" sz="1800" b="1" dirty="0">
-                <a:solidFill>
-                  <a:srgbClr val="12312F"/>
-                </a:solidFill>
-                <a:latin typeface="Cambria" pitchFamily="34" charset="0"/>
-                <a:ea typeface="Cambria" pitchFamily="34" charset="-122"/>
-                <a:cs typeface="Cambria" pitchFamily="34" charset="-120"/>
-              </a:rPr>
-              <a:t>Core MVP</a:t>
-            </a:r>
-            <a:endParaRPr lang="en-US" sz="1800" dirty="0"/>
-          </a:p>
-        </p:txBody>
-      </p:sp>
-      <p:sp>
-        <p:nvSpPr>
-          <p:cNvPr id="17" name="Text 15"/>
-          <p:cNvSpPr/>
-          <p:nvPr/>
-        </p:nvSpPr>
-        <p:spPr>
-          <a:xfrm>
-            <a:off x="3621024" y="3383280"/>
-            <a:ext cx="2139696" cy="960120"/>
-          </a:xfrm>
-          <a:prstGeom prst="rect">
-            <a:avLst/>
-          </a:prstGeom>
-          <a:noFill/>
-          <a:ln/>
-        </p:spPr>
-        <p:txBody>
-          <a:bodyPr wrap="square" lIns="0" tIns="0" rIns="0" bIns="0" rtlCol="0" anchor="t"/>
-          <a:lstStyle/>
-          <a:p>
-            <a:pPr indent="0" marL="0">
-              <a:lnSpc>
-                <a:spcPts val="1700"/>
-              </a:lnSpc>
-              <a:buNone/>
-            </a:pPr>
-            <a:r>
-              <a:rPr lang="en-US" sz="1200" dirty="0">
-                <a:solidFill>
-                  <a:srgbClr val="5F706E"/>
-                </a:solidFill>
-                <a:latin typeface="Calibri" pitchFamily="34" charset="0"/>
-                <a:ea typeface="Calibri" pitchFamily="34" charset="-122"/>
-                <a:cs typeface="Calibri" pitchFamily="34" charset="-120"/>
-              </a:rPr>
-              <a:t>Assets, autenticación, API REST, event bus y cliente web completo del core</a:t>
-            </a:r>
-            <a:endParaRPr lang="en-US" sz="1200" dirty="0"/>
-          </a:p>
-        </p:txBody>
-      </p:sp>
-      <p:sp>
-        <p:nvSpPr>
-          <p:cNvPr id="18" name="Shape 16"/>
-          <p:cNvSpPr/>
-          <p:nvPr/>
-        </p:nvSpPr>
-        <p:spPr>
-          <a:xfrm>
-            <a:off x="3621024" y="4389120"/>
-            <a:ext cx="1417320" cy="329184"/>
-          </a:xfrm>
-          <a:prstGeom prst="roundRect">
-            <a:avLst>
-              <a:gd name="adj" fmla="val 50000"/>
-            </a:avLst>
-          </a:prstGeom>
-          <a:solidFill>
-            <a:srgbClr val="2E7B72"/>
-          </a:solidFill>
-          <a:ln w="6350">
-            <a:solidFill>
-              <a:srgbClr val="2E7B72"/>
-            </a:solidFill>
-            <a:prstDash val="solid"/>
-          </a:ln>
-        </p:spPr>
-      </p:sp>
-      <p:sp>
-        <p:nvSpPr>
-          <p:cNvPr id="19" name="Text 17"/>
-          <p:cNvSpPr/>
-          <p:nvPr/>
-        </p:nvSpPr>
-        <p:spPr>
-          <a:xfrm>
-            <a:off x="3621024" y="4389120"/>
-            <a:ext cx="1417320" cy="329184"/>
-          </a:xfrm>
-          <a:prstGeom prst="rect">
-            <a:avLst/>
-          </a:prstGeom>
-          <a:noFill/>
-          <a:ln/>
-        </p:spPr>
-        <p:txBody>
-          <a:bodyPr wrap="square" lIns="0" tIns="0" rIns="0" bIns="0" rtlCol="0" anchor="ctr"/>
-          <a:lstStyle/>
-          <a:p>
-            <a:pPr algn="ctr" indent="0" marL="0">
-              <a:buNone/>
-            </a:pPr>
-            <a:r>
-              <a:rPr lang="en-US" sz="1050" b="1" dirty="0">
-                <a:solidFill>
-                  <a:srgbClr val="FFFFFF"/>
-                </a:solidFill>
-                <a:latin typeface="Calibri" pitchFamily="34" charset="0"/>
-                <a:ea typeface="Calibri" pitchFamily="34" charset="-122"/>
-                <a:cs typeface="Calibri" pitchFamily="34" charset="-120"/>
-              </a:rPr>
-              <a:t>Completada</a:t>
-            </a:r>
-            <a:endParaRPr lang="en-US" sz="1050" dirty="0"/>
-          </a:p>
-        </p:txBody>
-      </p:sp>
-      <p:sp>
-        <p:nvSpPr>
-          <p:cNvPr id="20" name="Shape 18"/>
-          <p:cNvSpPr/>
-          <p:nvPr/>
-        </p:nvSpPr>
-        <p:spPr>
-          <a:xfrm>
-            <a:off x="6181344" y="1691640"/>
-            <a:ext cx="2651760" cy="3246120"/>
-          </a:xfrm>
-          <a:prstGeom prst="roundRect">
-            <a:avLst>
-              <a:gd name="adj" fmla="val 3103"/>
-            </a:avLst>
-          </a:prstGeom>
-          <a:solidFill>
-            <a:srgbClr val="EFF4F2"/>
-          </a:solidFill>
-          <a:ln w="6350">
-            <a:solidFill>
-              <a:srgbClr val="EFF4F2"/>
+              <a:srgbClr val="12312F"/>
             </a:solidFill>
             <a:prstDash val="solid"/>
           </a:ln>
@@ -14525,26 +14350,94 @@
           </a:effectLst>
         </p:spPr>
       </p:sp>
-      <p:sp>
-        <p:nvSpPr>
-          <p:cNvPr id="21" name="Shape 19"/>
-          <p:cNvSpPr/>
-          <p:nvPr/>
-        </p:nvSpPr>
-        <p:spPr>
-          <a:xfrm>
-            <a:off x="6437376" y="1965960"/>
-            <a:ext cx="512064" cy="512064"/>
-          </a:xfrm>
-          <a:prstGeom prst="ellipse">
-            <a:avLst/>
+      <p:pic>
+        <p:nvPicPr>
+          <p:cNvPr id="11" name="Image 2" descr="../screenshots/login-mobile-dark.png">    </p:cNvPr>
+          <p:cNvPicPr>
+            <a:picLocks noChangeAspect="1"/>
+          </p:cNvPicPr>
+          <p:nvPr/>
+        </p:nvPicPr>
+        <p:blipFill>
+          <a:blip r:embed="rId3"/>
+          <a:stretch>
+            <a:fillRect/>
+          </a:stretch>
+        </p:blipFill>
+        <p:spPr>
+          <a:xfrm>
+            <a:off x="10168128" y="1824228"/>
+            <a:ext cx="1362456" cy="2953512"/>
+          </a:xfrm>
+          <a:prstGeom prst="rect">
+            <a:avLst/>
+          </a:prstGeom>
+        </p:spPr>
+      </p:pic>
+      <p:sp>
+        <p:nvSpPr>
+          <p:cNvPr id="12" name="Text 7"/>
+          <p:cNvSpPr/>
+          <p:nvPr/>
+        </p:nvSpPr>
+        <p:spPr>
+          <a:xfrm>
+            <a:off x="10058400" y="5029200"/>
+            <a:ext cx="1581912" cy="548640"/>
+          </a:xfrm>
+          <a:prstGeom prst="rect">
+            <a:avLst/>
+          </a:prstGeom>
+          <a:noFill/>
+          <a:ln/>
+        </p:spPr>
+        <p:txBody>
+          <a:bodyPr wrap="square" lIns="0" tIns="0" rIns="0" bIns="0" rtlCol="0" anchor="t"/>
+          <a:lstStyle/>
+          <a:p>
+            <a:pPr algn="ctr" indent="0" marL="0">
+              <a:lnSpc>
+                <a:spcPts val="1400"/>
+              </a:lnSpc>
+              <a:buNone/>
+            </a:pPr>
+            <a:r>
+              <a:rPr lang="en-US" sz="1050" dirty="0">
+                <a:solidFill>
+                  <a:srgbClr val="5F706E"/>
+                </a:solidFill>
+                <a:latin typeface="Calibri" pitchFamily="34" charset="0"/>
+                <a:ea typeface="Calibri" pitchFamily="34" charset="-122"/>
+                <a:cs typeface="Calibri" pitchFamily="34" charset="-120"/>
+              </a:rPr>
+              <a:t>La entrada, en el móvil</a:t>
+            </a:r>
+            <a:endParaRPr lang="en-US" sz="1050" dirty="0"/>
+          </a:p>
+        </p:txBody>
+      </p:sp>
+      <p:sp>
+        <p:nvSpPr>
+          <p:cNvPr id="13" name="Shape 8"/>
+          <p:cNvSpPr/>
+          <p:nvPr/>
+        </p:nvSpPr>
+        <p:spPr>
+          <a:xfrm>
+            <a:off x="548640" y="5669280"/>
+            <a:ext cx="11094415" cy="502920"/>
+          </a:xfrm>
+          <a:prstGeom prst="roundRect">
+            <a:avLst>
+              <a:gd name="adj" fmla="val 16364"/>
+            </a:avLst>
           </a:prstGeom>
           <a:solidFill>
-            <a:srgbClr val="2E7B72"/>
+            <a:srgbClr val="EFF4F2"/>
           </a:solidFill>
           <a:ln w="6350">
             <a:solidFill>
-              <a:srgbClr val="2E7B72"/>
+              <a:srgbClr val="EFF4F2"/>
             </a:solidFill>
             <a:prstDash val="solid"/>
           </a:ln>
@@ -14552,599 +14445,49 @@
       </p:sp>
       <p:sp>
         <p:nvSpPr>
-          <p:cNvPr id="22" name="Text 20"/>
-          <p:cNvSpPr/>
-          <p:nvPr/>
-        </p:nvSpPr>
-        <p:spPr>
-          <a:xfrm>
-            <a:off x="6437376" y="1965960"/>
-            <a:ext cx="512064" cy="512064"/>
-          </a:xfrm>
-          <a:prstGeom prst="rect">
-            <a:avLst/>
-          </a:prstGeom>
-          <a:noFill/>
-          <a:ln/>
-        </p:spPr>
-        <p:txBody>
-          <a:bodyPr wrap="square" lIns="0" tIns="0" rIns="0" bIns="0" rtlCol="0" anchor="ctr"/>
-          <a:lstStyle/>
-          <a:p>
-            <a:pPr algn="ctr" indent="0" marL="0">
-              <a:buNone/>
-            </a:pPr>
-            <a:r>
-              <a:rPr lang="en-US" sz="1500" b="1" dirty="0">
-                <a:solidFill>
-                  <a:srgbClr val="FFFFFF"/>
-                </a:solidFill>
-                <a:latin typeface="Calibri" pitchFamily="34" charset="0"/>
-                <a:ea typeface="Calibri" pitchFamily="34" charset="-122"/>
-                <a:cs typeface="Calibri" pitchFamily="34" charset="-120"/>
-              </a:rPr>
-              <a:t>2</a:t>
-            </a:r>
-            <a:endParaRPr lang="en-US" sz="1500" dirty="0"/>
-          </a:p>
-        </p:txBody>
-      </p:sp>
-      <p:sp>
-        <p:nvSpPr>
-          <p:cNvPr id="23" name="Text 21"/>
-          <p:cNvSpPr/>
-          <p:nvPr/>
-        </p:nvSpPr>
-        <p:spPr>
-          <a:xfrm>
-            <a:off x="7095744" y="1984248"/>
-            <a:ext cx="1463040" cy="475488"/>
-          </a:xfrm>
-          <a:prstGeom prst="rect">
-            <a:avLst/>
-          </a:prstGeom>
-          <a:noFill/>
-          <a:ln/>
-        </p:spPr>
-        <p:txBody>
-          <a:bodyPr wrap="square" lIns="0" tIns="0" rIns="0" bIns="0" rtlCol="0" anchor="ctr"/>
-          <a:lstStyle/>
-          <a:p>
-            <a:pPr indent="0" marL="0">
-              <a:buNone/>
-            </a:pPr>
-            <a:r>
-              <a:rPr lang="en-US" sz="1200" b="1" spc="100" kern="0" dirty="0">
-                <a:solidFill>
-                  <a:srgbClr val="5F706E"/>
-                </a:solidFill>
-                <a:latin typeface="Calibri" pitchFamily="34" charset="0"/>
-                <a:ea typeface="Calibri" pitchFamily="34" charset="-122"/>
-                <a:cs typeface="Calibri" pitchFamily="34" charset="-120"/>
-              </a:rPr>
-              <a:t>Fase 2</a:t>
-            </a:r>
-            <a:endParaRPr lang="en-US" sz="1200" dirty="0"/>
-          </a:p>
-        </p:txBody>
-      </p:sp>
-      <p:sp>
-        <p:nvSpPr>
-          <p:cNvPr id="24" name="Text 22"/>
-          <p:cNvSpPr/>
-          <p:nvPr/>
-        </p:nvSpPr>
-        <p:spPr>
-          <a:xfrm>
-            <a:off x="6437376" y="2606040"/>
-            <a:ext cx="2139696" cy="731520"/>
-          </a:xfrm>
-          <a:prstGeom prst="rect">
-            <a:avLst/>
-          </a:prstGeom>
-          <a:noFill/>
-          <a:ln/>
-        </p:spPr>
-        <p:txBody>
-          <a:bodyPr wrap="square" lIns="0" tIns="0" rIns="0" bIns="0" rtlCol="0" anchor="t"/>
+          <p:cNvPr id="14" name="Text 9"/>
+          <p:cNvSpPr/>
+          <p:nvPr/>
+        </p:nvSpPr>
+        <p:spPr>
+          <a:xfrm>
+            <a:off x="822960" y="5669280"/>
+            <a:ext cx="10545775" cy="502920"/>
+          </a:xfrm>
+          <a:prstGeom prst="rect">
+            <a:avLst/>
+          </a:prstGeom>
+          <a:noFill/>
+          <a:ln/>
+        </p:spPr>
+        <p:txBody>
+          <a:bodyPr wrap="square" lIns="0" tIns="0" rIns="0" bIns="0" rtlCol="0" anchor="ctr"/>
           <a:lstStyle/>
           <a:p>
             <a:pPr indent="0" marL="0">
               <a:lnSpc>
-                <a:spcPts val="2300"/>
+                <a:spcPts val="1600"/>
               </a:lnSpc>
               <a:buNone/>
             </a:pPr>
             <a:r>
-              <a:rPr lang="en-US" sz="1800" b="1" dirty="0">
-                <a:solidFill>
-                  <a:srgbClr val="12312F"/>
-                </a:solidFill>
-                <a:latin typeface="Cambria" pitchFamily="34" charset="0"/>
-                <a:ea typeface="Cambria" pitchFamily="34" charset="-122"/>
-                <a:cs typeface="Cambria" pitchFamily="34" charset="-120"/>
-              </a:rPr>
-              <a:t>Módulos activables</a:t>
-            </a:r>
-            <a:endParaRPr lang="en-US" sz="1800" dirty="0"/>
-          </a:p>
-        </p:txBody>
-      </p:sp>
-      <p:sp>
-        <p:nvSpPr>
-          <p:cNvPr id="25" name="Text 23"/>
-          <p:cNvSpPr/>
-          <p:nvPr/>
-        </p:nvSpPr>
-        <p:spPr>
-          <a:xfrm>
-            <a:off x="6437376" y="3383280"/>
-            <a:ext cx="2139696" cy="960120"/>
-          </a:xfrm>
-          <a:prstGeom prst="rect">
-            <a:avLst/>
-          </a:prstGeom>
-          <a:noFill/>
-          <a:ln/>
-        </p:spPr>
-        <p:txBody>
-          <a:bodyPr wrap="square" lIns="0" tIns="0" rIns="0" bIns="0" rtlCol="0" anchor="t"/>
-          <a:lstStyle/>
-          <a:p>
-            <a:pPr indent="0" marL="0">
-              <a:lnSpc>
-                <a:spcPts val="1700"/>
-              </a:lnSpc>
-              <a:buNone/>
-            </a:pPr>
-            <a:r>
-              <a:rPr lang="en-US" sz="1200" dirty="0">
-                <a:solidFill>
-                  <a:srgbClr val="5F706E"/>
-                </a:solidFill>
-                <a:latin typeface="Calibri" pitchFamily="34" charset="0"/>
-                <a:ea typeface="Calibri" pitchFamily="34" charset="-122"/>
-                <a:cs typeface="Calibri" pitchFamily="34" charset="-120"/>
-              </a:rPr>
-              <a:t>Activación por hogar, plataforma de avisos y los cuatro módulos de prioridad alta</a:t>
-            </a:r>
-            <a:endParaRPr lang="en-US" sz="1200" dirty="0"/>
-          </a:p>
-        </p:txBody>
-      </p:sp>
-      <p:sp>
-        <p:nvSpPr>
-          <p:cNvPr id="26" name="Shape 24"/>
-          <p:cNvSpPr/>
-          <p:nvPr/>
-        </p:nvSpPr>
-        <p:spPr>
-          <a:xfrm>
-            <a:off x="6437376" y="4389120"/>
-            <a:ext cx="1417320" cy="329184"/>
-          </a:xfrm>
-          <a:prstGeom prst="roundRect">
-            <a:avLst>
-              <a:gd name="adj" fmla="val 50000"/>
-            </a:avLst>
-          </a:prstGeom>
-          <a:solidFill>
-            <a:srgbClr val="2E7B72"/>
-          </a:solidFill>
-          <a:ln w="6350">
-            <a:solidFill>
-              <a:srgbClr val="2E7B72"/>
-            </a:solidFill>
-            <a:prstDash val="solid"/>
-          </a:ln>
-        </p:spPr>
-      </p:sp>
-      <p:sp>
-        <p:nvSpPr>
-          <p:cNvPr id="27" name="Text 25"/>
-          <p:cNvSpPr/>
-          <p:nvPr/>
-        </p:nvSpPr>
-        <p:spPr>
-          <a:xfrm>
-            <a:off x="6437376" y="4389120"/>
-            <a:ext cx="1417320" cy="329184"/>
-          </a:xfrm>
-          <a:prstGeom prst="rect">
-            <a:avLst/>
-          </a:prstGeom>
-          <a:noFill/>
-          <a:ln/>
-        </p:spPr>
-        <p:txBody>
-          <a:bodyPr wrap="square" lIns="0" tIns="0" rIns="0" bIns="0" rtlCol="0" anchor="ctr"/>
-          <a:lstStyle/>
-          <a:p>
-            <a:pPr algn="ctr" indent="0" marL="0">
-              <a:buNone/>
-            </a:pPr>
-            <a:r>
-              <a:rPr lang="en-US" sz="1050" b="1" dirty="0">
-                <a:solidFill>
-                  <a:srgbClr val="FFFFFF"/>
-                </a:solidFill>
-                <a:latin typeface="Calibri" pitchFamily="34" charset="0"/>
-                <a:ea typeface="Calibri" pitchFamily="34" charset="-122"/>
-                <a:cs typeface="Calibri" pitchFamily="34" charset="-120"/>
-              </a:rPr>
-              <a:t>Completada</a:t>
-            </a:r>
-            <a:endParaRPr lang="en-US" sz="1050" dirty="0"/>
-          </a:p>
-        </p:txBody>
-      </p:sp>
-      <p:sp>
-        <p:nvSpPr>
-          <p:cNvPr id="28" name="Shape 26"/>
-          <p:cNvSpPr/>
-          <p:nvPr/>
-        </p:nvSpPr>
-        <p:spPr>
-          <a:xfrm>
-            <a:off x="8997696" y="1691640"/>
-            <a:ext cx="2651760" cy="3246120"/>
-          </a:xfrm>
-          <a:prstGeom prst="roundRect">
-            <a:avLst>
-              <a:gd name="adj" fmla="val 3103"/>
-            </a:avLst>
-          </a:prstGeom>
-          <a:solidFill>
-            <a:srgbClr val="FFFFFF"/>
-          </a:solidFill>
-          <a:ln w="12700">
-            <a:solidFill>
-              <a:srgbClr val="D3DFDC"/>
-            </a:solidFill>
-            <a:prstDash val="solid"/>
-          </a:ln>
-        </p:spPr>
-      </p:sp>
-      <p:sp>
-        <p:nvSpPr>
-          <p:cNvPr id="29" name="Shape 27"/>
-          <p:cNvSpPr/>
-          <p:nvPr/>
-        </p:nvSpPr>
-        <p:spPr>
-          <a:xfrm>
-            <a:off x="9253728" y="1965960"/>
-            <a:ext cx="512064" cy="512064"/>
-          </a:xfrm>
-          <a:prstGeom prst="ellipse">
-            <a:avLst/>
-          </a:prstGeom>
-          <a:solidFill>
-            <a:srgbClr val="C3D2CF"/>
-          </a:solidFill>
-          <a:ln w="6350">
-            <a:solidFill>
-              <a:srgbClr val="C3D2CF"/>
-            </a:solidFill>
-            <a:prstDash val="solid"/>
-          </a:ln>
-        </p:spPr>
-      </p:sp>
-      <p:sp>
-        <p:nvSpPr>
-          <p:cNvPr id="30" name="Text 28"/>
-          <p:cNvSpPr/>
-          <p:nvPr/>
-        </p:nvSpPr>
-        <p:spPr>
-          <a:xfrm>
-            <a:off x="9253728" y="1965960"/>
-            <a:ext cx="512064" cy="512064"/>
-          </a:xfrm>
-          <a:prstGeom prst="rect">
-            <a:avLst/>
-          </a:prstGeom>
-          <a:noFill/>
-          <a:ln/>
-        </p:spPr>
-        <p:txBody>
-          <a:bodyPr wrap="square" lIns="0" tIns="0" rIns="0" bIns="0" rtlCol="0" anchor="ctr"/>
-          <a:lstStyle/>
-          <a:p>
-            <a:pPr algn="ctr" indent="0" marL="0">
-              <a:buNone/>
-            </a:pPr>
-            <a:r>
-              <a:rPr lang="en-US" sz="1500" b="1" dirty="0">
-                <a:solidFill>
-                  <a:srgbClr val="12312F"/>
-                </a:solidFill>
-                <a:latin typeface="Calibri" pitchFamily="34" charset="0"/>
-                <a:ea typeface="Calibri" pitchFamily="34" charset="-122"/>
-                <a:cs typeface="Calibri" pitchFamily="34" charset="-120"/>
-              </a:rPr>
-              <a:t>3</a:t>
-            </a:r>
-            <a:endParaRPr lang="en-US" sz="1500" dirty="0"/>
-          </a:p>
-        </p:txBody>
-      </p:sp>
-      <p:sp>
-        <p:nvSpPr>
-          <p:cNvPr id="31" name="Text 29"/>
-          <p:cNvSpPr/>
-          <p:nvPr/>
-        </p:nvSpPr>
-        <p:spPr>
-          <a:xfrm>
-            <a:off x="9912096" y="1984248"/>
-            <a:ext cx="1463040" cy="475488"/>
-          </a:xfrm>
-          <a:prstGeom prst="rect">
-            <a:avLst/>
-          </a:prstGeom>
-          <a:noFill/>
-          <a:ln/>
-        </p:spPr>
-        <p:txBody>
-          <a:bodyPr wrap="square" lIns="0" tIns="0" rIns="0" bIns="0" rtlCol="0" anchor="ctr"/>
-          <a:lstStyle/>
-          <a:p>
-            <a:pPr indent="0" marL="0">
-              <a:buNone/>
-            </a:pPr>
-            <a:r>
-              <a:rPr lang="en-US" sz="1200" b="1" spc="100" kern="0" dirty="0">
-                <a:solidFill>
-                  <a:srgbClr val="5F706E"/>
-                </a:solidFill>
-                <a:latin typeface="Calibri" pitchFamily="34" charset="0"/>
-                <a:ea typeface="Calibri" pitchFamily="34" charset="-122"/>
-                <a:cs typeface="Calibri" pitchFamily="34" charset="-120"/>
-              </a:rPr>
-              <a:t>Fase 3</a:t>
-            </a:r>
-            <a:endParaRPr lang="en-US" sz="1200" dirty="0"/>
-          </a:p>
-        </p:txBody>
-      </p:sp>
-      <p:sp>
-        <p:nvSpPr>
-          <p:cNvPr id="32" name="Text 30"/>
-          <p:cNvSpPr/>
-          <p:nvPr/>
-        </p:nvSpPr>
-        <p:spPr>
-          <a:xfrm>
-            <a:off x="9253728" y="2606040"/>
-            <a:ext cx="2139696" cy="731520"/>
-          </a:xfrm>
-          <a:prstGeom prst="rect">
-            <a:avLst/>
-          </a:prstGeom>
-          <a:noFill/>
-          <a:ln/>
-        </p:spPr>
-        <p:txBody>
-          <a:bodyPr wrap="square" lIns="0" tIns="0" rIns="0" bIns="0" rtlCol="0" anchor="t"/>
-          <a:lstStyle/>
-          <a:p>
-            <a:pPr indent="0" marL="0">
-              <a:lnSpc>
-                <a:spcPts val="2300"/>
-              </a:lnSpc>
-              <a:buNone/>
-            </a:pPr>
-            <a:r>
-              <a:rPr lang="en-US" sz="1800" b="1" dirty="0">
-                <a:solidFill>
-                  <a:srgbClr val="12312F"/>
-                </a:solidFill>
-                <a:latin typeface="Cambria" pitchFamily="34" charset="0"/>
-                <a:ea typeface="Cambria" pitchFamily="34" charset="-122"/>
-                <a:cs typeface="Cambria" pitchFamily="34" charset="-120"/>
-              </a:rPr>
-              <a:t>Módulos adicionales</a:t>
-            </a:r>
-            <a:endParaRPr lang="en-US" sz="1800" dirty="0"/>
-          </a:p>
-        </p:txBody>
-      </p:sp>
-      <p:sp>
-        <p:nvSpPr>
-          <p:cNvPr id="33" name="Text 31"/>
-          <p:cNvSpPr/>
-          <p:nvPr/>
-        </p:nvSpPr>
-        <p:spPr>
-          <a:xfrm>
-            <a:off x="9253728" y="3383280"/>
-            <a:ext cx="2139696" cy="960120"/>
-          </a:xfrm>
-          <a:prstGeom prst="rect">
-            <a:avLst/>
-          </a:prstGeom>
-          <a:noFill/>
-          <a:ln/>
-        </p:spPr>
-        <p:txBody>
-          <a:bodyPr wrap="square" lIns="0" tIns="0" rIns="0" bIns="0" rtlCol="0" anchor="t"/>
-          <a:lstStyle/>
-          <a:p>
-            <a:pPr indent="0" marL="0">
-              <a:lnSpc>
-                <a:spcPts val="1700"/>
-              </a:lnSpc>
-              <a:buNone/>
-            </a:pPr>
-            <a:r>
-              <a:rPr lang="en-US" sz="1200" dirty="0">
-                <a:solidFill>
-                  <a:srgbClr val="5F706E"/>
-                </a:solidFill>
-                <a:latin typeface="Calibri" pitchFamily="34" charset="0"/>
-                <a:ea typeface="Calibri" pitchFamily="34" charset="-122"/>
-                <a:cs typeface="Calibri" pitchFamily="34" charset="-120"/>
-              </a:rPr>
-              <a:t>Los nueve restantes, por orden de prioridad (sección 4.2)</a:t>
-            </a:r>
-            <a:endParaRPr lang="en-US" sz="1200" dirty="0"/>
-          </a:p>
-        </p:txBody>
-      </p:sp>
-      <p:sp>
-        <p:nvSpPr>
-          <p:cNvPr id="34" name="Shape 32"/>
-          <p:cNvSpPr/>
-          <p:nvPr/>
-        </p:nvSpPr>
-        <p:spPr>
-          <a:xfrm>
-            <a:off x="9253728" y="4389120"/>
-            <a:ext cx="1417320" cy="329184"/>
-          </a:xfrm>
-          <a:prstGeom prst="roundRect">
-            <a:avLst>
-              <a:gd name="adj" fmla="val 50000"/>
-            </a:avLst>
-          </a:prstGeom>
-          <a:solidFill>
-            <a:srgbClr val="E7EDEB"/>
-          </a:solidFill>
-          <a:ln w="6350">
-            <a:solidFill>
-              <a:srgbClr val="D3DFDC"/>
-            </a:solidFill>
-            <a:prstDash val="solid"/>
-          </a:ln>
-        </p:spPr>
-      </p:sp>
-      <p:sp>
-        <p:nvSpPr>
-          <p:cNvPr id="35" name="Text 33"/>
-          <p:cNvSpPr/>
-          <p:nvPr/>
-        </p:nvSpPr>
-        <p:spPr>
-          <a:xfrm>
-            <a:off x="9253728" y="4389120"/>
-            <a:ext cx="1417320" cy="329184"/>
-          </a:xfrm>
-          <a:prstGeom prst="rect">
-            <a:avLst/>
-          </a:prstGeom>
-          <a:noFill/>
-          <a:ln/>
-        </p:spPr>
-        <p:txBody>
-          <a:bodyPr wrap="square" lIns="0" tIns="0" rIns="0" bIns="0" rtlCol="0" anchor="ctr"/>
-          <a:lstStyle/>
-          <a:p>
-            <a:pPr algn="ctr" indent="0" marL="0">
-              <a:buNone/>
-            </a:pPr>
-            <a:r>
-              <a:rPr lang="en-US" sz="1050" b="1" dirty="0">
-                <a:solidFill>
-                  <a:srgbClr val="5F706E"/>
-                </a:solidFill>
-                <a:latin typeface="Calibri" pitchFamily="34" charset="0"/>
-                <a:ea typeface="Calibri" pitchFamily="34" charset="-122"/>
-                <a:cs typeface="Calibri" pitchFamily="34" charset="-120"/>
-              </a:rPr>
-              <a:t>Pendiente</a:t>
-            </a:r>
-            <a:endParaRPr lang="en-US" sz="1050" dirty="0"/>
-          </a:p>
-        </p:txBody>
-      </p:sp>
-      <p:sp>
-        <p:nvSpPr>
-          <p:cNvPr id="36" name="Text 34"/>
-          <p:cNvSpPr/>
-          <p:nvPr/>
-        </p:nvSpPr>
-        <p:spPr>
-          <a:xfrm>
-            <a:off x="548640" y="5047488"/>
-            <a:ext cx="11094415" cy="457200"/>
-          </a:xfrm>
-          <a:prstGeom prst="rect">
-            <a:avLst/>
-          </a:prstGeom>
-          <a:noFill/>
-          <a:ln/>
-        </p:spPr>
-        <p:txBody>
-          <a:bodyPr wrap="square" lIns="0" tIns="0" rIns="0" bIns="0" rtlCol="0" anchor="t"/>
-          <a:lstStyle/>
-          <a:p>
-            <a:pPr indent="0" marL="0">
-              <a:lnSpc>
-                <a:spcPts val="1700"/>
-              </a:lnSpc>
-              <a:buNone/>
-            </a:pPr>
-            <a:r>
-              <a:rPr lang="en-US" sz="1200" dirty="0">
-                <a:solidFill>
-                  <a:srgbClr val="5F706E"/>
-                </a:solidFill>
-                <a:latin typeface="Calibri" pitchFamily="34" charset="0"/>
-                <a:ea typeface="Calibri" pitchFamily="34" charset="-122"/>
-                <a:cs typeface="Calibri" pitchFamily="34" charset="-120"/>
-              </a:rPr>
-              <a:t>Entre la Fase 2 y la 3, un bloque sin número completado el 2026-08-20 — el cierre de huecos: baja de hogar y de cuenta, Transactional Outbox, conversión de HEIC, los cuatro atributos propuestos y el «hoy» del hogar.</a:t>
-            </a:r>
-            <a:endParaRPr lang="en-US" sz="1200" dirty="0"/>
-          </a:p>
-        </p:txBody>
-      </p:sp>
-      <p:sp>
-        <p:nvSpPr>
-          <p:cNvPr id="37" name="Text 35"/>
-          <p:cNvSpPr/>
-          <p:nvPr/>
-        </p:nvSpPr>
-        <p:spPr>
-          <a:xfrm>
-            <a:off x="548640" y="5577840"/>
-            <a:ext cx="11094415" cy="457200"/>
-          </a:xfrm>
-          <a:prstGeom prst="rect">
-            <a:avLst/>
-          </a:prstGeom>
-          <a:noFill/>
-          <a:ln/>
-        </p:spPr>
-        <p:txBody>
-          <a:bodyPr wrap="square" lIns="0" tIns="0" rIns="0" bIns="0" rtlCol="0" anchor="t"/>
-          <a:lstStyle/>
-          <a:p>
-            <a:pPr indent="0" marL="0">
-              <a:lnSpc>
-                <a:spcPts val="1700"/>
-              </a:lnSpc>
-              <a:buNone/>
-            </a:pPr>
-            <a:r>
-              <a:rPr lang="en-US" sz="1200" i="1" dirty="0">
-                <a:solidFill>
-                  <a:srgbClr val="2E7B72"/>
-                </a:solidFill>
-                <a:latin typeface="Calibri" pitchFamily="34" charset="0"/>
-                <a:ea typeface="Calibri" pitchFamily="34" charset="-122"/>
-                <a:cs typeface="Calibri" pitchFamily="34" charset="-120"/>
-              </a:rPr>
-              <a:t>Criterio de validación (ADR-001), cumplido en todo lo entregado: un recorrido vertical que atraviesa frontend, API autenticada, aplicación, dominio y PostgreSQL. Hoy son diez, en un navegador de verdad.</a:t>
-            </a:r>
-            <a:endParaRPr lang="en-US" sz="1200" dirty="0"/>
-          </a:p>
-        </p:txBody>
-      </p:sp>
-      <p:sp>
-        <p:nvSpPr>
-          <p:cNvPr id="38" name="Text 36"/>
+              <a:rPr lang="en-US" sz="1150" dirty="0">
+                <a:solidFill>
+                  <a:srgbClr val="1C4644"/>
+                </a:solidFill>
+                <a:latin typeface="Calibri" pitchFamily="34" charset="0"/>
+                <a:ea typeface="Calibri" pitchFamily="34" charset="-122"/>
+                <a:cs typeface="Calibri" pitchFamily="34" charset="-120"/>
+              </a:rPr>
+              <a:t>Capturas de la instancia en producción, del 21 de agosto de 2026, con el hogar de demostración dentro. El contraste de los dos modos se comprueba en la CI y la auditoría de accesibilidad recorre ambos.</a:t>
+            </a:r>
+            <a:endParaRPr lang="en-US" sz="1150" dirty="0"/>
+          </a:p>
+        </p:txBody>
+      </p:sp>
+      <p:sp>
+        <p:nvSpPr>
+          <p:cNvPr id="15" name="Text 10"/>
           <p:cNvSpPr/>
           <p:nvPr/>
         </p:nvSpPr>
@@ -15183,7 +14526,7 @@
       </p:sp>
       <p:sp>
         <p:nvSpPr>
-          <p:cNvPr id="39" name="Text 37"/>
+          <p:cNvPr id="16" name="Text 11"/>
           <p:cNvSpPr/>
           <p:nvPr/>
         </p:nvSpPr>
@@ -15234,7 +14577,7 @@
     <p:bg>
       <p:bgPr>
         <a:solidFill>
-          <a:srgbClr val="12312F"/>
+          <a:srgbClr val="FFFFFF"/>
         </a:solidFill>
       </p:bgPr>
     </p:bg>
@@ -15279,13 +14622,13 @@
             <a:r>
               <a:rPr lang="en-US" sz="1100" b="1" spc="200" kern="0" dirty="0">
                 <a:solidFill>
-                  <a:srgbClr val="7FC8BE"/>
-                </a:solidFill>
-                <a:latin typeface="Calibri" pitchFamily="34" charset="0"/>
-                <a:ea typeface="Calibri" pitchFamily="34" charset="-122"/>
-                <a:cs typeface="Calibri" pitchFamily="34" charset="-120"/>
-              </a:rPr>
-              <a:t>SIGUIENTE PASO</a:t>
+                  <a:srgbClr val="2E7B72"/>
+                </a:solidFill>
+                <a:latin typeface="Calibri" pitchFamily="34" charset="0"/>
+                <a:ea typeface="Calibri" pitchFamily="34" charset="-122"/>
+                <a:cs typeface="Calibri" pitchFamily="34" charset="-120"/>
+              </a:rPr>
+              <a:t>ESTADO ACTUAL</a:t>
             </a:r>
             <a:endParaRPr lang="en-US" sz="1100" dirty="0"/>
           </a:p>
@@ -15318,13 +14661,13 @@
             <a:r>
               <a:rPr lang="en-US" sz="3200" b="1" dirty="0">
                 <a:solidFill>
-                  <a:srgbClr val="FFFFFF"/>
+                  <a:srgbClr val="12312F"/>
                 </a:solidFill>
                 <a:latin typeface="Cambria" pitchFamily="34" charset="0"/>
                 <a:ea typeface="Cambria" pitchFamily="34" charset="-122"/>
                 <a:cs typeface="Cambria" pitchFamily="34" charset="-120"/>
               </a:rPr>
-              <a:t>El core, cuatro módulos y el cierre de huecos, entregados</a:t>
+              <a:t>Roadmap por fases</a:t>
             </a:r>
             <a:endParaRPr lang="en-US" sz="3200" dirty="0"/>
           </a:p>
@@ -15332,107 +14675,887 @@
       </p:sp>
       <p:sp>
         <p:nvSpPr>
-          <p:cNvPr id="4" name="Text 2"/>
-          <p:cNvSpPr/>
-          <p:nvPr/>
-        </p:nvSpPr>
-        <p:spPr>
-          <a:xfrm>
-            <a:off x="548640" y="1325880"/>
-            <a:ext cx="8686800" cy="566928"/>
-          </a:xfrm>
-          <a:prstGeom prst="rect">
-            <a:avLst/>
-          </a:prstGeom>
-          <a:noFill/>
-          <a:ln/>
-        </p:spPr>
-        <p:txBody>
-          <a:bodyPr wrap="square" lIns="0" tIns="0" rIns="0" bIns="0" rtlCol="0" anchor="t"/>
-          <a:lstStyle/>
-          <a:p>
-            <a:pPr indent="0" marL="0">
-              <a:lnSpc>
-                <a:spcPts val="2100"/>
-              </a:lnSpc>
-              <a:buNone/>
-            </a:pPr>
-            <a:r>
-              <a:rPr lang="en-US" sz="1500" dirty="0">
-                <a:solidFill>
-                  <a:srgbClr val="C4D4D1"/>
-                </a:solidFill>
-                <a:latin typeface="Calibri" pitchFamily="34" charset="0"/>
-                <a:ea typeface="Calibri" pitchFamily="34" charset="-122"/>
-                <a:cs typeface="Calibri" pitchFamily="34" charset="-120"/>
-              </a:rPr>
-              <a:t>Lo que queda es la Fase 3: los nueve módulos restantes de la sección 4.2, sobre un mecanismo de activación que ya existe y una plataforma de avisos que ya entrega.</a:t>
-            </a:r>
-            <a:endParaRPr lang="en-US" sz="1500" dirty="0"/>
-          </a:p>
-        </p:txBody>
-      </p:sp>
-      <p:sp>
-        <p:nvSpPr>
-          <p:cNvPr id="5" name="Text 3"/>
-          <p:cNvSpPr/>
-          <p:nvPr/>
-        </p:nvSpPr>
-        <p:spPr>
-          <a:xfrm>
-            <a:off x="548640" y="2148840"/>
-            <a:ext cx="11094415" cy="274320"/>
-          </a:xfrm>
-          <a:prstGeom prst="rect">
-            <a:avLst/>
-          </a:prstGeom>
-          <a:noFill/>
-          <a:ln/>
-        </p:spPr>
-        <p:txBody>
-          <a:bodyPr wrap="square" lIns="0" tIns="0" rIns="0" bIns="0" rtlCol="0" anchor="ctr"/>
-          <a:lstStyle/>
-          <a:p>
-            <a:pPr indent="0" marL="0">
-              <a:buNone/>
-            </a:pPr>
-            <a:r>
-              <a:rPr lang="en-US" sz="1100" b="1" spc="200" kern="0" dirty="0">
-                <a:solidFill>
-                  <a:srgbClr val="7FC8BE"/>
-                </a:solidFill>
-                <a:latin typeface="Calibri" pitchFamily="34" charset="0"/>
-                <a:ea typeface="Calibri" pitchFamily="34" charset="-122"/>
-                <a:cs typeface="Calibri" pitchFamily="34" charset="-120"/>
-              </a:rPr>
-              <a:t>EL RECORRIDO VERTICAL QUE VALIDA CADA ENTREGA</a:t>
-            </a:r>
-            <a:endParaRPr lang="en-US" sz="1100" dirty="0"/>
-          </a:p>
-        </p:txBody>
-      </p:sp>
-      <p:sp>
-        <p:nvSpPr>
-          <p:cNvPr id="6" name="Shape 4"/>
-          <p:cNvSpPr/>
-          <p:nvPr/>
-        </p:nvSpPr>
-        <p:spPr>
-          <a:xfrm>
-            <a:off x="548640" y="2560320"/>
-            <a:ext cx="1947672" cy="777240"/>
+          <p:cNvPr id="4" name="Shape 2"/>
+          <p:cNvSpPr/>
+          <p:nvPr/>
+        </p:nvSpPr>
+        <p:spPr>
+          <a:xfrm>
+            <a:off x="548640" y="1691640"/>
+            <a:ext cx="2651760" cy="3246120"/>
           </a:xfrm>
           <a:prstGeom prst="roundRect">
             <a:avLst>
-              <a:gd name="adj" fmla="val 10588"/>
+              <a:gd name="adj" fmla="val 3103"/>
             </a:avLst>
           </a:prstGeom>
           <a:solidFill>
-            <a:srgbClr val="1B4B48"/>
+            <a:srgbClr val="EFF4F2"/>
+          </a:solidFill>
+          <a:ln w="6350">
+            <a:solidFill>
+              <a:srgbClr val="EFF4F2"/>
+            </a:solidFill>
+            <a:prstDash val="solid"/>
+          </a:ln>
+          <a:effectLst>
+            <a:outerShdw sx="100000" sy="100000" kx="0" ky="0" algn="bl" rotWithShape="0" blurRad="127000" dist="25400" dir="5400000">
+              <a:srgbClr val="0B1F1E">
+                <a:alpha val="10000"/>
+              </a:srgbClr>
+            </a:outerShdw>
+          </a:effectLst>
+        </p:spPr>
+      </p:sp>
+      <p:sp>
+        <p:nvSpPr>
+          <p:cNvPr id="5" name="Shape 3"/>
+          <p:cNvSpPr/>
+          <p:nvPr/>
+        </p:nvSpPr>
+        <p:spPr>
+          <a:xfrm>
+            <a:off x="804672" y="1965960"/>
+            <a:ext cx="512064" cy="512064"/>
+          </a:xfrm>
+          <a:prstGeom prst="ellipse">
+            <a:avLst/>
+          </a:prstGeom>
+          <a:solidFill>
+            <a:srgbClr val="2E7B72"/>
+          </a:solidFill>
+          <a:ln w="6350">
+            <a:solidFill>
+              <a:srgbClr val="2E7B72"/>
+            </a:solidFill>
+            <a:prstDash val="solid"/>
+          </a:ln>
+        </p:spPr>
+      </p:sp>
+      <p:sp>
+        <p:nvSpPr>
+          <p:cNvPr id="6" name="Text 4"/>
+          <p:cNvSpPr/>
+          <p:nvPr/>
+        </p:nvSpPr>
+        <p:spPr>
+          <a:xfrm>
+            <a:off x="804672" y="1965960"/>
+            <a:ext cx="512064" cy="512064"/>
+          </a:xfrm>
+          <a:prstGeom prst="rect">
+            <a:avLst/>
+          </a:prstGeom>
+          <a:noFill/>
+          <a:ln/>
+        </p:spPr>
+        <p:txBody>
+          <a:bodyPr wrap="square" lIns="0" tIns="0" rIns="0" bIns="0" rtlCol="0" anchor="ctr"/>
+          <a:lstStyle/>
+          <a:p>
+            <a:pPr algn="ctr" indent="0" marL="0">
+              <a:buNone/>
+            </a:pPr>
+            <a:r>
+              <a:rPr lang="en-US" sz="1500" b="1" dirty="0">
+                <a:solidFill>
+                  <a:srgbClr val="FFFFFF"/>
+                </a:solidFill>
+                <a:latin typeface="Calibri" pitchFamily="34" charset="0"/>
+                <a:ea typeface="Calibri" pitchFamily="34" charset="-122"/>
+                <a:cs typeface="Calibri" pitchFamily="34" charset="-120"/>
+              </a:rPr>
+              <a:t>0</a:t>
+            </a:r>
+            <a:endParaRPr lang="en-US" sz="1500" dirty="0"/>
+          </a:p>
+        </p:txBody>
+      </p:sp>
+      <p:sp>
+        <p:nvSpPr>
+          <p:cNvPr id="7" name="Text 5"/>
+          <p:cNvSpPr/>
+          <p:nvPr/>
+        </p:nvSpPr>
+        <p:spPr>
+          <a:xfrm>
+            <a:off x="1463040" y="1984248"/>
+            <a:ext cx="1463040" cy="475488"/>
+          </a:xfrm>
+          <a:prstGeom prst="rect">
+            <a:avLst/>
+          </a:prstGeom>
+          <a:noFill/>
+          <a:ln/>
+        </p:spPr>
+        <p:txBody>
+          <a:bodyPr wrap="square" lIns="0" tIns="0" rIns="0" bIns="0" rtlCol="0" anchor="ctr"/>
+          <a:lstStyle/>
+          <a:p>
+            <a:pPr indent="0" marL="0">
+              <a:buNone/>
+            </a:pPr>
+            <a:r>
+              <a:rPr lang="en-US" sz="1200" b="1" spc="100" kern="0" dirty="0">
+                <a:solidFill>
+                  <a:srgbClr val="5F706E"/>
+                </a:solidFill>
+                <a:latin typeface="Calibri" pitchFamily="34" charset="0"/>
+                <a:ea typeface="Calibri" pitchFamily="34" charset="-122"/>
+                <a:cs typeface="Calibri" pitchFamily="34" charset="-120"/>
+              </a:rPr>
+              <a:t>Fase 0</a:t>
+            </a:r>
+            <a:endParaRPr lang="en-US" sz="1200" dirty="0"/>
+          </a:p>
+        </p:txBody>
+      </p:sp>
+      <p:sp>
+        <p:nvSpPr>
+          <p:cNvPr id="8" name="Text 6"/>
+          <p:cNvSpPr/>
+          <p:nvPr/>
+        </p:nvSpPr>
+        <p:spPr>
+          <a:xfrm>
+            <a:off x="804672" y="2606040"/>
+            <a:ext cx="2139696" cy="731520"/>
+          </a:xfrm>
+          <a:prstGeom prst="rect">
+            <a:avLst/>
+          </a:prstGeom>
+          <a:noFill/>
+          <a:ln/>
+        </p:spPr>
+        <p:txBody>
+          <a:bodyPr wrap="square" lIns="0" tIns="0" rIns="0" bIns="0" rtlCol="0" anchor="t"/>
+          <a:lstStyle/>
+          <a:p>
+            <a:pPr indent="0" marL="0">
+              <a:lnSpc>
+                <a:spcPts val="2300"/>
+              </a:lnSpc>
+              <a:buNone/>
+            </a:pPr>
+            <a:r>
+              <a:rPr lang="en-US" sz="1800" b="1" dirty="0">
+                <a:solidFill>
+                  <a:srgbClr val="12312F"/>
+                </a:solidFill>
+                <a:latin typeface="Cambria" pitchFamily="34" charset="0"/>
+                <a:ea typeface="Cambria" pitchFamily="34" charset="-122"/>
+                <a:cs typeface="Cambria" pitchFamily="34" charset="-120"/>
+              </a:rPr>
+              <a:t>Definición</a:t>
+            </a:r>
+            <a:endParaRPr lang="en-US" sz="1800" dirty="0"/>
+          </a:p>
+        </p:txBody>
+      </p:sp>
+      <p:sp>
+        <p:nvSpPr>
+          <p:cNvPr id="9" name="Text 7"/>
+          <p:cNvSpPr/>
+          <p:nvPr/>
+        </p:nvSpPr>
+        <p:spPr>
+          <a:xfrm>
+            <a:off x="804672" y="3383280"/>
+            <a:ext cx="2139696" cy="960120"/>
+          </a:xfrm>
+          <a:prstGeom prst="rect">
+            <a:avLst/>
+          </a:prstGeom>
+          <a:noFill/>
+          <a:ln/>
+        </p:spPr>
+        <p:txBody>
+          <a:bodyPr wrap="square" lIns="0" tIns="0" rIns="0" bIns="0" rtlCol="0" anchor="t"/>
+          <a:lstStyle/>
+          <a:p>
+            <a:pPr indent="0" marL="0">
+              <a:lnSpc>
+                <a:spcPts val="1700"/>
+              </a:lnSpc>
+              <a:buNone/>
+            </a:pPr>
+            <a:r>
+              <a:rPr lang="en-US" sz="1200" dirty="0">
+                <a:solidFill>
+                  <a:srgbClr val="5F706E"/>
+                </a:solidFill>
+                <a:latin typeface="Calibri" pitchFamily="34" charset="0"/>
+                <a:ea typeface="Calibri" pitchFamily="34" charset="-122"/>
+                <a:cs typeface="Calibri" pitchFamily="34" charset="-120"/>
+              </a:rPr>
+              <a:t>Arquitectura, stack, alcance del core y estrategia de testing</a:t>
+            </a:r>
+            <a:endParaRPr lang="en-US" sz="1200" dirty="0"/>
+          </a:p>
+        </p:txBody>
+      </p:sp>
+      <p:sp>
+        <p:nvSpPr>
+          <p:cNvPr id="10" name="Shape 8"/>
+          <p:cNvSpPr/>
+          <p:nvPr/>
+        </p:nvSpPr>
+        <p:spPr>
+          <a:xfrm>
+            <a:off x="804672" y="4389120"/>
+            <a:ext cx="1417320" cy="329184"/>
+          </a:xfrm>
+          <a:prstGeom prst="roundRect">
+            <a:avLst>
+              <a:gd name="adj" fmla="val 50000"/>
+            </a:avLst>
+          </a:prstGeom>
+          <a:solidFill>
+            <a:srgbClr val="2E7B72"/>
+          </a:solidFill>
+          <a:ln w="6350">
+            <a:solidFill>
+              <a:srgbClr val="2E7B72"/>
+            </a:solidFill>
+            <a:prstDash val="solid"/>
+          </a:ln>
+        </p:spPr>
+      </p:sp>
+      <p:sp>
+        <p:nvSpPr>
+          <p:cNvPr id="11" name="Text 9"/>
+          <p:cNvSpPr/>
+          <p:nvPr/>
+        </p:nvSpPr>
+        <p:spPr>
+          <a:xfrm>
+            <a:off x="804672" y="4389120"/>
+            <a:ext cx="1417320" cy="329184"/>
+          </a:xfrm>
+          <a:prstGeom prst="rect">
+            <a:avLst/>
+          </a:prstGeom>
+          <a:noFill/>
+          <a:ln/>
+        </p:spPr>
+        <p:txBody>
+          <a:bodyPr wrap="square" lIns="0" tIns="0" rIns="0" bIns="0" rtlCol="0" anchor="ctr"/>
+          <a:lstStyle/>
+          <a:p>
+            <a:pPr algn="ctr" indent="0" marL="0">
+              <a:buNone/>
+            </a:pPr>
+            <a:r>
+              <a:rPr lang="en-US" sz="1050" b="1" dirty="0">
+                <a:solidFill>
+                  <a:srgbClr val="FFFFFF"/>
+                </a:solidFill>
+                <a:latin typeface="Calibri" pitchFamily="34" charset="0"/>
+                <a:ea typeface="Calibri" pitchFamily="34" charset="-122"/>
+                <a:cs typeface="Calibri" pitchFamily="34" charset="-120"/>
+              </a:rPr>
+              <a:t>Completada</a:t>
+            </a:r>
+            <a:endParaRPr lang="en-US" sz="1050" dirty="0"/>
+          </a:p>
+        </p:txBody>
+      </p:sp>
+      <p:sp>
+        <p:nvSpPr>
+          <p:cNvPr id="12" name="Shape 10"/>
+          <p:cNvSpPr/>
+          <p:nvPr/>
+        </p:nvSpPr>
+        <p:spPr>
+          <a:xfrm>
+            <a:off x="3364992" y="1691640"/>
+            <a:ext cx="2651760" cy="3246120"/>
+          </a:xfrm>
+          <a:prstGeom prst="roundRect">
+            <a:avLst>
+              <a:gd name="adj" fmla="val 3103"/>
+            </a:avLst>
+          </a:prstGeom>
+          <a:solidFill>
+            <a:srgbClr val="EFF4F2"/>
+          </a:solidFill>
+          <a:ln w="6350">
+            <a:solidFill>
+              <a:srgbClr val="EFF4F2"/>
+            </a:solidFill>
+            <a:prstDash val="solid"/>
+          </a:ln>
+          <a:effectLst>
+            <a:outerShdw sx="100000" sy="100000" kx="0" ky="0" algn="bl" rotWithShape="0" blurRad="127000" dist="25400" dir="5400000">
+              <a:srgbClr val="0B1F1E">
+                <a:alpha val="10000"/>
+              </a:srgbClr>
+            </a:outerShdw>
+          </a:effectLst>
+        </p:spPr>
+      </p:sp>
+      <p:sp>
+        <p:nvSpPr>
+          <p:cNvPr id="13" name="Shape 11"/>
+          <p:cNvSpPr/>
+          <p:nvPr/>
+        </p:nvSpPr>
+        <p:spPr>
+          <a:xfrm>
+            <a:off x="3621024" y="1965960"/>
+            <a:ext cx="512064" cy="512064"/>
+          </a:xfrm>
+          <a:prstGeom prst="ellipse">
+            <a:avLst/>
+          </a:prstGeom>
+          <a:solidFill>
+            <a:srgbClr val="2E7B72"/>
+          </a:solidFill>
+          <a:ln w="6350">
+            <a:solidFill>
+              <a:srgbClr val="2E7B72"/>
+            </a:solidFill>
+            <a:prstDash val="solid"/>
+          </a:ln>
+        </p:spPr>
+      </p:sp>
+      <p:sp>
+        <p:nvSpPr>
+          <p:cNvPr id="14" name="Text 12"/>
+          <p:cNvSpPr/>
+          <p:nvPr/>
+        </p:nvSpPr>
+        <p:spPr>
+          <a:xfrm>
+            <a:off x="3621024" y="1965960"/>
+            <a:ext cx="512064" cy="512064"/>
+          </a:xfrm>
+          <a:prstGeom prst="rect">
+            <a:avLst/>
+          </a:prstGeom>
+          <a:noFill/>
+          <a:ln/>
+        </p:spPr>
+        <p:txBody>
+          <a:bodyPr wrap="square" lIns="0" tIns="0" rIns="0" bIns="0" rtlCol="0" anchor="ctr"/>
+          <a:lstStyle/>
+          <a:p>
+            <a:pPr algn="ctr" indent="0" marL="0">
+              <a:buNone/>
+            </a:pPr>
+            <a:r>
+              <a:rPr lang="en-US" sz="1500" b="1" dirty="0">
+                <a:solidFill>
+                  <a:srgbClr val="FFFFFF"/>
+                </a:solidFill>
+                <a:latin typeface="Calibri" pitchFamily="34" charset="0"/>
+                <a:ea typeface="Calibri" pitchFamily="34" charset="-122"/>
+                <a:cs typeface="Calibri" pitchFamily="34" charset="-120"/>
+              </a:rPr>
+              <a:t>1</a:t>
+            </a:r>
+            <a:endParaRPr lang="en-US" sz="1500" dirty="0"/>
+          </a:p>
+        </p:txBody>
+      </p:sp>
+      <p:sp>
+        <p:nvSpPr>
+          <p:cNvPr id="15" name="Text 13"/>
+          <p:cNvSpPr/>
+          <p:nvPr/>
+        </p:nvSpPr>
+        <p:spPr>
+          <a:xfrm>
+            <a:off x="4279392" y="1984248"/>
+            <a:ext cx="1463040" cy="475488"/>
+          </a:xfrm>
+          <a:prstGeom prst="rect">
+            <a:avLst/>
+          </a:prstGeom>
+          <a:noFill/>
+          <a:ln/>
+        </p:spPr>
+        <p:txBody>
+          <a:bodyPr wrap="square" lIns="0" tIns="0" rIns="0" bIns="0" rtlCol="0" anchor="ctr"/>
+          <a:lstStyle/>
+          <a:p>
+            <a:pPr indent="0" marL="0">
+              <a:buNone/>
+            </a:pPr>
+            <a:r>
+              <a:rPr lang="en-US" sz="1200" b="1" spc="100" kern="0" dirty="0">
+                <a:solidFill>
+                  <a:srgbClr val="5F706E"/>
+                </a:solidFill>
+                <a:latin typeface="Calibri" pitchFamily="34" charset="0"/>
+                <a:ea typeface="Calibri" pitchFamily="34" charset="-122"/>
+                <a:cs typeface="Calibri" pitchFamily="34" charset="-120"/>
+              </a:rPr>
+              <a:t>Fase 1</a:t>
+            </a:r>
+            <a:endParaRPr lang="en-US" sz="1200" dirty="0"/>
+          </a:p>
+        </p:txBody>
+      </p:sp>
+      <p:sp>
+        <p:nvSpPr>
+          <p:cNvPr id="16" name="Text 14"/>
+          <p:cNvSpPr/>
+          <p:nvPr/>
+        </p:nvSpPr>
+        <p:spPr>
+          <a:xfrm>
+            <a:off x="3621024" y="2606040"/>
+            <a:ext cx="2139696" cy="731520"/>
+          </a:xfrm>
+          <a:prstGeom prst="rect">
+            <a:avLst/>
+          </a:prstGeom>
+          <a:noFill/>
+          <a:ln/>
+        </p:spPr>
+        <p:txBody>
+          <a:bodyPr wrap="square" lIns="0" tIns="0" rIns="0" bIns="0" rtlCol="0" anchor="t"/>
+          <a:lstStyle/>
+          <a:p>
+            <a:pPr indent="0" marL="0">
+              <a:lnSpc>
+                <a:spcPts val="2300"/>
+              </a:lnSpc>
+              <a:buNone/>
+            </a:pPr>
+            <a:r>
+              <a:rPr lang="en-US" sz="1800" b="1" dirty="0">
+                <a:solidFill>
+                  <a:srgbClr val="12312F"/>
+                </a:solidFill>
+                <a:latin typeface="Cambria" pitchFamily="34" charset="0"/>
+                <a:ea typeface="Cambria" pitchFamily="34" charset="-122"/>
+                <a:cs typeface="Cambria" pitchFamily="34" charset="-120"/>
+              </a:rPr>
+              <a:t>Core MVP</a:t>
+            </a:r>
+            <a:endParaRPr lang="en-US" sz="1800" dirty="0"/>
+          </a:p>
+        </p:txBody>
+      </p:sp>
+      <p:sp>
+        <p:nvSpPr>
+          <p:cNvPr id="17" name="Text 15"/>
+          <p:cNvSpPr/>
+          <p:nvPr/>
+        </p:nvSpPr>
+        <p:spPr>
+          <a:xfrm>
+            <a:off x="3621024" y="3383280"/>
+            <a:ext cx="2139696" cy="960120"/>
+          </a:xfrm>
+          <a:prstGeom prst="rect">
+            <a:avLst/>
+          </a:prstGeom>
+          <a:noFill/>
+          <a:ln/>
+        </p:spPr>
+        <p:txBody>
+          <a:bodyPr wrap="square" lIns="0" tIns="0" rIns="0" bIns="0" rtlCol="0" anchor="t"/>
+          <a:lstStyle/>
+          <a:p>
+            <a:pPr indent="0" marL="0">
+              <a:lnSpc>
+                <a:spcPts val="1700"/>
+              </a:lnSpc>
+              <a:buNone/>
+            </a:pPr>
+            <a:r>
+              <a:rPr lang="en-US" sz="1200" dirty="0">
+                <a:solidFill>
+                  <a:srgbClr val="5F706E"/>
+                </a:solidFill>
+                <a:latin typeface="Calibri" pitchFamily="34" charset="0"/>
+                <a:ea typeface="Calibri" pitchFamily="34" charset="-122"/>
+                <a:cs typeface="Calibri" pitchFamily="34" charset="-120"/>
+              </a:rPr>
+              <a:t>Assets, autenticación, API REST, event bus y cliente web completo del core</a:t>
+            </a:r>
+            <a:endParaRPr lang="en-US" sz="1200" dirty="0"/>
+          </a:p>
+        </p:txBody>
+      </p:sp>
+      <p:sp>
+        <p:nvSpPr>
+          <p:cNvPr id="18" name="Shape 16"/>
+          <p:cNvSpPr/>
+          <p:nvPr/>
+        </p:nvSpPr>
+        <p:spPr>
+          <a:xfrm>
+            <a:off x="3621024" y="4389120"/>
+            <a:ext cx="1417320" cy="329184"/>
+          </a:xfrm>
+          <a:prstGeom prst="roundRect">
+            <a:avLst>
+              <a:gd name="adj" fmla="val 50000"/>
+            </a:avLst>
+          </a:prstGeom>
+          <a:solidFill>
+            <a:srgbClr val="2E7B72"/>
+          </a:solidFill>
+          <a:ln w="6350">
+            <a:solidFill>
+              <a:srgbClr val="2E7B72"/>
+            </a:solidFill>
+            <a:prstDash val="solid"/>
+          </a:ln>
+        </p:spPr>
+      </p:sp>
+      <p:sp>
+        <p:nvSpPr>
+          <p:cNvPr id="19" name="Text 17"/>
+          <p:cNvSpPr/>
+          <p:nvPr/>
+        </p:nvSpPr>
+        <p:spPr>
+          <a:xfrm>
+            <a:off x="3621024" y="4389120"/>
+            <a:ext cx="1417320" cy="329184"/>
+          </a:xfrm>
+          <a:prstGeom prst="rect">
+            <a:avLst/>
+          </a:prstGeom>
+          <a:noFill/>
+          <a:ln/>
+        </p:spPr>
+        <p:txBody>
+          <a:bodyPr wrap="square" lIns="0" tIns="0" rIns="0" bIns="0" rtlCol="0" anchor="ctr"/>
+          <a:lstStyle/>
+          <a:p>
+            <a:pPr algn="ctr" indent="0" marL="0">
+              <a:buNone/>
+            </a:pPr>
+            <a:r>
+              <a:rPr lang="en-US" sz="1050" b="1" dirty="0">
+                <a:solidFill>
+                  <a:srgbClr val="FFFFFF"/>
+                </a:solidFill>
+                <a:latin typeface="Calibri" pitchFamily="34" charset="0"/>
+                <a:ea typeface="Calibri" pitchFamily="34" charset="-122"/>
+                <a:cs typeface="Calibri" pitchFamily="34" charset="-120"/>
+              </a:rPr>
+              <a:t>Completada</a:t>
+            </a:r>
+            <a:endParaRPr lang="en-US" sz="1050" dirty="0"/>
+          </a:p>
+        </p:txBody>
+      </p:sp>
+      <p:sp>
+        <p:nvSpPr>
+          <p:cNvPr id="20" name="Shape 18"/>
+          <p:cNvSpPr/>
+          <p:nvPr/>
+        </p:nvSpPr>
+        <p:spPr>
+          <a:xfrm>
+            <a:off x="6181344" y="1691640"/>
+            <a:ext cx="2651760" cy="3246120"/>
+          </a:xfrm>
+          <a:prstGeom prst="roundRect">
+            <a:avLst>
+              <a:gd name="adj" fmla="val 3103"/>
+            </a:avLst>
+          </a:prstGeom>
+          <a:solidFill>
+            <a:srgbClr val="EFF4F2"/>
+          </a:solidFill>
+          <a:ln w="6350">
+            <a:solidFill>
+              <a:srgbClr val="EFF4F2"/>
+            </a:solidFill>
+            <a:prstDash val="solid"/>
+          </a:ln>
+          <a:effectLst>
+            <a:outerShdw sx="100000" sy="100000" kx="0" ky="0" algn="bl" rotWithShape="0" blurRad="127000" dist="25400" dir="5400000">
+              <a:srgbClr val="0B1F1E">
+                <a:alpha val="10000"/>
+              </a:srgbClr>
+            </a:outerShdw>
+          </a:effectLst>
+        </p:spPr>
+      </p:sp>
+      <p:sp>
+        <p:nvSpPr>
+          <p:cNvPr id="21" name="Shape 19"/>
+          <p:cNvSpPr/>
+          <p:nvPr/>
+        </p:nvSpPr>
+        <p:spPr>
+          <a:xfrm>
+            <a:off x="6437376" y="1965960"/>
+            <a:ext cx="512064" cy="512064"/>
+          </a:xfrm>
+          <a:prstGeom prst="ellipse">
+            <a:avLst/>
+          </a:prstGeom>
+          <a:solidFill>
+            <a:srgbClr val="2E7B72"/>
+          </a:solidFill>
+          <a:ln w="6350">
+            <a:solidFill>
+              <a:srgbClr val="2E7B72"/>
+            </a:solidFill>
+            <a:prstDash val="solid"/>
+          </a:ln>
+        </p:spPr>
+      </p:sp>
+      <p:sp>
+        <p:nvSpPr>
+          <p:cNvPr id="22" name="Text 20"/>
+          <p:cNvSpPr/>
+          <p:nvPr/>
+        </p:nvSpPr>
+        <p:spPr>
+          <a:xfrm>
+            <a:off x="6437376" y="1965960"/>
+            <a:ext cx="512064" cy="512064"/>
+          </a:xfrm>
+          <a:prstGeom prst="rect">
+            <a:avLst/>
+          </a:prstGeom>
+          <a:noFill/>
+          <a:ln/>
+        </p:spPr>
+        <p:txBody>
+          <a:bodyPr wrap="square" lIns="0" tIns="0" rIns="0" bIns="0" rtlCol="0" anchor="ctr"/>
+          <a:lstStyle/>
+          <a:p>
+            <a:pPr algn="ctr" indent="0" marL="0">
+              <a:buNone/>
+            </a:pPr>
+            <a:r>
+              <a:rPr lang="en-US" sz="1500" b="1" dirty="0">
+                <a:solidFill>
+                  <a:srgbClr val="FFFFFF"/>
+                </a:solidFill>
+                <a:latin typeface="Calibri" pitchFamily="34" charset="0"/>
+                <a:ea typeface="Calibri" pitchFamily="34" charset="-122"/>
+                <a:cs typeface="Calibri" pitchFamily="34" charset="-120"/>
+              </a:rPr>
+              <a:t>2</a:t>
+            </a:r>
+            <a:endParaRPr lang="en-US" sz="1500" dirty="0"/>
+          </a:p>
+        </p:txBody>
+      </p:sp>
+      <p:sp>
+        <p:nvSpPr>
+          <p:cNvPr id="23" name="Text 21"/>
+          <p:cNvSpPr/>
+          <p:nvPr/>
+        </p:nvSpPr>
+        <p:spPr>
+          <a:xfrm>
+            <a:off x="7095744" y="1984248"/>
+            <a:ext cx="1463040" cy="475488"/>
+          </a:xfrm>
+          <a:prstGeom prst="rect">
+            <a:avLst/>
+          </a:prstGeom>
+          <a:noFill/>
+          <a:ln/>
+        </p:spPr>
+        <p:txBody>
+          <a:bodyPr wrap="square" lIns="0" tIns="0" rIns="0" bIns="0" rtlCol="0" anchor="ctr"/>
+          <a:lstStyle/>
+          <a:p>
+            <a:pPr indent="0" marL="0">
+              <a:buNone/>
+            </a:pPr>
+            <a:r>
+              <a:rPr lang="en-US" sz="1200" b="1" spc="100" kern="0" dirty="0">
+                <a:solidFill>
+                  <a:srgbClr val="5F706E"/>
+                </a:solidFill>
+                <a:latin typeface="Calibri" pitchFamily="34" charset="0"/>
+                <a:ea typeface="Calibri" pitchFamily="34" charset="-122"/>
+                <a:cs typeface="Calibri" pitchFamily="34" charset="-120"/>
+              </a:rPr>
+              <a:t>Fase 2</a:t>
+            </a:r>
+            <a:endParaRPr lang="en-US" sz="1200" dirty="0"/>
+          </a:p>
+        </p:txBody>
+      </p:sp>
+      <p:sp>
+        <p:nvSpPr>
+          <p:cNvPr id="24" name="Text 22"/>
+          <p:cNvSpPr/>
+          <p:nvPr/>
+        </p:nvSpPr>
+        <p:spPr>
+          <a:xfrm>
+            <a:off x="6437376" y="2606040"/>
+            <a:ext cx="2139696" cy="731520"/>
+          </a:xfrm>
+          <a:prstGeom prst="rect">
+            <a:avLst/>
+          </a:prstGeom>
+          <a:noFill/>
+          <a:ln/>
+        </p:spPr>
+        <p:txBody>
+          <a:bodyPr wrap="square" lIns="0" tIns="0" rIns="0" bIns="0" rtlCol="0" anchor="t"/>
+          <a:lstStyle/>
+          <a:p>
+            <a:pPr indent="0" marL="0">
+              <a:lnSpc>
+                <a:spcPts val="2300"/>
+              </a:lnSpc>
+              <a:buNone/>
+            </a:pPr>
+            <a:r>
+              <a:rPr lang="en-US" sz="1800" b="1" dirty="0">
+                <a:solidFill>
+                  <a:srgbClr val="12312F"/>
+                </a:solidFill>
+                <a:latin typeface="Cambria" pitchFamily="34" charset="0"/>
+                <a:ea typeface="Cambria" pitchFamily="34" charset="-122"/>
+                <a:cs typeface="Cambria" pitchFamily="34" charset="-120"/>
+              </a:rPr>
+              <a:t>Módulos activables</a:t>
+            </a:r>
+            <a:endParaRPr lang="en-US" sz="1800" dirty="0"/>
+          </a:p>
+        </p:txBody>
+      </p:sp>
+      <p:sp>
+        <p:nvSpPr>
+          <p:cNvPr id="25" name="Text 23"/>
+          <p:cNvSpPr/>
+          <p:nvPr/>
+        </p:nvSpPr>
+        <p:spPr>
+          <a:xfrm>
+            <a:off x="6437376" y="3383280"/>
+            <a:ext cx="2139696" cy="960120"/>
+          </a:xfrm>
+          <a:prstGeom prst="rect">
+            <a:avLst/>
+          </a:prstGeom>
+          <a:noFill/>
+          <a:ln/>
+        </p:spPr>
+        <p:txBody>
+          <a:bodyPr wrap="square" lIns="0" tIns="0" rIns="0" bIns="0" rtlCol="0" anchor="t"/>
+          <a:lstStyle/>
+          <a:p>
+            <a:pPr indent="0" marL="0">
+              <a:lnSpc>
+                <a:spcPts val="1700"/>
+              </a:lnSpc>
+              <a:buNone/>
+            </a:pPr>
+            <a:r>
+              <a:rPr lang="en-US" sz="1200" dirty="0">
+                <a:solidFill>
+                  <a:srgbClr val="5F706E"/>
+                </a:solidFill>
+                <a:latin typeface="Calibri" pitchFamily="34" charset="0"/>
+                <a:ea typeface="Calibri" pitchFamily="34" charset="-122"/>
+                <a:cs typeface="Calibri" pitchFamily="34" charset="-120"/>
+              </a:rPr>
+              <a:t>Activación por hogar, plataforma de avisos y los cuatro módulos de prioridad alta</a:t>
+            </a:r>
+            <a:endParaRPr lang="en-US" sz="1200" dirty="0"/>
+          </a:p>
+        </p:txBody>
+      </p:sp>
+      <p:sp>
+        <p:nvSpPr>
+          <p:cNvPr id="26" name="Shape 24"/>
+          <p:cNvSpPr/>
+          <p:nvPr/>
+        </p:nvSpPr>
+        <p:spPr>
+          <a:xfrm>
+            <a:off x="6437376" y="4389120"/>
+            <a:ext cx="1417320" cy="329184"/>
+          </a:xfrm>
+          <a:prstGeom prst="roundRect">
+            <a:avLst>
+              <a:gd name="adj" fmla="val 50000"/>
+            </a:avLst>
+          </a:prstGeom>
+          <a:solidFill>
+            <a:srgbClr val="2E7B72"/>
+          </a:solidFill>
+          <a:ln w="6350">
+            <a:solidFill>
+              <a:srgbClr val="2E7B72"/>
+            </a:solidFill>
+            <a:prstDash val="solid"/>
+          </a:ln>
+        </p:spPr>
+      </p:sp>
+      <p:sp>
+        <p:nvSpPr>
+          <p:cNvPr id="27" name="Text 25"/>
+          <p:cNvSpPr/>
+          <p:nvPr/>
+        </p:nvSpPr>
+        <p:spPr>
+          <a:xfrm>
+            <a:off x="6437376" y="4389120"/>
+            <a:ext cx="1417320" cy="329184"/>
+          </a:xfrm>
+          <a:prstGeom prst="rect">
+            <a:avLst/>
+          </a:prstGeom>
+          <a:noFill/>
+          <a:ln/>
+        </p:spPr>
+        <p:txBody>
+          <a:bodyPr wrap="square" lIns="0" tIns="0" rIns="0" bIns="0" rtlCol="0" anchor="ctr"/>
+          <a:lstStyle/>
+          <a:p>
+            <a:pPr algn="ctr" indent="0" marL="0">
+              <a:buNone/>
+            </a:pPr>
+            <a:r>
+              <a:rPr lang="en-US" sz="1050" b="1" dirty="0">
+                <a:solidFill>
+                  <a:srgbClr val="FFFFFF"/>
+                </a:solidFill>
+                <a:latin typeface="Calibri" pitchFamily="34" charset="0"/>
+                <a:ea typeface="Calibri" pitchFamily="34" charset="-122"/>
+                <a:cs typeface="Calibri" pitchFamily="34" charset="-120"/>
+              </a:rPr>
+              <a:t>Completada</a:t>
+            </a:r>
+            <a:endParaRPr lang="en-US" sz="1050" dirty="0"/>
+          </a:p>
+        </p:txBody>
+      </p:sp>
+      <p:sp>
+        <p:nvSpPr>
+          <p:cNvPr id="28" name="Shape 26"/>
+          <p:cNvSpPr/>
+          <p:nvPr/>
+        </p:nvSpPr>
+        <p:spPr>
+          <a:xfrm>
+            <a:off x="8997696" y="1691640"/>
+            <a:ext cx="2651760" cy="3246120"/>
+          </a:xfrm>
+          <a:prstGeom prst="roundRect">
+            <a:avLst>
+              <a:gd name="adj" fmla="val 3103"/>
+            </a:avLst>
+          </a:prstGeom>
+          <a:solidFill>
+            <a:srgbClr val="FFFFFF"/>
           </a:solidFill>
           <a:ln w="12700">
             <a:solidFill>
-              <a:srgbClr val="7FC8BE"/>
+              <a:srgbClr val="D3DFDC"/>
             </a:solidFill>
             <a:prstDash val="solid"/>
           </a:ln>
@@ -15440,63 +15563,24 @@
       </p:sp>
       <p:sp>
         <p:nvSpPr>
-          <p:cNvPr id="7" name="Text 5"/>
-          <p:cNvSpPr/>
-          <p:nvPr/>
-        </p:nvSpPr>
-        <p:spPr>
-          <a:xfrm>
-            <a:off x="548640" y="2560320"/>
-            <a:ext cx="1947672" cy="777240"/>
-          </a:xfrm>
-          <a:prstGeom prst="rect">
-            <a:avLst/>
-          </a:prstGeom>
-          <a:noFill/>
-          <a:ln/>
-        </p:spPr>
-        <p:txBody>
-          <a:bodyPr wrap="square" lIns="0" tIns="0" rIns="0" bIns="0" rtlCol="0" anchor="ctr"/>
-          <a:lstStyle/>
-          <a:p>
-            <a:pPr algn="ctr" indent="0" marL="0">
-              <a:buNone/>
-            </a:pPr>
-            <a:r>
-              <a:rPr lang="en-US" sz="1300" b="1" dirty="0">
-                <a:solidFill>
-                  <a:srgbClr val="FFFFFF"/>
-                </a:solidFill>
-                <a:latin typeface="Calibri" pitchFamily="34" charset="0"/>
-                <a:ea typeface="Calibri" pitchFamily="34" charset="-122"/>
-                <a:cs typeface="Calibri" pitchFamily="34" charset="-120"/>
-              </a:rPr>
-              <a:t>Frontend</a:t>
-            </a:r>
-            <a:endParaRPr lang="en-US" sz="1300" dirty="0"/>
-          </a:p>
-        </p:txBody>
-      </p:sp>
-      <p:sp>
-        <p:nvSpPr>
-          <p:cNvPr id="8" name="Shape 6"/>
-          <p:cNvSpPr/>
-          <p:nvPr/>
-        </p:nvSpPr>
-        <p:spPr>
-          <a:xfrm>
-            <a:off x="2542032" y="2825496"/>
-            <a:ext cx="237744" cy="237744"/>
-          </a:xfrm>
-          <a:prstGeom prst="rightArrow">
+          <p:cNvPr id="29" name="Shape 27"/>
+          <p:cNvSpPr/>
+          <p:nvPr/>
+        </p:nvSpPr>
+        <p:spPr>
+          <a:xfrm>
+            <a:off x="9253728" y="1965960"/>
+            <a:ext cx="512064" cy="512064"/>
+          </a:xfrm>
+          <a:prstGeom prst="ellipse">
             <a:avLst/>
           </a:prstGeom>
           <a:solidFill>
-            <a:srgbClr val="7FC8BE"/>
+            <a:srgbClr val="C3D2CF"/>
           </a:solidFill>
           <a:ln w="6350">
             <a:solidFill>
-              <a:srgbClr val="7FC8BE"/>
+              <a:srgbClr val="C3D2CF"/>
             </a:solidFill>
             <a:prstDash val="solid"/>
           </a:ln>
@@ -15504,26 +15588,188 @@
       </p:sp>
       <p:sp>
         <p:nvSpPr>
-          <p:cNvPr id="9" name="Shape 7"/>
-          <p:cNvSpPr/>
-          <p:nvPr/>
-        </p:nvSpPr>
-        <p:spPr>
-          <a:xfrm>
-            <a:off x="2825496" y="2560320"/>
-            <a:ext cx="1947672" cy="777240"/>
+          <p:cNvPr id="30" name="Text 28"/>
+          <p:cNvSpPr/>
+          <p:nvPr/>
+        </p:nvSpPr>
+        <p:spPr>
+          <a:xfrm>
+            <a:off x="9253728" y="1965960"/>
+            <a:ext cx="512064" cy="512064"/>
+          </a:xfrm>
+          <a:prstGeom prst="rect">
+            <a:avLst/>
+          </a:prstGeom>
+          <a:noFill/>
+          <a:ln/>
+        </p:spPr>
+        <p:txBody>
+          <a:bodyPr wrap="square" lIns="0" tIns="0" rIns="0" bIns="0" rtlCol="0" anchor="ctr"/>
+          <a:lstStyle/>
+          <a:p>
+            <a:pPr algn="ctr" indent="0" marL="0">
+              <a:buNone/>
+            </a:pPr>
+            <a:r>
+              <a:rPr lang="en-US" sz="1500" b="1" dirty="0">
+                <a:solidFill>
+                  <a:srgbClr val="12312F"/>
+                </a:solidFill>
+                <a:latin typeface="Calibri" pitchFamily="34" charset="0"/>
+                <a:ea typeface="Calibri" pitchFamily="34" charset="-122"/>
+                <a:cs typeface="Calibri" pitchFamily="34" charset="-120"/>
+              </a:rPr>
+              <a:t>3</a:t>
+            </a:r>
+            <a:endParaRPr lang="en-US" sz="1500" dirty="0"/>
+          </a:p>
+        </p:txBody>
+      </p:sp>
+      <p:sp>
+        <p:nvSpPr>
+          <p:cNvPr id="31" name="Text 29"/>
+          <p:cNvSpPr/>
+          <p:nvPr/>
+        </p:nvSpPr>
+        <p:spPr>
+          <a:xfrm>
+            <a:off x="9912096" y="1984248"/>
+            <a:ext cx="1463040" cy="475488"/>
+          </a:xfrm>
+          <a:prstGeom prst="rect">
+            <a:avLst/>
+          </a:prstGeom>
+          <a:noFill/>
+          <a:ln/>
+        </p:spPr>
+        <p:txBody>
+          <a:bodyPr wrap="square" lIns="0" tIns="0" rIns="0" bIns="0" rtlCol="0" anchor="ctr"/>
+          <a:lstStyle/>
+          <a:p>
+            <a:pPr indent="0" marL="0">
+              <a:buNone/>
+            </a:pPr>
+            <a:r>
+              <a:rPr lang="en-US" sz="1200" b="1" spc="100" kern="0" dirty="0">
+                <a:solidFill>
+                  <a:srgbClr val="5F706E"/>
+                </a:solidFill>
+                <a:latin typeface="Calibri" pitchFamily="34" charset="0"/>
+                <a:ea typeface="Calibri" pitchFamily="34" charset="-122"/>
+                <a:cs typeface="Calibri" pitchFamily="34" charset="-120"/>
+              </a:rPr>
+              <a:t>Fase 3</a:t>
+            </a:r>
+            <a:endParaRPr lang="en-US" sz="1200" dirty="0"/>
+          </a:p>
+        </p:txBody>
+      </p:sp>
+      <p:sp>
+        <p:nvSpPr>
+          <p:cNvPr id="32" name="Text 30"/>
+          <p:cNvSpPr/>
+          <p:nvPr/>
+        </p:nvSpPr>
+        <p:spPr>
+          <a:xfrm>
+            <a:off x="9253728" y="2606040"/>
+            <a:ext cx="2139696" cy="731520"/>
+          </a:xfrm>
+          <a:prstGeom prst="rect">
+            <a:avLst/>
+          </a:prstGeom>
+          <a:noFill/>
+          <a:ln/>
+        </p:spPr>
+        <p:txBody>
+          <a:bodyPr wrap="square" lIns="0" tIns="0" rIns="0" bIns="0" rtlCol="0" anchor="t"/>
+          <a:lstStyle/>
+          <a:p>
+            <a:pPr indent="0" marL="0">
+              <a:lnSpc>
+                <a:spcPts val="2300"/>
+              </a:lnSpc>
+              <a:buNone/>
+            </a:pPr>
+            <a:r>
+              <a:rPr lang="en-US" sz="1800" b="1" dirty="0">
+                <a:solidFill>
+                  <a:srgbClr val="12312F"/>
+                </a:solidFill>
+                <a:latin typeface="Cambria" pitchFamily="34" charset="0"/>
+                <a:ea typeface="Cambria" pitchFamily="34" charset="-122"/>
+                <a:cs typeface="Cambria" pitchFamily="34" charset="-120"/>
+              </a:rPr>
+              <a:t>Módulos adicionales</a:t>
+            </a:r>
+            <a:endParaRPr lang="en-US" sz="1800" dirty="0"/>
+          </a:p>
+        </p:txBody>
+      </p:sp>
+      <p:sp>
+        <p:nvSpPr>
+          <p:cNvPr id="33" name="Text 31"/>
+          <p:cNvSpPr/>
+          <p:nvPr/>
+        </p:nvSpPr>
+        <p:spPr>
+          <a:xfrm>
+            <a:off x="9253728" y="3383280"/>
+            <a:ext cx="2139696" cy="960120"/>
+          </a:xfrm>
+          <a:prstGeom prst="rect">
+            <a:avLst/>
+          </a:prstGeom>
+          <a:noFill/>
+          <a:ln/>
+        </p:spPr>
+        <p:txBody>
+          <a:bodyPr wrap="square" lIns="0" tIns="0" rIns="0" bIns="0" rtlCol="0" anchor="t"/>
+          <a:lstStyle/>
+          <a:p>
+            <a:pPr indent="0" marL="0">
+              <a:lnSpc>
+                <a:spcPts val="1700"/>
+              </a:lnSpc>
+              <a:buNone/>
+            </a:pPr>
+            <a:r>
+              <a:rPr lang="en-US" sz="1200" dirty="0">
+                <a:solidFill>
+                  <a:srgbClr val="5F706E"/>
+                </a:solidFill>
+                <a:latin typeface="Calibri" pitchFamily="34" charset="0"/>
+                <a:ea typeface="Calibri" pitchFamily="34" charset="-122"/>
+                <a:cs typeface="Calibri" pitchFamily="34" charset="-120"/>
+              </a:rPr>
+              <a:t>Los nueve restantes, por orden de prioridad (sección 4.2)</a:t>
+            </a:r>
+            <a:endParaRPr lang="en-US" sz="1200" dirty="0"/>
+          </a:p>
+        </p:txBody>
+      </p:sp>
+      <p:sp>
+        <p:nvSpPr>
+          <p:cNvPr id="34" name="Shape 32"/>
+          <p:cNvSpPr/>
+          <p:nvPr/>
+        </p:nvSpPr>
+        <p:spPr>
+          <a:xfrm>
+            <a:off x="9253728" y="4389120"/>
+            <a:ext cx="1417320" cy="329184"/>
           </a:xfrm>
           <a:prstGeom prst="roundRect">
             <a:avLst>
-              <a:gd name="adj" fmla="val 10588"/>
+              <a:gd name="adj" fmla="val 50000"/>
             </a:avLst>
           </a:prstGeom>
           <a:solidFill>
-            <a:srgbClr val="2E7B72"/>
+            <a:srgbClr val="E7EDEB"/>
           </a:solidFill>
-          <a:ln w="12700">
+          <a:ln w="6350">
             <a:solidFill>
-              <a:srgbClr val="7FC8BE"/>
+              <a:srgbClr val="D3DFDC"/>
             </a:solidFill>
             <a:prstDash val="solid"/>
           </a:ln>
@@ -15531,14 +15777,14 @@
       </p:sp>
       <p:sp>
         <p:nvSpPr>
-          <p:cNvPr id="10" name="Text 8"/>
-          <p:cNvSpPr/>
-          <p:nvPr/>
-        </p:nvSpPr>
-        <p:spPr>
-          <a:xfrm>
-            <a:off x="2825496" y="2560320"/>
-            <a:ext cx="1947672" cy="777240"/>
+          <p:cNvPr id="35" name="Text 33"/>
+          <p:cNvSpPr/>
+          <p:nvPr/>
+        </p:nvSpPr>
+        <p:spPr>
+          <a:xfrm>
+            <a:off x="9253728" y="4389120"/>
+            <a:ext cx="1417320" cy="329184"/>
           </a:xfrm>
           <a:prstGeom prst="rect">
             <a:avLst/>
@@ -15554,369 +15800,30 @@
               <a:buNone/>
             </a:pPr>
             <a:r>
-              <a:rPr lang="en-US" sz="1300" b="1" dirty="0">
-                <a:solidFill>
-                  <a:srgbClr val="FFFFFF"/>
-                </a:solidFill>
-                <a:latin typeface="Calibri" pitchFamily="34" charset="0"/>
-                <a:ea typeface="Calibri" pitchFamily="34" charset="-122"/>
-                <a:cs typeface="Calibri" pitchFamily="34" charset="-120"/>
-              </a:rPr>
-              <a:t>API autenticada</a:t>
-            </a:r>
-            <a:endParaRPr lang="en-US" sz="1300" dirty="0"/>
-          </a:p>
-        </p:txBody>
-      </p:sp>
-      <p:sp>
-        <p:nvSpPr>
-          <p:cNvPr id="11" name="Shape 9"/>
-          <p:cNvSpPr/>
-          <p:nvPr/>
-        </p:nvSpPr>
-        <p:spPr>
-          <a:xfrm>
-            <a:off x="4818888" y="2825496"/>
-            <a:ext cx="237744" cy="237744"/>
-          </a:xfrm>
-          <a:prstGeom prst="rightArrow">
-            <a:avLst/>
-          </a:prstGeom>
-          <a:solidFill>
-            <a:srgbClr val="7FC8BE"/>
-          </a:solidFill>
-          <a:ln w="6350">
-            <a:solidFill>
-              <a:srgbClr val="7FC8BE"/>
-            </a:solidFill>
-            <a:prstDash val="solid"/>
-          </a:ln>
-        </p:spPr>
-      </p:sp>
-      <p:sp>
-        <p:nvSpPr>
-          <p:cNvPr id="12" name="Shape 10"/>
-          <p:cNvSpPr/>
-          <p:nvPr/>
-        </p:nvSpPr>
-        <p:spPr>
-          <a:xfrm>
-            <a:off x="5102352" y="2560320"/>
-            <a:ext cx="1947672" cy="777240"/>
-          </a:xfrm>
-          <a:prstGeom prst="roundRect">
-            <a:avLst>
-              <a:gd name="adj" fmla="val 10588"/>
-            </a:avLst>
-          </a:prstGeom>
-          <a:solidFill>
-            <a:srgbClr val="2E7B72"/>
-          </a:solidFill>
-          <a:ln w="12700">
-            <a:solidFill>
-              <a:srgbClr val="7FC8BE"/>
-            </a:solidFill>
-            <a:prstDash val="solid"/>
-          </a:ln>
-        </p:spPr>
-      </p:sp>
-      <p:sp>
-        <p:nvSpPr>
-          <p:cNvPr id="13" name="Text 11"/>
-          <p:cNvSpPr/>
-          <p:nvPr/>
-        </p:nvSpPr>
-        <p:spPr>
-          <a:xfrm>
-            <a:off x="5102352" y="2560320"/>
-            <a:ext cx="1947672" cy="777240"/>
-          </a:xfrm>
-          <a:prstGeom prst="rect">
-            <a:avLst/>
-          </a:prstGeom>
-          <a:noFill/>
-          <a:ln/>
-        </p:spPr>
-        <p:txBody>
-          <a:bodyPr wrap="square" lIns="0" tIns="0" rIns="0" bIns="0" rtlCol="0" anchor="ctr"/>
-          <a:lstStyle/>
-          <a:p>
-            <a:pPr algn="ctr" indent="0" marL="0">
-              <a:buNone/>
-            </a:pPr>
-            <a:r>
-              <a:rPr lang="en-US" sz="1300" b="1" dirty="0">
-                <a:solidFill>
-                  <a:srgbClr val="FFFFFF"/>
-                </a:solidFill>
-                <a:latin typeface="Calibri" pitchFamily="34" charset="0"/>
-                <a:ea typeface="Calibri" pitchFamily="34" charset="-122"/>
-                <a:cs typeface="Calibri" pitchFamily="34" charset="-120"/>
-              </a:rPr>
-              <a:t>Aplicación</a:t>
-            </a:r>
-            <a:endParaRPr lang="en-US" sz="1300" dirty="0"/>
-          </a:p>
-        </p:txBody>
-      </p:sp>
-      <p:sp>
-        <p:nvSpPr>
-          <p:cNvPr id="14" name="Shape 12"/>
-          <p:cNvSpPr/>
-          <p:nvPr/>
-        </p:nvSpPr>
-        <p:spPr>
-          <a:xfrm>
-            <a:off x="7095744" y="2825496"/>
-            <a:ext cx="237744" cy="237744"/>
-          </a:xfrm>
-          <a:prstGeom prst="rightArrow">
-            <a:avLst/>
-          </a:prstGeom>
-          <a:solidFill>
-            <a:srgbClr val="7FC8BE"/>
-          </a:solidFill>
-          <a:ln w="6350">
-            <a:solidFill>
-              <a:srgbClr val="7FC8BE"/>
-            </a:solidFill>
-            <a:prstDash val="solid"/>
-          </a:ln>
-        </p:spPr>
-      </p:sp>
-      <p:sp>
-        <p:nvSpPr>
-          <p:cNvPr id="15" name="Shape 13"/>
-          <p:cNvSpPr/>
-          <p:nvPr/>
-        </p:nvSpPr>
-        <p:spPr>
-          <a:xfrm>
-            <a:off x="7379208" y="2560320"/>
-            <a:ext cx="1947672" cy="777240"/>
-          </a:xfrm>
-          <a:prstGeom prst="roundRect">
-            <a:avLst>
-              <a:gd name="adj" fmla="val 10588"/>
-            </a:avLst>
-          </a:prstGeom>
-          <a:solidFill>
-            <a:srgbClr val="2E7B72"/>
-          </a:solidFill>
-          <a:ln w="12700">
-            <a:solidFill>
-              <a:srgbClr val="7FC8BE"/>
-            </a:solidFill>
-            <a:prstDash val="solid"/>
-          </a:ln>
-        </p:spPr>
-      </p:sp>
-      <p:sp>
-        <p:nvSpPr>
-          <p:cNvPr id="16" name="Text 14"/>
-          <p:cNvSpPr/>
-          <p:nvPr/>
-        </p:nvSpPr>
-        <p:spPr>
-          <a:xfrm>
-            <a:off x="7379208" y="2560320"/>
-            <a:ext cx="1947672" cy="777240"/>
-          </a:xfrm>
-          <a:prstGeom prst="rect">
-            <a:avLst/>
-          </a:prstGeom>
-          <a:noFill/>
-          <a:ln/>
-        </p:spPr>
-        <p:txBody>
-          <a:bodyPr wrap="square" lIns="0" tIns="0" rIns="0" bIns="0" rtlCol="0" anchor="ctr"/>
-          <a:lstStyle/>
-          <a:p>
-            <a:pPr algn="ctr" indent="0" marL="0">
-              <a:buNone/>
-            </a:pPr>
-            <a:r>
-              <a:rPr lang="en-US" sz="1300" b="1" dirty="0">
-                <a:solidFill>
-                  <a:srgbClr val="FFFFFF"/>
-                </a:solidFill>
-                <a:latin typeface="Calibri" pitchFamily="34" charset="0"/>
-                <a:ea typeface="Calibri" pitchFamily="34" charset="-122"/>
-                <a:cs typeface="Calibri" pitchFamily="34" charset="-120"/>
-              </a:rPr>
-              <a:t>Dominio</a:t>
-            </a:r>
-            <a:endParaRPr lang="en-US" sz="1300" dirty="0"/>
-          </a:p>
-        </p:txBody>
-      </p:sp>
-      <p:sp>
-        <p:nvSpPr>
-          <p:cNvPr id="17" name="Shape 15"/>
-          <p:cNvSpPr/>
-          <p:nvPr/>
-        </p:nvSpPr>
-        <p:spPr>
-          <a:xfrm>
-            <a:off x="9372600" y="2825496"/>
-            <a:ext cx="237744" cy="237744"/>
-          </a:xfrm>
-          <a:prstGeom prst="rightArrow">
-            <a:avLst/>
-          </a:prstGeom>
-          <a:solidFill>
-            <a:srgbClr val="7FC8BE"/>
-          </a:solidFill>
-          <a:ln w="6350">
-            <a:solidFill>
-              <a:srgbClr val="7FC8BE"/>
-            </a:solidFill>
-            <a:prstDash val="solid"/>
-          </a:ln>
-        </p:spPr>
-      </p:sp>
-      <p:sp>
-        <p:nvSpPr>
-          <p:cNvPr id="18" name="Shape 16"/>
-          <p:cNvSpPr/>
-          <p:nvPr/>
-        </p:nvSpPr>
-        <p:spPr>
-          <a:xfrm>
-            <a:off x="9656064" y="2560320"/>
-            <a:ext cx="1947672" cy="777240"/>
-          </a:xfrm>
-          <a:prstGeom prst="roundRect">
-            <a:avLst>
-              <a:gd name="adj" fmla="val 10588"/>
-            </a:avLst>
-          </a:prstGeom>
-          <a:solidFill>
-            <a:srgbClr val="1B4B48"/>
-          </a:solidFill>
-          <a:ln w="12700">
-            <a:solidFill>
-              <a:srgbClr val="7FC8BE"/>
-            </a:solidFill>
-            <a:prstDash val="solid"/>
-          </a:ln>
-        </p:spPr>
-      </p:sp>
-      <p:sp>
-        <p:nvSpPr>
-          <p:cNvPr id="19" name="Text 17"/>
-          <p:cNvSpPr/>
-          <p:nvPr/>
-        </p:nvSpPr>
-        <p:spPr>
-          <a:xfrm>
-            <a:off x="9656064" y="2560320"/>
-            <a:ext cx="1947672" cy="777240"/>
-          </a:xfrm>
-          <a:prstGeom prst="rect">
-            <a:avLst/>
-          </a:prstGeom>
-          <a:noFill/>
-          <a:ln/>
-        </p:spPr>
-        <p:txBody>
-          <a:bodyPr wrap="square" lIns="0" tIns="0" rIns="0" bIns="0" rtlCol="0" anchor="ctr"/>
-          <a:lstStyle/>
-          <a:p>
-            <a:pPr algn="ctr" indent="0" marL="0">
-              <a:buNone/>
-            </a:pPr>
-            <a:r>
-              <a:rPr lang="en-US" sz="1300" b="1" dirty="0">
-                <a:solidFill>
-                  <a:srgbClr val="FFFFFF"/>
-                </a:solidFill>
-                <a:latin typeface="Calibri" pitchFamily="34" charset="0"/>
-                <a:ea typeface="Calibri" pitchFamily="34" charset="-122"/>
-                <a:cs typeface="Calibri" pitchFamily="34" charset="-120"/>
-              </a:rPr>
-              <a:t>PostgreSQL</a:t>
-            </a:r>
-            <a:endParaRPr lang="en-US" sz="1300" dirty="0"/>
-          </a:p>
-        </p:txBody>
-      </p:sp>
-      <p:sp>
-        <p:nvSpPr>
-          <p:cNvPr id="20" name="Shape 18"/>
-          <p:cNvSpPr/>
-          <p:nvPr/>
-        </p:nvSpPr>
-        <p:spPr>
-          <a:xfrm>
-            <a:off x="548640" y="3931920"/>
-            <a:ext cx="5349240" cy="1600200"/>
-          </a:xfrm>
-          <a:prstGeom prst="roundRect">
-            <a:avLst>
-              <a:gd name="adj" fmla="val 5143"/>
-            </a:avLst>
-          </a:prstGeom>
-          <a:solidFill>
-            <a:srgbClr val="163A38"/>
-          </a:solidFill>
-          <a:ln w="12700">
-            <a:solidFill>
-              <a:srgbClr val="2F5754"/>
-            </a:solidFill>
-            <a:prstDash val="solid"/>
-          </a:ln>
-        </p:spPr>
-      </p:sp>
-      <p:sp>
-        <p:nvSpPr>
-          <p:cNvPr id="21" name="Text 19"/>
-          <p:cNvSpPr/>
-          <p:nvPr/>
-        </p:nvSpPr>
-        <p:spPr>
-          <a:xfrm>
-            <a:off x="896112" y="4160520"/>
-            <a:ext cx="4663440" cy="329184"/>
-          </a:xfrm>
-          <a:prstGeom prst="rect">
-            <a:avLst/>
-          </a:prstGeom>
-          <a:noFill/>
-          <a:ln/>
-        </p:spPr>
-        <p:txBody>
-          <a:bodyPr wrap="square" lIns="0" tIns="0" rIns="0" bIns="0" rtlCol="0" anchor="ctr"/>
-          <a:lstStyle/>
-          <a:p>
-            <a:pPr indent="0" marL="0">
-              <a:buNone/>
-            </a:pPr>
-            <a:r>
-              <a:rPr lang="en-US" sz="1700" b="1" dirty="0">
-                <a:solidFill>
-                  <a:srgbClr val="FFFFFF"/>
-                </a:solidFill>
-                <a:latin typeface="Cambria" pitchFamily="34" charset="0"/>
-                <a:ea typeface="Cambria" pitchFamily="34" charset="-122"/>
-                <a:cs typeface="Cambria" pitchFamily="34" charset="-120"/>
-              </a:rPr>
-              <a:t>Lo entregado</a:t>
-            </a:r>
-            <a:endParaRPr lang="en-US" sz="1700" dirty="0"/>
-          </a:p>
-        </p:txBody>
-      </p:sp>
-      <p:sp>
-        <p:nvSpPr>
-          <p:cNvPr id="22" name="Text 20"/>
-          <p:cNvSpPr/>
-          <p:nvPr/>
-        </p:nvSpPr>
-        <p:spPr>
-          <a:xfrm>
-            <a:off x="896112" y="4572000"/>
-            <a:ext cx="4663440" cy="822960"/>
+              <a:rPr lang="en-US" sz="1050" b="1" dirty="0">
+                <a:solidFill>
+                  <a:srgbClr val="5F706E"/>
+                </a:solidFill>
+                <a:latin typeface="Calibri" pitchFamily="34" charset="0"/>
+                <a:ea typeface="Calibri" pitchFamily="34" charset="-122"/>
+                <a:cs typeface="Calibri" pitchFamily="34" charset="-120"/>
+              </a:rPr>
+              <a:t>Pendiente</a:t>
+            </a:r>
+            <a:endParaRPr lang="en-US" sz="1050" dirty="0"/>
+          </a:p>
+        </p:txBody>
+      </p:sp>
+      <p:sp>
+        <p:nvSpPr>
+          <p:cNvPr id="36" name="Text 34"/>
+          <p:cNvSpPr/>
+          <p:nvPr/>
+        </p:nvSpPr>
+        <p:spPr>
+          <a:xfrm>
+            <a:off x="548640" y="5047488"/>
+            <a:ext cx="11094415" cy="457200"/>
           </a:xfrm>
           <a:prstGeom prst="rect">
             <a:avLst/>
@@ -15930,101 +15837,35 @@
           <a:p>
             <a:pPr indent="0" marL="0">
               <a:lnSpc>
-                <a:spcPts val="1800"/>
+                <a:spcPts val="1700"/>
               </a:lnSpc>
               <a:buNone/>
             </a:pPr>
             <a:r>
-              <a:rPr lang="en-US" sz="1250" dirty="0">
-                <a:solidFill>
-                  <a:srgbClr val="BFD3D0"/>
-                </a:solidFill>
-                <a:latin typeface="Calibri" pitchFamily="34" charset="0"/>
-                <a:ea typeface="Calibri" pitchFamily="34" charset="-122"/>
-                <a:cs typeface="Calibri" pitchFamily="34" charset="-120"/>
-              </a:rPr>
-              <a:t>El core completo, cuatro módulos y el cierre de huecos, sobre activación por hogar y avisos programados. 106 operaciones en el contrato, 31 tablas con Row-Level Security y diez recorridos verticales.</a:t>
-            </a:r>
-            <a:endParaRPr lang="en-US" sz="1250" dirty="0"/>
-          </a:p>
-        </p:txBody>
-      </p:sp>
-      <p:sp>
-        <p:nvSpPr>
-          <p:cNvPr id="23" name="Shape 21"/>
-          <p:cNvSpPr/>
-          <p:nvPr/>
-        </p:nvSpPr>
-        <p:spPr>
-          <a:xfrm>
-            <a:off x="6291072" y="3931920"/>
-            <a:ext cx="5349240" cy="1600200"/>
-          </a:xfrm>
-          <a:prstGeom prst="roundRect">
-            <a:avLst>
-              <a:gd name="adj" fmla="val 5143"/>
-            </a:avLst>
-          </a:prstGeom>
-          <a:solidFill>
-            <a:srgbClr val="163A38"/>
-          </a:solidFill>
-          <a:ln w="12700">
-            <a:solidFill>
-              <a:srgbClr val="2F5754"/>
-            </a:solidFill>
-            <a:prstDash val="solid"/>
-          </a:ln>
-        </p:spPr>
-      </p:sp>
-      <p:sp>
-        <p:nvSpPr>
-          <p:cNvPr id="24" name="Text 22"/>
-          <p:cNvSpPr/>
-          <p:nvPr/>
-        </p:nvSpPr>
-        <p:spPr>
-          <a:xfrm>
-            <a:off x="6638544" y="4160520"/>
-            <a:ext cx="4663440" cy="329184"/>
-          </a:xfrm>
-          <a:prstGeom prst="rect">
-            <a:avLst/>
-          </a:prstGeom>
-          <a:noFill/>
-          <a:ln/>
-        </p:spPr>
-        <p:txBody>
-          <a:bodyPr wrap="square" lIns="0" tIns="0" rIns="0" bIns="0" rtlCol="0" anchor="ctr"/>
-          <a:lstStyle/>
-          <a:p>
-            <a:pPr indent="0" marL="0">
-              <a:buNone/>
-            </a:pPr>
-            <a:r>
-              <a:rPr lang="en-US" sz="1700" b="1" dirty="0">
-                <a:solidFill>
-                  <a:srgbClr val="FFFFFF"/>
-                </a:solidFill>
-                <a:latin typeface="Cambria" pitchFamily="34" charset="0"/>
-                <a:ea typeface="Cambria" pitchFamily="34" charset="-122"/>
-                <a:cs typeface="Cambria" pitchFamily="34" charset="-120"/>
-              </a:rPr>
-              <a:t>Lo que queda</a:t>
-            </a:r>
-            <a:endParaRPr lang="en-US" sz="1700" dirty="0"/>
-          </a:p>
-        </p:txBody>
-      </p:sp>
-      <p:sp>
-        <p:nvSpPr>
-          <p:cNvPr id="25" name="Text 23"/>
-          <p:cNvSpPr/>
-          <p:nvPr/>
-        </p:nvSpPr>
-        <p:spPr>
-          <a:xfrm>
-            <a:off x="6638544" y="4572000"/>
-            <a:ext cx="4663440" cy="822960"/>
+              <a:rPr lang="en-US" sz="1200" dirty="0">
+                <a:solidFill>
+                  <a:srgbClr val="5F706E"/>
+                </a:solidFill>
+                <a:latin typeface="Calibri" pitchFamily="34" charset="0"/>
+                <a:ea typeface="Calibri" pitchFamily="34" charset="-122"/>
+                <a:cs typeface="Calibri" pitchFamily="34" charset="-120"/>
+              </a:rPr>
+              <a:t>Entre la Fase 2 y la 3, dos bloques sin número: el cierre de huecos (2026-08-20) — baja de hogar y de cuenta, Transactional Outbox, HEIC, los cuatro atributos y el «hoy» del hogar — y el despliegue (2026-08-21, ADR-016): DRP en producción en un VPS, sin dominio ni TLS a propósito.</a:t>
+            </a:r>
+            <a:endParaRPr lang="en-US" sz="1200" dirty="0"/>
+          </a:p>
+        </p:txBody>
+      </p:sp>
+      <p:sp>
+        <p:nvSpPr>
+          <p:cNvPr id="37" name="Text 35"/>
+          <p:cNvSpPr/>
+          <p:nvPr/>
+        </p:nvSpPr>
+        <p:spPr>
+          <a:xfrm>
+            <a:off x="548640" y="5577840"/>
+            <a:ext cx="11094415" cy="457200"/>
           </a:xfrm>
           <a:prstGeom prst="rect">
             <a:avLst/>
@@ -16038,67 +15879,28 @@
           <a:p>
             <a:pPr indent="0" marL="0">
               <a:lnSpc>
-                <a:spcPts val="1800"/>
+                <a:spcPts val="1700"/>
               </a:lnSpc>
               <a:buNone/>
             </a:pPr>
             <a:r>
-              <a:rPr lang="en-US" sz="1250" dirty="0">
-                <a:solidFill>
-                  <a:srgbClr val="BFD3D0"/>
-                </a:solidFill>
-                <a:latin typeface="Calibri" pitchFamily="34" charset="0"/>
-                <a:ea typeface="Calibri" pitchFamily="34" charset="-122"/>
-                <a:cs typeface="Calibri" pitchFamily="34" charset="-120"/>
-              </a:rPr>
-              <a:t>Los nueve módulos restantes, por orden de prioridad. Ninguno pide arquitectura nueva: el camino de un módulo está recorrido cuatro veces.</a:t>
-            </a:r>
-            <a:endParaRPr lang="en-US" sz="1250" dirty="0"/>
-          </a:p>
-        </p:txBody>
-      </p:sp>
-      <p:sp>
-        <p:nvSpPr>
-          <p:cNvPr id="26" name="Text 24"/>
-          <p:cNvSpPr/>
-          <p:nvPr/>
-        </p:nvSpPr>
-        <p:spPr>
-          <a:xfrm>
-            <a:off x="548640" y="5806440"/>
-            <a:ext cx="11094415" cy="320040"/>
-          </a:xfrm>
-          <a:prstGeom prst="rect">
-            <a:avLst/>
-          </a:prstGeom>
-          <a:noFill/>
-          <a:ln/>
-        </p:spPr>
-        <p:txBody>
-          <a:bodyPr wrap="square" lIns="0" tIns="0" rIns="0" bIns="0" rtlCol="0" anchor="ctr"/>
-          <a:lstStyle/>
-          <a:p>
-            <a:pPr indent="0" marL="0">
-              <a:buNone/>
-            </a:pPr>
-            <a:r>
-              <a:rPr lang="en-US" sz="1100" dirty="0">
-                <a:solidFill>
-                  <a:srgbClr val="7E9895"/>
-                </a:solidFill>
-                <a:latin typeface="Calibri" pitchFamily="34" charset="0"/>
-                <a:ea typeface="Calibri" pitchFamily="34" charset="-122"/>
-                <a:cs typeface="Calibri" pitchFamily="34" charset="-120"/>
-              </a:rPr>
-              <a:t>Fuente: README.md · documento vivo, última actualización 2026-08-20</a:t>
-            </a:r>
-            <a:endParaRPr lang="en-US" sz="1100" dirty="0"/>
-          </a:p>
-        </p:txBody>
-      </p:sp>
-      <p:sp>
-        <p:nvSpPr>
-          <p:cNvPr id="27" name="Text 25"/>
+              <a:rPr lang="en-US" sz="1200" i="1" dirty="0">
+                <a:solidFill>
+                  <a:srgbClr val="2E7B72"/>
+                </a:solidFill>
+                <a:latin typeface="Calibri" pitchFamily="34" charset="0"/>
+                <a:ea typeface="Calibri" pitchFamily="34" charset="-122"/>
+                <a:cs typeface="Calibri" pitchFamily="34" charset="-120"/>
+              </a:rPr>
+              <a:t>Criterio de validación (ADR-001), cumplido en todo lo entregado: un recorrido vertical que atraviesa frontend, API autenticada, aplicación, dominio y PostgreSQL. Hoy son once, en un navegador de verdad.</a:t>
+            </a:r>
+            <a:endParaRPr lang="en-US" sz="1200" dirty="0"/>
+          </a:p>
+        </p:txBody>
+      </p:sp>
+      <p:sp>
+        <p:nvSpPr>
+          <p:cNvPr id="38" name="Text 36"/>
           <p:cNvSpPr/>
           <p:nvPr/>
         </p:nvSpPr>
@@ -16123,7 +15925,7 @@
             <a:r>
               <a:rPr lang="en-US" sz="900" dirty="0">
                 <a:solidFill>
-                  <a:srgbClr val="6E8C88"/>
+                  <a:srgbClr val="93A3A0"/>
                 </a:solidFill>
                 <a:latin typeface="Calibri" pitchFamily="34" charset="0"/>
                 <a:ea typeface="Calibri" pitchFamily="34" charset="-122"/>
@@ -16137,7 +15939,7 @@
       </p:sp>
       <p:sp>
         <p:nvSpPr>
-          <p:cNvPr id="28" name="Text 26"/>
+          <p:cNvPr id="39" name="Text 37"/>
           <p:cNvSpPr/>
           <p:nvPr/>
         </p:nvSpPr>
@@ -16162,7 +15964,7 @@
             <a:r>
               <a:rPr lang="en-US" sz="900" dirty="0">
                 <a:solidFill>
-                  <a:srgbClr val="6E8C88"/>
+                  <a:srgbClr val="93A3A0"/>
                 </a:solidFill>
                 <a:latin typeface="Calibri" pitchFamily="34" charset="0"/>
                 <a:ea typeface="Calibri" pitchFamily="34" charset="-122"/>
@@ -16948,6 +16750,960 @@
                 <a:cs typeface="Calibri" pitchFamily="34" charset="-120"/>
               </a:rPr>
               <a:t>1</a:t>
+            </a:r>
+            <a:endParaRPr lang="en-US" sz="900" dirty="0"/>
+          </a:p>
+        </p:txBody>
+      </p:sp>
+    </p:spTree>
+  </p:cSld>
+  <p:clrMapOvr>
+    <a:masterClrMapping/>
+  </p:clrMapOvr>
+</p:sld>
+</file>
+
+<file path=ppt/slides/slide20.xml><?xml version="1.0" encoding="utf-8"?>
+<p:sld xmlns:a="http://schemas.openxmlformats.org/drawingml/2006/main" xmlns:r="http://schemas.openxmlformats.org/officeDocument/2006/relationships" xmlns:p="http://schemas.openxmlformats.org/presentationml/2006/main">
+  <p:cSld name="Slide 20">
+    <p:bg>
+      <p:bgPr>
+        <a:solidFill>
+          <a:srgbClr val="12312F"/>
+        </a:solidFill>
+      </p:bgPr>
+    </p:bg>
+    <p:spTree>
+      <p:nvGrpSpPr>
+        <p:cNvPr id="1" name=""/>
+        <p:cNvGrpSpPr/>
+        <p:nvPr/>
+      </p:nvGrpSpPr>
+      <p:grpSpPr>
+        <a:xfrm>
+          <a:off x="0" y="0"/>
+          <a:ext cx="0" cy="0"/>
+          <a:chOff x="0" y="0"/>
+          <a:chExt cx="0" cy="0"/>
+        </a:xfrm>
+      </p:grpSpPr>
+      <p:sp>
+        <p:nvSpPr>
+          <p:cNvPr id="2" name="Text 0"/>
+          <p:cNvSpPr/>
+          <p:nvPr/>
+        </p:nvSpPr>
+        <p:spPr>
+          <a:xfrm>
+            <a:off x="548640" y="384048"/>
+            <a:ext cx="11094415" cy="237744"/>
+          </a:xfrm>
+          <a:prstGeom prst="rect">
+            <a:avLst/>
+          </a:prstGeom>
+          <a:noFill/>
+          <a:ln/>
+        </p:spPr>
+        <p:txBody>
+          <a:bodyPr wrap="square" lIns="0" tIns="0" rIns="0" bIns="0" rtlCol="0" anchor="ctr"/>
+          <a:lstStyle/>
+          <a:p>
+            <a:pPr algn="l" indent="0" marL="0">
+              <a:buNone/>
+            </a:pPr>
+            <a:r>
+              <a:rPr lang="en-US" sz="1100" b="1" spc="200" kern="0" dirty="0">
+                <a:solidFill>
+                  <a:srgbClr val="7FC8BE"/>
+                </a:solidFill>
+                <a:latin typeface="Calibri" pitchFamily="34" charset="0"/>
+                <a:ea typeface="Calibri" pitchFamily="34" charset="-122"/>
+                <a:cs typeface="Calibri" pitchFamily="34" charset="-120"/>
+              </a:rPr>
+              <a:t>SIGUIENTE PASO</a:t>
+            </a:r>
+            <a:endParaRPr lang="en-US" sz="1100" dirty="0"/>
+          </a:p>
+        </p:txBody>
+      </p:sp>
+      <p:sp>
+        <p:nvSpPr>
+          <p:cNvPr id="3" name="Text 1"/>
+          <p:cNvSpPr/>
+          <p:nvPr/>
+        </p:nvSpPr>
+        <p:spPr>
+          <a:xfrm>
+            <a:off x="548640" y="658368"/>
+            <a:ext cx="11094415" cy="566928"/>
+          </a:xfrm>
+          <a:prstGeom prst="rect">
+            <a:avLst/>
+          </a:prstGeom>
+          <a:noFill/>
+          <a:ln/>
+        </p:spPr>
+        <p:txBody>
+          <a:bodyPr wrap="square" lIns="0" tIns="0" rIns="0" bIns="0" rtlCol="0" anchor="ctr"/>
+          <a:lstStyle/>
+          <a:p>
+            <a:pPr algn="l" indent="0" marL="0">
+              <a:buNone/>
+            </a:pPr>
+            <a:r>
+              <a:rPr lang="en-US" sz="3200" b="1" dirty="0">
+                <a:solidFill>
+                  <a:srgbClr val="FFFFFF"/>
+                </a:solidFill>
+                <a:latin typeface="Cambria" pitchFamily="34" charset="0"/>
+                <a:ea typeface="Cambria" pitchFamily="34" charset="-122"/>
+                <a:cs typeface="Cambria" pitchFamily="34" charset="-120"/>
+              </a:rPr>
+              <a:t>Entregado, desplegado — y a la espera de la Fase 3</a:t>
+            </a:r>
+            <a:endParaRPr lang="en-US" sz="3200" dirty="0"/>
+          </a:p>
+        </p:txBody>
+      </p:sp>
+      <p:sp>
+        <p:nvSpPr>
+          <p:cNvPr id="4" name="Text 2"/>
+          <p:cNvSpPr/>
+          <p:nvPr/>
+        </p:nvSpPr>
+        <p:spPr>
+          <a:xfrm>
+            <a:off x="548640" y="1325880"/>
+            <a:ext cx="8686800" cy="566928"/>
+          </a:xfrm>
+          <a:prstGeom prst="rect">
+            <a:avLst/>
+          </a:prstGeom>
+          <a:noFill/>
+          <a:ln/>
+        </p:spPr>
+        <p:txBody>
+          <a:bodyPr wrap="square" lIns="0" tIns="0" rIns="0" bIns="0" rtlCol="0" anchor="t"/>
+          <a:lstStyle/>
+          <a:p>
+            <a:pPr indent="0" marL="0">
+              <a:lnSpc>
+                <a:spcPts val="2100"/>
+              </a:lnSpc>
+              <a:buNone/>
+            </a:pPr>
+            <a:r>
+              <a:rPr lang="en-US" sz="1500" dirty="0">
+                <a:solidFill>
+                  <a:srgbClr val="C4D4D1"/>
+                </a:solidFill>
+                <a:latin typeface="Calibri" pitchFamily="34" charset="0"/>
+                <a:ea typeface="Calibri" pitchFamily="34" charset="-122"/>
+                <a:cs typeface="Calibri" pitchFamily="34" charset="-120"/>
+              </a:rPr>
+              <a:t>Lo que queda es la Fase 3: los nueve módulos restantes de la sección 4.2, sobre un mecanismo de activación que ya existe y una plataforma de avisos que ya entrega.</a:t>
+            </a:r>
+            <a:endParaRPr lang="en-US" sz="1500" dirty="0"/>
+          </a:p>
+        </p:txBody>
+      </p:sp>
+      <p:sp>
+        <p:nvSpPr>
+          <p:cNvPr id="5" name="Text 3"/>
+          <p:cNvSpPr/>
+          <p:nvPr/>
+        </p:nvSpPr>
+        <p:spPr>
+          <a:xfrm>
+            <a:off x="548640" y="2148840"/>
+            <a:ext cx="11094415" cy="274320"/>
+          </a:xfrm>
+          <a:prstGeom prst="rect">
+            <a:avLst/>
+          </a:prstGeom>
+          <a:noFill/>
+          <a:ln/>
+        </p:spPr>
+        <p:txBody>
+          <a:bodyPr wrap="square" lIns="0" tIns="0" rIns="0" bIns="0" rtlCol="0" anchor="ctr"/>
+          <a:lstStyle/>
+          <a:p>
+            <a:pPr indent="0" marL="0">
+              <a:buNone/>
+            </a:pPr>
+            <a:r>
+              <a:rPr lang="en-US" sz="1100" b="1" spc="200" kern="0" dirty="0">
+                <a:solidFill>
+                  <a:srgbClr val="7FC8BE"/>
+                </a:solidFill>
+                <a:latin typeface="Calibri" pitchFamily="34" charset="0"/>
+                <a:ea typeface="Calibri" pitchFamily="34" charset="-122"/>
+                <a:cs typeface="Calibri" pitchFamily="34" charset="-120"/>
+              </a:rPr>
+              <a:t>EL RECORRIDO VERTICAL QUE VALIDA CADA ENTREGA</a:t>
+            </a:r>
+            <a:endParaRPr lang="en-US" sz="1100" dirty="0"/>
+          </a:p>
+        </p:txBody>
+      </p:sp>
+      <p:sp>
+        <p:nvSpPr>
+          <p:cNvPr id="6" name="Shape 4"/>
+          <p:cNvSpPr/>
+          <p:nvPr/>
+        </p:nvSpPr>
+        <p:spPr>
+          <a:xfrm>
+            <a:off x="548640" y="2560320"/>
+            <a:ext cx="1947672" cy="777240"/>
+          </a:xfrm>
+          <a:prstGeom prst="roundRect">
+            <a:avLst>
+              <a:gd name="adj" fmla="val 10588"/>
+            </a:avLst>
+          </a:prstGeom>
+          <a:solidFill>
+            <a:srgbClr val="1B4B48"/>
+          </a:solidFill>
+          <a:ln w="12700">
+            <a:solidFill>
+              <a:srgbClr val="7FC8BE"/>
+            </a:solidFill>
+            <a:prstDash val="solid"/>
+          </a:ln>
+        </p:spPr>
+      </p:sp>
+      <p:sp>
+        <p:nvSpPr>
+          <p:cNvPr id="7" name="Text 5"/>
+          <p:cNvSpPr/>
+          <p:nvPr/>
+        </p:nvSpPr>
+        <p:spPr>
+          <a:xfrm>
+            <a:off x="548640" y="2560320"/>
+            <a:ext cx="1947672" cy="777240"/>
+          </a:xfrm>
+          <a:prstGeom prst="rect">
+            <a:avLst/>
+          </a:prstGeom>
+          <a:noFill/>
+          <a:ln/>
+        </p:spPr>
+        <p:txBody>
+          <a:bodyPr wrap="square" lIns="0" tIns="0" rIns="0" bIns="0" rtlCol="0" anchor="ctr"/>
+          <a:lstStyle/>
+          <a:p>
+            <a:pPr algn="ctr" indent="0" marL="0">
+              <a:buNone/>
+            </a:pPr>
+            <a:r>
+              <a:rPr lang="en-US" sz="1300" b="1" dirty="0">
+                <a:solidFill>
+                  <a:srgbClr val="FFFFFF"/>
+                </a:solidFill>
+                <a:latin typeface="Calibri" pitchFamily="34" charset="0"/>
+                <a:ea typeface="Calibri" pitchFamily="34" charset="-122"/>
+                <a:cs typeface="Calibri" pitchFamily="34" charset="-120"/>
+              </a:rPr>
+              <a:t>Frontend</a:t>
+            </a:r>
+            <a:endParaRPr lang="en-US" sz="1300" dirty="0"/>
+          </a:p>
+        </p:txBody>
+      </p:sp>
+      <p:sp>
+        <p:nvSpPr>
+          <p:cNvPr id="8" name="Shape 6"/>
+          <p:cNvSpPr/>
+          <p:nvPr/>
+        </p:nvSpPr>
+        <p:spPr>
+          <a:xfrm>
+            <a:off x="2542032" y="2825496"/>
+            <a:ext cx="237744" cy="237744"/>
+          </a:xfrm>
+          <a:prstGeom prst="rightArrow">
+            <a:avLst/>
+          </a:prstGeom>
+          <a:solidFill>
+            <a:srgbClr val="7FC8BE"/>
+          </a:solidFill>
+          <a:ln w="6350">
+            <a:solidFill>
+              <a:srgbClr val="7FC8BE"/>
+            </a:solidFill>
+            <a:prstDash val="solid"/>
+          </a:ln>
+        </p:spPr>
+      </p:sp>
+      <p:sp>
+        <p:nvSpPr>
+          <p:cNvPr id="9" name="Shape 7"/>
+          <p:cNvSpPr/>
+          <p:nvPr/>
+        </p:nvSpPr>
+        <p:spPr>
+          <a:xfrm>
+            <a:off x="2825496" y="2560320"/>
+            <a:ext cx="1947672" cy="777240"/>
+          </a:xfrm>
+          <a:prstGeom prst="roundRect">
+            <a:avLst>
+              <a:gd name="adj" fmla="val 10588"/>
+            </a:avLst>
+          </a:prstGeom>
+          <a:solidFill>
+            <a:srgbClr val="2E7B72"/>
+          </a:solidFill>
+          <a:ln w="12700">
+            <a:solidFill>
+              <a:srgbClr val="7FC8BE"/>
+            </a:solidFill>
+            <a:prstDash val="solid"/>
+          </a:ln>
+        </p:spPr>
+      </p:sp>
+      <p:sp>
+        <p:nvSpPr>
+          <p:cNvPr id="10" name="Text 8"/>
+          <p:cNvSpPr/>
+          <p:nvPr/>
+        </p:nvSpPr>
+        <p:spPr>
+          <a:xfrm>
+            <a:off x="2825496" y="2560320"/>
+            <a:ext cx="1947672" cy="777240"/>
+          </a:xfrm>
+          <a:prstGeom prst="rect">
+            <a:avLst/>
+          </a:prstGeom>
+          <a:noFill/>
+          <a:ln/>
+        </p:spPr>
+        <p:txBody>
+          <a:bodyPr wrap="square" lIns="0" tIns="0" rIns="0" bIns="0" rtlCol="0" anchor="ctr"/>
+          <a:lstStyle/>
+          <a:p>
+            <a:pPr algn="ctr" indent="0" marL="0">
+              <a:buNone/>
+            </a:pPr>
+            <a:r>
+              <a:rPr lang="en-US" sz="1300" b="1" dirty="0">
+                <a:solidFill>
+                  <a:srgbClr val="FFFFFF"/>
+                </a:solidFill>
+                <a:latin typeface="Calibri" pitchFamily="34" charset="0"/>
+                <a:ea typeface="Calibri" pitchFamily="34" charset="-122"/>
+                <a:cs typeface="Calibri" pitchFamily="34" charset="-120"/>
+              </a:rPr>
+              <a:t>API autenticada</a:t>
+            </a:r>
+            <a:endParaRPr lang="en-US" sz="1300" dirty="0"/>
+          </a:p>
+        </p:txBody>
+      </p:sp>
+      <p:sp>
+        <p:nvSpPr>
+          <p:cNvPr id="11" name="Shape 9"/>
+          <p:cNvSpPr/>
+          <p:nvPr/>
+        </p:nvSpPr>
+        <p:spPr>
+          <a:xfrm>
+            <a:off x="4818888" y="2825496"/>
+            <a:ext cx="237744" cy="237744"/>
+          </a:xfrm>
+          <a:prstGeom prst="rightArrow">
+            <a:avLst/>
+          </a:prstGeom>
+          <a:solidFill>
+            <a:srgbClr val="7FC8BE"/>
+          </a:solidFill>
+          <a:ln w="6350">
+            <a:solidFill>
+              <a:srgbClr val="7FC8BE"/>
+            </a:solidFill>
+            <a:prstDash val="solid"/>
+          </a:ln>
+        </p:spPr>
+      </p:sp>
+      <p:sp>
+        <p:nvSpPr>
+          <p:cNvPr id="12" name="Shape 10"/>
+          <p:cNvSpPr/>
+          <p:nvPr/>
+        </p:nvSpPr>
+        <p:spPr>
+          <a:xfrm>
+            <a:off x="5102352" y="2560320"/>
+            <a:ext cx="1947672" cy="777240"/>
+          </a:xfrm>
+          <a:prstGeom prst="roundRect">
+            <a:avLst>
+              <a:gd name="adj" fmla="val 10588"/>
+            </a:avLst>
+          </a:prstGeom>
+          <a:solidFill>
+            <a:srgbClr val="2E7B72"/>
+          </a:solidFill>
+          <a:ln w="12700">
+            <a:solidFill>
+              <a:srgbClr val="7FC8BE"/>
+            </a:solidFill>
+            <a:prstDash val="solid"/>
+          </a:ln>
+        </p:spPr>
+      </p:sp>
+      <p:sp>
+        <p:nvSpPr>
+          <p:cNvPr id="13" name="Text 11"/>
+          <p:cNvSpPr/>
+          <p:nvPr/>
+        </p:nvSpPr>
+        <p:spPr>
+          <a:xfrm>
+            <a:off x="5102352" y="2560320"/>
+            <a:ext cx="1947672" cy="777240"/>
+          </a:xfrm>
+          <a:prstGeom prst="rect">
+            <a:avLst/>
+          </a:prstGeom>
+          <a:noFill/>
+          <a:ln/>
+        </p:spPr>
+        <p:txBody>
+          <a:bodyPr wrap="square" lIns="0" tIns="0" rIns="0" bIns="0" rtlCol="0" anchor="ctr"/>
+          <a:lstStyle/>
+          <a:p>
+            <a:pPr algn="ctr" indent="0" marL="0">
+              <a:buNone/>
+            </a:pPr>
+            <a:r>
+              <a:rPr lang="en-US" sz="1300" b="1" dirty="0">
+                <a:solidFill>
+                  <a:srgbClr val="FFFFFF"/>
+                </a:solidFill>
+                <a:latin typeface="Calibri" pitchFamily="34" charset="0"/>
+                <a:ea typeface="Calibri" pitchFamily="34" charset="-122"/>
+                <a:cs typeface="Calibri" pitchFamily="34" charset="-120"/>
+              </a:rPr>
+              <a:t>Aplicación</a:t>
+            </a:r>
+            <a:endParaRPr lang="en-US" sz="1300" dirty="0"/>
+          </a:p>
+        </p:txBody>
+      </p:sp>
+      <p:sp>
+        <p:nvSpPr>
+          <p:cNvPr id="14" name="Shape 12"/>
+          <p:cNvSpPr/>
+          <p:nvPr/>
+        </p:nvSpPr>
+        <p:spPr>
+          <a:xfrm>
+            <a:off x="7095744" y="2825496"/>
+            <a:ext cx="237744" cy="237744"/>
+          </a:xfrm>
+          <a:prstGeom prst="rightArrow">
+            <a:avLst/>
+          </a:prstGeom>
+          <a:solidFill>
+            <a:srgbClr val="7FC8BE"/>
+          </a:solidFill>
+          <a:ln w="6350">
+            <a:solidFill>
+              <a:srgbClr val="7FC8BE"/>
+            </a:solidFill>
+            <a:prstDash val="solid"/>
+          </a:ln>
+        </p:spPr>
+      </p:sp>
+      <p:sp>
+        <p:nvSpPr>
+          <p:cNvPr id="15" name="Shape 13"/>
+          <p:cNvSpPr/>
+          <p:nvPr/>
+        </p:nvSpPr>
+        <p:spPr>
+          <a:xfrm>
+            <a:off x="7379208" y="2560320"/>
+            <a:ext cx="1947672" cy="777240"/>
+          </a:xfrm>
+          <a:prstGeom prst="roundRect">
+            <a:avLst>
+              <a:gd name="adj" fmla="val 10588"/>
+            </a:avLst>
+          </a:prstGeom>
+          <a:solidFill>
+            <a:srgbClr val="2E7B72"/>
+          </a:solidFill>
+          <a:ln w="12700">
+            <a:solidFill>
+              <a:srgbClr val="7FC8BE"/>
+            </a:solidFill>
+            <a:prstDash val="solid"/>
+          </a:ln>
+        </p:spPr>
+      </p:sp>
+      <p:sp>
+        <p:nvSpPr>
+          <p:cNvPr id="16" name="Text 14"/>
+          <p:cNvSpPr/>
+          <p:nvPr/>
+        </p:nvSpPr>
+        <p:spPr>
+          <a:xfrm>
+            <a:off x="7379208" y="2560320"/>
+            <a:ext cx="1947672" cy="777240"/>
+          </a:xfrm>
+          <a:prstGeom prst="rect">
+            <a:avLst/>
+          </a:prstGeom>
+          <a:noFill/>
+          <a:ln/>
+        </p:spPr>
+        <p:txBody>
+          <a:bodyPr wrap="square" lIns="0" tIns="0" rIns="0" bIns="0" rtlCol="0" anchor="ctr"/>
+          <a:lstStyle/>
+          <a:p>
+            <a:pPr algn="ctr" indent="0" marL="0">
+              <a:buNone/>
+            </a:pPr>
+            <a:r>
+              <a:rPr lang="en-US" sz="1300" b="1" dirty="0">
+                <a:solidFill>
+                  <a:srgbClr val="FFFFFF"/>
+                </a:solidFill>
+                <a:latin typeface="Calibri" pitchFamily="34" charset="0"/>
+                <a:ea typeface="Calibri" pitchFamily="34" charset="-122"/>
+                <a:cs typeface="Calibri" pitchFamily="34" charset="-120"/>
+              </a:rPr>
+              <a:t>Dominio</a:t>
+            </a:r>
+            <a:endParaRPr lang="en-US" sz="1300" dirty="0"/>
+          </a:p>
+        </p:txBody>
+      </p:sp>
+      <p:sp>
+        <p:nvSpPr>
+          <p:cNvPr id="17" name="Shape 15"/>
+          <p:cNvSpPr/>
+          <p:nvPr/>
+        </p:nvSpPr>
+        <p:spPr>
+          <a:xfrm>
+            <a:off x="9372600" y="2825496"/>
+            <a:ext cx="237744" cy="237744"/>
+          </a:xfrm>
+          <a:prstGeom prst="rightArrow">
+            <a:avLst/>
+          </a:prstGeom>
+          <a:solidFill>
+            <a:srgbClr val="7FC8BE"/>
+          </a:solidFill>
+          <a:ln w="6350">
+            <a:solidFill>
+              <a:srgbClr val="7FC8BE"/>
+            </a:solidFill>
+            <a:prstDash val="solid"/>
+          </a:ln>
+        </p:spPr>
+      </p:sp>
+      <p:sp>
+        <p:nvSpPr>
+          <p:cNvPr id="18" name="Shape 16"/>
+          <p:cNvSpPr/>
+          <p:nvPr/>
+        </p:nvSpPr>
+        <p:spPr>
+          <a:xfrm>
+            <a:off x="9656064" y="2560320"/>
+            <a:ext cx="1947672" cy="777240"/>
+          </a:xfrm>
+          <a:prstGeom prst="roundRect">
+            <a:avLst>
+              <a:gd name="adj" fmla="val 10588"/>
+            </a:avLst>
+          </a:prstGeom>
+          <a:solidFill>
+            <a:srgbClr val="1B4B48"/>
+          </a:solidFill>
+          <a:ln w="12700">
+            <a:solidFill>
+              <a:srgbClr val="7FC8BE"/>
+            </a:solidFill>
+            <a:prstDash val="solid"/>
+          </a:ln>
+        </p:spPr>
+      </p:sp>
+      <p:sp>
+        <p:nvSpPr>
+          <p:cNvPr id="19" name="Text 17"/>
+          <p:cNvSpPr/>
+          <p:nvPr/>
+        </p:nvSpPr>
+        <p:spPr>
+          <a:xfrm>
+            <a:off x="9656064" y="2560320"/>
+            <a:ext cx="1947672" cy="777240"/>
+          </a:xfrm>
+          <a:prstGeom prst="rect">
+            <a:avLst/>
+          </a:prstGeom>
+          <a:noFill/>
+          <a:ln/>
+        </p:spPr>
+        <p:txBody>
+          <a:bodyPr wrap="square" lIns="0" tIns="0" rIns="0" bIns="0" rtlCol="0" anchor="ctr"/>
+          <a:lstStyle/>
+          <a:p>
+            <a:pPr algn="ctr" indent="0" marL="0">
+              <a:buNone/>
+            </a:pPr>
+            <a:r>
+              <a:rPr lang="en-US" sz="1300" b="1" dirty="0">
+                <a:solidFill>
+                  <a:srgbClr val="FFFFFF"/>
+                </a:solidFill>
+                <a:latin typeface="Calibri" pitchFamily="34" charset="0"/>
+                <a:ea typeface="Calibri" pitchFamily="34" charset="-122"/>
+                <a:cs typeface="Calibri" pitchFamily="34" charset="-120"/>
+              </a:rPr>
+              <a:t>PostgreSQL</a:t>
+            </a:r>
+            <a:endParaRPr lang="en-US" sz="1300" dirty="0"/>
+          </a:p>
+        </p:txBody>
+      </p:sp>
+      <p:sp>
+        <p:nvSpPr>
+          <p:cNvPr id="20" name="Shape 18"/>
+          <p:cNvSpPr/>
+          <p:nvPr/>
+        </p:nvSpPr>
+        <p:spPr>
+          <a:xfrm>
+            <a:off x="548640" y="3931920"/>
+            <a:ext cx="5349240" cy="1600200"/>
+          </a:xfrm>
+          <a:prstGeom prst="roundRect">
+            <a:avLst>
+              <a:gd name="adj" fmla="val 5143"/>
+            </a:avLst>
+          </a:prstGeom>
+          <a:solidFill>
+            <a:srgbClr val="163A38"/>
+          </a:solidFill>
+          <a:ln w="12700">
+            <a:solidFill>
+              <a:srgbClr val="2F5754"/>
+            </a:solidFill>
+            <a:prstDash val="solid"/>
+          </a:ln>
+        </p:spPr>
+      </p:sp>
+      <p:sp>
+        <p:nvSpPr>
+          <p:cNvPr id="21" name="Text 19"/>
+          <p:cNvSpPr/>
+          <p:nvPr/>
+        </p:nvSpPr>
+        <p:spPr>
+          <a:xfrm>
+            <a:off x="896112" y="4160520"/>
+            <a:ext cx="4663440" cy="329184"/>
+          </a:xfrm>
+          <a:prstGeom prst="rect">
+            <a:avLst/>
+          </a:prstGeom>
+          <a:noFill/>
+          <a:ln/>
+        </p:spPr>
+        <p:txBody>
+          <a:bodyPr wrap="square" lIns="0" tIns="0" rIns="0" bIns="0" rtlCol="0" anchor="ctr"/>
+          <a:lstStyle/>
+          <a:p>
+            <a:pPr indent="0" marL="0">
+              <a:buNone/>
+            </a:pPr>
+            <a:r>
+              <a:rPr lang="en-US" sz="1700" b="1" dirty="0">
+                <a:solidFill>
+                  <a:srgbClr val="FFFFFF"/>
+                </a:solidFill>
+                <a:latin typeface="Cambria" pitchFamily="34" charset="0"/>
+                <a:ea typeface="Cambria" pitchFamily="34" charset="-122"/>
+                <a:cs typeface="Cambria" pitchFamily="34" charset="-120"/>
+              </a:rPr>
+              <a:t>Lo entregado</a:t>
+            </a:r>
+            <a:endParaRPr lang="en-US" sz="1700" dirty="0"/>
+          </a:p>
+        </p:txBody>
+      </p:sp>
+      <p:sp>
+        <p:nvSpPr>
+          <p:cNvPr id="22" name="Text 20"/>
+          <p:cNvSpPr/>
+          <p:nvPr/>
+        </p:nvSpPr>
+        <p:spPr>
+          <a:xfrm>
+            <a:off x="896112" y="4572000"/>
+            <a:ext cx="4663440" cy="822960"/>
+          </a:xfrm>
+          <a:prstGeom prst="rect">
+            <a:avLst/>
+          </a:prstGeom>
+          <a:noFill/>
+          <a:ln/>
+        </p:spPr>
+        <p:txBody>
+          <a:bodyPr wrap="square" lIns="0" tIns="0" rIns="0" bIns="0" rtlCol="0" anchor="t"/>
+          <a:lstStyle/>
+          <a:p>
+            <a:pPr indent="0" marL="0">
+              <a:lnSpc>
+                <a:spcPts val="1800"/>
+              </a:lnSpc>
+              <a:buNone/>
+            </a:pPr>
+            <a:r>
+              <a:rPr lang="en-US" sz="1250" dirty="0">
+                <a:solidFill>
+                  <a:srgbClr val="BFD3D0"/>
+                </a:solidFill>
+                <a:latin typeface="Calibri" pitchFamily="34" charset="0"/>
+                <a:ea typeface="Calibri" pitchFamily="34" charset="-122"/>
+                <a:cs typeface="Calibri" pitchFamily="34" charset="-120"/>
+              </a:rPr>
+              <a:t>El core completo, cuatro módulos, el cierre de huecos y el despliegue: DRP corre en producción desde el 2026-08-21. 107 operaciones en el contrato, 31 tablas con Row-Level Security y once recorridos verticales.</a:t>
+            </a:r>
+            <a:endParaRPr lang="en-US" sz="1250" dirty="0"/>
+          </a:p>
+        </p:txBody>
+      </p:sp>
+      <p:sp>
+        <p:nvSpPr>
+          <p:cNvPr id="23" name="Shape 21"/>
+          <p:cNvSpPr/>
+          <p:nvPr/>
+        </p:nvSpPr>
+        <p:spPr>
+          <a:xfrm>
+            <a:off x="6291072" y="3931920"/>
+            <a:ext cx="5349240" cy="1600200"/>
+          </a:xfrm>
+          <a:prstGeom prst="roundRect">
+            <a:avLst>
+              <a:gd name="adj" fmla="val 5143"/>
+            </a:avLst>
+          </a:prstGeom>
+          <a:solidFill>
+            <a:srgbClr val="163A38"/>
+          </a:solidFill>
+          <a:ln w="12700">
+            <a:solidFill>
+              <a:srgbClr val="2F5754"/>
+            </a:solidFill>
+            <a:prstDash val="solid"/>
+          </a:ln>
+        </p:spPr>
+      </p:sp>
+      <p:sp>
+        <p:nvSpPr>
+          <p:cNvPr id="24" name="Text 22"/>
+          <p:cNvSpPr/>
+          <p:nvPr/>
+        </p:nvSpPr>
+        <p:spPr>
+          <a:xfrm>
+            <a:off x="6638544" y="4160520"/>
+            <a:ext cx="4663440" cy="329184"/>
+          </a:xfrm>
+          <a:prstGeom prst="rect">
+            <a:avLst/>
+          </a:prstGeom>
+          <a:noFill/>
+          <a:ln/>
+        </p:spPr>
+        <p:txBody>
+          <a:bodyPr wrap="square" lIns="0" tIns="0" rIns="0" bIns="0" rtlCol="0" anchor="ctr"/>
+          <a:lstStyle/>
+          <a:p>
+            <a:pPr indent="0" marL="0">
+              <a:buNone/>
+            </a:pPr>
+            <a:r>
+              <a:rPr lang="en-US" sz="1700" b="1" dirty="0">
+                <a:solidFill>
+                  <a:srgbClr val="FFFFFF"/>
+                </a:solidFill>
+                <a:latin typeface="Cambria" pitchFamily="34" charset="0"/>
+                <a:ea typeface="Cambria" pitchFamily="34" charset="-122"/>
+                <a:cs typeface="Cambria" pitchFamily="34" charset="-120"/>
+              </a:rPr>
+              <a:t>Lo que queda</a:t>
+            </a:r>
+            <a:endParaRPr lang="en-US" sz="1700" dirty="0"/>
+          </a:p>
+        </p:txBody>
+      </p:sp>
+      <p:sp>
+        <p:nvSpPr>
+          <p:cNvPr id="25" name="Text 23"/>
+          <p:cNvSpPr/>
+          <p:nvPr/>
+        </p:nvSpPr>
+        <p:spPr>
+          <a:xfrm>
+            <a:off x="6638544" y="4572000"/>
+            <a:ext cx="4663440" cy="822960"/>
+          </a:xfrm>
+          <a:prstGeom prst="rect">
+            <a:avLst/>
+          </a:prstGeom>
+          <a:noFill/>
+          <a:ln/>
+        </p:spPr>
+        <p:txBody>
+          <a:bodyPr wrap="square" lIns="0" tIns="0" rIns="0" bIns="0" rtlCol="0" anchor="t"/>
+          <a:lstStyle/>
+          <a:p>
+            <a:pPr indent="0" marL="0">
+              <a:lnSpc>
+                <a:spcPts val="1800"/>
+              </a:lnSpc>
+              <a:buNone/>
+            </a:pPr>
+            <a:r>
+              <a:rPr lang="en-US" sz="1250" dirty="0">
+                <a:solidFill>
+                  <a:srgbClr val="BFD3D0"/>
+                </a:solidFill>
+                <a:latin typeface="Calibri" pitchFamily="34" charset="0"/>
+                <a:ea typeface="Calibri" pitchFamily="34" charset="-122"/>
+                <a:cs typeface="Calibri" pitchFamily="34" charset="-120"/>
+              </a:rPr>
+              <a:t>Los nueve módulos restantes, por orden de prioridad. Ninguno pide arquitectura nueva: el camino de un módulo está recorrido cuatro veces.</a:t>
+            </a:r>
+            <a:endParaRPr lang="en-US" sz="1250" dirty="0"/>
+          </a:p>
+        </p:txBody>
+      </p:sp>
+      <p:sp>
+        <p:nvSpPr>
+          <p:cNvPr id="26" name="Text 24"/>
+          <p:cNvSpPr/>
+          <p:nvPr/>
+        </p:nvSpPr>
+        <p:spPr>
+          <a:xfrm>
+            <a:off x="548640" y="5806440"/>
+            <a:ext cx="11094415" cy="320040"/>
+          </a:xfrm>
+          <a:prstGeom prst="rect">
+            <a:avLst/>
+          </a:prstGeom>
+          <a:noFill/>
+          <a:ln/>
+        </p:spPr>
+        <p:txBody>
+          <a:bodyPr wrap="square" lIns="0" tIns="0" rIns="0" bIns="0" rtlCol="0" anchor="ctr"/>
+          <a:lstStyle/>
+          <a:p>
+            <a:pPr indent="0" marL="0">
+              <a:buNone/>
+            </a:pPr>
+            <a:r>
+              <a:rPr lang="en-US" sz="1100" dirty="0">
+                <a:solidFill>
+                  <a:srgbClr val="7E9895"/>
+                </a:solidFill>
+                <a:latin typeface="Calibri" pitchFamily="34" charset="0"/>
+                <a:ea typeface="Calibri" pitchFamily="34" charset="-122"/>
+                <a:cs typeface="Calibri" pitchFamily="34" charset="-120"/>
+              </a:rPr>
+              <a:t>Fuente: README.md · documento vivo, última actualización 2026-08-21</a:t>
+            </a:r>
+            <a:endParaRPr lang="en-US" sz="1100" dirty="0"/>
+          </a:p>
+        </p:txBody>
+      </p:sp>
+      <p:sp>
+        <p:nvSpPr>
+          <p:cNvPr id="27" name="Text 25"/>
+          <p:cNvSpPr/>
+          <p:nvPr/>
+        </p:nvSpPr>
+        <p:spPr>
+          <a:xfrm>
+            <a:off x="548640" y="6382512"/>
+            <a:ext cx="5486400" cy="256032"/>
+          </a:xfrm>
+          <a:prstGeom prst="rect">
+            <a:avLst/>
+          </a:prstGeom>
+          <a:noFill/>
+          <a:ln/>
+        </p:spPr>
+        <p:txBody>
+          <a:bodyPr wrap="square" lIns="0" tIns="0" rIns="0" bIns="0" rtlCol="0" anchor="ctr"/>
+          <a:lstStyle/>
+          <a:p>
+            <a:pPr indent="0" marL="0">
+              <a:buNone/>
+            </a:pPr>
+            <a:r>
+              <a:rPr lang="en-US" sz="900" dirty="0">
+                <a:solidFill>
+                  <a:srgbClr val="6E8C88"/>
+                </a:solidFill>
+                <a:latin typeface="Calibri" pitchFamily="34" charset="0"/>
+                <a:ea typeface="Calibri" pitchFamily="34" charset="-122"/>
+                <a:cs typeface="Calibri" pitchFamily="34" charset="-120"/>
+              </a:rPr>
+              <a:t>DRP · Domestic Resource Planning</a:t>
+            </a:r>
+            <a:endParaRPr lang="en-US" sz="900" dirty="0"/>
+          </a:p>
+        </p:txBody>
+      </p:sp>
+      <p:sp>
+        <p:nvSpPr>
+          <p:cNvPr id="28" name="Text 26"/>
+          <p:cNvSpPr/>
+          <p:nvPr/>
+        </p:nvSpPr>
+        <p:spPr>
+          <a:xfrm>
+            <a:off x="10545775" y="6382512"/>
+            <a:ext cx="1097280" cy="256032"/>
+          </a:xfrm>
+          <a:prstGeom prst="rect">
+            <a:avLst/>
+          </a:prstGeom>
+          <a:noFill/>
+          <a:ln/>
+        </p:spPr>
+        <p:txBody>
+          <a:bodyPr wrap="square" lIns="0" tIns="0" rIns="0" bIns="0" rtlCol="0" anchor="ctr"/>
+          <a:lstStyle/>
+          <a:p>
+            <a:pPr algn="r" indent="0" marL="0">
+              <a:buNone/>
+            </a:pPr>
+            <a:r>
+              <a:rPr lang="en-US" sz="900" dirty="0">
+                <a:solidFill>
+                  <a:srgbClr val="6E8C88"/>
+                </a:solidFill>
+                <a:latin typeface="Calibri" pitchFamily="34" charset="0"/>
+                <a:ea typeface="Calibri" pitchFamily="34" charset="-122"/>
+                <a:cs typeface="Calibri" pitchFamily="34" charset="-120"/>
+              </a:rPr>
+              <a:t>19</a:t>
             </a:r>
             <a:endParaRPr lang="en-US" sz="900" dirty="0"/>
           </a:p>
